--- a/projects/drug-information-practical/slides/ch09-pharmacovigilance-medication-errors.pptx
+++ b/projects/drug-information-practical/slides/ch09-pharmacovigilance-medication-errors.pptx
@@ -28,6 +28,7 @@
     <p:sldId id="276" r:id="rId28"/>
     <p:sldId id="277" r:id="rId29"/>
     <p:sldId id="278" r:id="rId30"/>
+    <p:sldId id="279" r:id="rId31"/>
   </p:sldIdLst>
   <p:sldSz cx="12191695" cy="6858000" type="screen4x3"/>
   <p:notesSz cx="6858000" cy="9144000"/>
@@ -664,7 +665,7 @@
           <a:lstStyle/>
           <a:p>
             <a:r>
-              <a:t>Answer B: Trials are too small and short to find rare reactions. A, C and D are false.</a:t>
+              <a:t>Regulators also prevent errors. They review drug labels and names before approval, and reject names that look or sound like existing ones. They encourage pharmacists and other professionals to report medication errors.</a:t>
             </a:r>
           </a:p>
         </p:txBody>
@@ -734,7 +735,7 @@
           <a:lstStyle/>
           <a:p>
             <a:r>
-              <a:t>Answer D: Suspicion is enough to report. A and B delay safety signals; C is unsafe advice.</a:t>
+              <a:t>Answer B: Trials are too small and short to find rare reactions. A, C and D are false.</a:t>
             </a:r>
           </a:p>
         </p:txBody>
@@ -804,7 +805,7 @@
           <a:lstStyle/>
           <a:p>
             <a:r>
-              <a:t>Answer A: The DTC identifies and monitors high-risk medicines. B, C and D belong to others.</a:t>
+              <a:t>Answer D: Suspicion is enough to report. A and B delay safety signals; C is unsafe advice.</a:t>
             </a:r>
           </a:p>
         </p:txBody>
@@ -874,7 +875,7 @@
           <a:lstStyle/>
           <a:p>
             <a:r>
-              <a:t>Answer C: A missed dose is an error of omission. A is doing the wrong thing; B and D are ADRs.</a:t>
+              <a:t>Answer A: The DTC identifies and monitors high-risk medicines. B, C and D belong to others.</a:t>
             </a:r>
           </a:p>
         </p:txBody>
@@ -944,7 +945,7 @@
           <a:lstStyle/>
           <a:p>
             <a:r>
-              <a:t>Answer B: Tall man letters and separation reduce LASA errors. A, C and D increase risk.</a:t>
+              <a:t>Answer C: A missed dose is an error of omission. A is doing the wrong thing; B and D are ADRs.</a:t>
             </a:r>
           </a:p>
         </p:txBody>
@@ -970,6 +971,76 @@
 </file>
 
 <file path=ppt/notesSlides/notesSlide16.xml><?xml version="1.0" encoding="utf-8"?>
+<p:notes xmlns:a="http://schemas.openxmlformats.org/drawingml/2006/main" xmlns:p="http://schemas.openxmlformats.org/presentationml/2006/main" xmlns:r="http://schemas.openxmlformats.org/officeDocument/2006/relationships">
+  <p:cSld>
+    <p:spTree>
+      <p:nvGrpSpPr>
+        <p:cNvPr id="1" name=""/>
+        <p:cNvGrpSpPr/>
+        <p:nvPr/>
+      </p:nvGrpSpPr>
+      <p:grpSpPr>
+        <a:xfrm>
+          <a:off x="0" y="0"/>
+          <a:ext cx="0" cy="0"/>
+          <a:chOff x="0" y="0"/>
+          <a:chExt cx="0" cy="0"/>
+        </a:xfrm>
+      </p:grpSpPr>
+      <p:sp>
+        <p:nvSpPr>
+          <p:cNvPr id="2" name="Slide Image Placeholder 1"/>
+          <p:cNvSpPr>
+            <a:spLocks noGrp="1"/>
+          </p:cNvSpPr>
+          <p:nvPr>
+            <p:ph type="sldImg" idx="2"/>
+          </p:nvPr>
+        </p:nvSpPr>
+        <p:spPr/>
+      </p:sp>
+      <p:sp>
+        <p:nvSpPr>
+          <p:cNvPr id="3" name="Notes Placeholder 2"/>
+          <p:cNvSpPr>
+            <a:spLocks noGrp="1"/>
+          </p:cNvSpPr>
+          <p:nvPr>
+            <p:ph type="body" idx="3" sz="quarter"/>
+          </p:nvPr>
+        </p:nvSpPr>
+        <p:spPr/>
+        <p:txBody>
+          <a:bodyPr/>
+          <a:lstStyle/>
+          <a:p>
+            <a:r>
+              <a:t>Answer B: Tall man letters and separation reduce LASA errors. A, C and D increase risk.</a:t>
+            </a:r>
+          </a:p>
+        </p:txBody>
+      </p:sp>
+      <p:sp>
+        <p:nvSpPr>
+          <p:cNvPr id="4" name="Slide Number Placeholder 3"/>
+          <p:cNvSpPr>
+            <a:spLocks noGrp="1"/>
+          </p:cNvSpPr>
+          <p:nvPr>
+            <p:ph type="sldNum" idx="5" sz="quarter"/>
+          </p:nvPr>
+        </p:nvSpPr>
+        <p:spPr/>
+      </p:sp>
+    </p:spTree>
+  </p:cSld>
+  <p:clrMapOvr>
+    <a:masterClrMapping/>
+  </p:clrMapOvr>
+</p:notes>
+</file>
+
+<file path=ppt/notesSlides/notesSlide17.xml><?xml version="1.0" encoding="utf-8"?>
 <p:notes xmlns:a="http://schemas.openxmlformats.org/drawingml/2006/main" xmlns:p="http://schemas.openxmlformats.org/presentationml/2006/main" xmlns:r="http://schemas.openxmlformats.org/officeDocument/2006/relationships">
   <p:cSld>
     <p:spTree>
@@ -4614,7 +4685,7 @@
             <a:r>
               <a:rPr sz="28000" i="0" b="1">
                 <a:solidFill>
-                  <a:srgbClr val="8C3A22"/>
+                  <a:srgbClr val="8B3C25"/>
                 </a:solidFill>
                 <a:latin typeface="Cambria"/>
               </a:rPr>
@@ -4707,7 +4778,7 @@
             <a:r>
               <a:rPr sz="1200" i="0" b="1" spc="200">
                 <a:solidFill>
-                  <a:srgbClr val="F3E6D8"/>
+                  <a:srgbClr val="F2E5E1"/>
                 </a:solidFill>
                 <a:latin typeface="Calibri"/>
               </a:rPr>
@@ -4741,7 +4812,7 @@
             <a:r>
               <a:rPr sz="1400" i="0" b="1" spc="200">
                 <a:solidFill>
-                  <a:srgbClr val="F3E6D8"/>
+                  <a:srgbClr val="F2E5E1"/>
                 </a:solidFill>
                 <a:latin typeface="Calibri"/>
               </a:rPr>
@@ -4773,7 +4844,7 @@
             <a:r>
               <a:rPr sz="2000" i="1" b="0">
                 <a:solidFill>
-                  <a:srgbClr val="F3E6D8"/>
+                  <a:srgbClr val="F2E5E1"/>
                 </a:solidFill>
                 <a:latin typeface="Cambria"/>
               </a:rPr>
@@ -4807,11 +4878,11 @@
             <a:r>
               <a:rPr sz="1300" i="0" b="0">
                 <a:solidFill>
-                  <a:srgbClr val="F3E6D8"/>
-                </a:solidFill>
-                <a:latin typeface="Calibri"/>
-              </a:rPr>
-              <a:t>45-minute practical section  ·  5 questions  ·  1 practice case</a:t>
+                  <a:srgbClr val="F2E5E1"/>
+                </a:solidFill>
+                <a:latin typeface="Calibri"/>
+              </a:rPr>
+              <a:t>45 minutes  ·  5 questions  ·  1 practice case</a:t>
             </a:r>
           </a:p>
         </p:txBody>
@@ -4879,7 +4950,7 @@
           </a:fontRef>
         </p:style>
         <p:txBody>
-          <a:bodyPr rtlCol="0" anchor="ctr" lIns="0" rIns="0"/>
+          <a:bodyPr rtlCol="0" anchor="ctr" lIns="0" rIns="0" tIns="0" bIns="0"/>
           <a:lstStyle/>
           <a:p>
             <a:pPr algn="ctr"/>
@@ -5056,16 +5127,64 @@
           </a:prstGeom>
         </p:spPr>
       </p:pic>
+      <p:sp>
+        <p:nvSpPr>
+          <p:cNvPr id="8" name="TextBox 7"/>
+          <p:cNvSpPr txBox="1"/>
+          <p:nvPr/>
+        </p:nvSpPr>
+        <p:spPr>
+          <a:xfrm>
+            <a:off x="548640" y="1554480"/>
+            <a:ext cx="11094415" cy="1092708"/>
+          </a:xfrm>
+          <a:prstGeom prst="rect">
+            <a:avLst/>
+          </a:prstGeom>
+          <a:noFill/>
+        </p:spPr>
+        <p:txBody>
+          <a:bodyPr wrap="square" anchor="t" lIns="0" rIns="0" tIns="0" bIns="0">
+            <a:spAutoFit/>
+          </a:bodyPr>
+          <a:lstStyle/>
+          <a:p>
+            <a:pPr>
+              <a:spcAft>
+                <a:spcPts val="800"/>
+              </a:spcAft>
+            </a:pPr>
+            <a:r>
+              <a:rPr sz="1800" i="0" b="1">
+                <a:solidFill>
+                  <a:srgbClr val="2B211C"/>
+                </a:solidFill>
+                <a:latin typeface="Calibri"/>
+              </a:rPr>
+              <a:t>Regulators</a:t>
+            </a:r>
+            <a:r>
+              <a:rPr sz="1800" i="0" b="0">
+                <a:solidFill>
+                  <a:srgbClr val="2B211C"/>
+                </a:solidFill>
+                <a:latin typeface="Calibri"/>
+              </a:rPr>
+              <a:t> also prevent errors. They review drug labels and names before approval, and reject names that look or sound like existing ones. They encourage pharmacists and other professionals to report medication errors.</a:t>
+            </a:r>
+          </a:p>
+        </p:txBody>
+      </p:sp>
       <p:graphicFrame>
         <p:nvGraphicFramePr>
-          <p:cNvPr id="8" name="Table 7"/>
+          <p:cNvPr id="9" name="Table 8"/>
           <p:cNvGraphicFramePr>
             <a:graphicFrameLocks noGrp="1"/>
           </p:cNvGraphicFramePr>
           <p:nvPr/>
         </p:nvGraphicFramePr>
         <p:xfrm>
-          <a:off x="548640" y="1600200"/>
+          <a:off x="548640" y="2830068"/>
           <a:ext cx="11094414" cy="3200400"/>
         </p:xfrm>
         <a:graphic>
@@ -5085,7 +5204,7 @@
                     <a:lstStyle/>
                     <a:p>
                       <a:r>
-                        <a:rPr sz="1700" i="0" b="1">
+                        <a:rPr sz="1500" i="0" b="1">
                           <a:solidFill>
                             <a:srgbClr val="FFFFFF"/>
                           </a:solidFill>
@@ -5107,7 +5226,7 @@
                     <a:lstStyle/>
                     <a:p>
                       <a:r>
-                        <a:rPr sz="1700" i="0" b="1">
+                        <a:rPr sz="1500" i="0" b="1">
                           <a:solidFill>
                             <a:srgbClr val="FFFFFF"/>
                           </a:solidFill>
@@ -5131,7 +5250,7 @@
                     <a:lstStyle/>
                     <a:p>
                       <a:r>
-                        <a:rPr sz="1800" i="0" b="1">
+                        <a:rPr sz="1600" i="0" b="1">
                           <a:solidFill>
                             <a:srgbClr val="2B211C"/>
                           </a:solidFill>
@@ -5153,7 +5272,7 @@
                     <a:lstStyle/>
                     <a:p>
                       <a:r>
-                        <a:rPr sz="1800" i="0" b="0">
+                        <a:rPr sz="1600" i="0" b="0">
                           <a:solidFill>
                             <a:srgbClr val="2B211C"/>
                           </a:solidFill>
@@ -5177,7 +5296,7 @@
                     <a:lstStyle/>
                     <a:p>
                       <a:r>
-                        <a:rPr sz="1800" i="0" b="1">
+                        <a:rPr sz="1600" i="0" b="1">
                           <a:solidFill>
                             <a:srgbClr val="2B211C"/>
                           </a:solidFill>
@@ -5189,7 +5308,7 @@
                   </a:txBody>
                   <a:tcPr marL="109728" marR="109728" marT="45720" marB="45720" anchor="ctr">
                     <a:solidFill>
-                      <a:srgbClr val="FBF3EE"/>
+                      <a:srgbClr val="FAF4F2"/>
                     </a:solidFill>
                   </a:tcPr>
                 </a:tc>
@@ -5199,7 +5318,7 @@
                     <a:lstStyle/>
                     <a:p>
                       <a:r>
-                        <a:rPr sz="1800" i="0" b="0">
+                        <a:rPr sz="1600" i="0" b="0">
                           <a:solidFill>
                             <a:srgbClr val="2B211C"/>
                           </a:solidFill>
@@ -5211,7 +5330,7 @@
                   </a:txBody>
                   <a:tcPr marL="109728" marR="109728" marT="45720" marB="45720" anchor="ctr">
                     <a:solidFill>
-                      <a:srgbClr val="FBF3EE"/>
+                      <a:srgbClr val="FAF4F2"/>
                     </a:solidFill>
                   </a:tcPr>
                 </a:tc>
@@ -5223,7 +5342,7 @@
                     <a:lstStyle/>
                     <a:p>
                       <a:r>
-                        <a:rPr sz="1800" i="0" b="1">
+                        <a:rPr sz="1600" i="0" b="1">
                           <a:solidFill>
                             <a:srgbClr val="2B211C"/>
                           </a:solidFill>
@@ -5245,7 +5364,7 @@
                     <a:lstStyle/>
                     <a:p>
                       <a:r>
-                        <a:rPr sz="1800" i="0" b="0">
+                        <a:rPr sz="1600" i="0" b="0">
                           <a:solidFill>
                             <a:srgbClr val="2B211C"/>
                           </a:solidFill>
@@ -5269,7 +5388,7 @@
                     <a:lstStyle/>
                     <a:p>
                       <a:r>
-                        <a:rPr sz="1800" i="0" b="1">
+                        <a:rPr sz="1600" i="0" b="1">
                           <a:solidFill>
                             <a:srgbClr val="2B211C"/>
                           </a:solidFill>
@@ -5281,7 +5400,7 @@
                   </a:txBody>
                   <a:tcPr marL="109728" marR="109728" marT="45720" marB="45720" anchor="ctr">
                     <a:solidFill>
-                      <a:srgbClr val="FBF3EE"/>
+                      <a:srgbClr val="FAF4F2"/>
                     </a:solidFill>
                   </a:tcPr>
                 </a:tc>
@@ -5291,7 +5410,7 @@
                     <a:lstStyle/>
                     <a:p>
                       <a:r>
-                        <a:rPr sz="1800" i="0" b="0">
+                        <a:rPr sz="1600" i="0" b="0">
                           <a:solidFill>
                             <a:srgbClr val="2B211C"/>
                           </a:solidFill>
@@ -5303,7 +5422,7 @@
                   </a:txBody>
                   <a:tcPr marL="109728" marR="109728" marT="45720" marB="45720" anchor="ctr">
                     <a:solidFill>
-                      <a:srgbClr val="FBF3EE"/>
+                      <a:srgbClr val="FAF4F2"/>
                     </a:solidFill>
                   </a:tcPr>
                 </a:tc>
@@ -5312,141 +5431,6 @@
           </a:graphicData>
         </a:graphic>
       </p:graphicFrame>
-      <p:sp>
-        <p:nvSpPr>
-          <p:cNvPr id="9" name="Rounded Rectangle 8"/>
-          <p:cNvSpPr/>
-          <p:nvPr/>
-        </p:nvSpPr>
-        <p:spPr>
-          <a:xfrm>
-            <a:off x="548640" y="4983480"/>
-            <a:ext cx="11094415" cy="1234440"/>
-          </a:xfrm>
-          <a:prstGeom prst="roundRect">
-            <a:avLst>
-              <a:gd name="adj" fmla="val 6000"/>
-            </a:avLst>
-          </a:prstGeom>
-          <a:solidFill>
-            <a:srgbClr val="FBEAEA"/>
-          </a:solidFill>
-          <a:ln>
-            <a:noFill/>
-          </a:ln>
-          <a:effectLst/>
-        </p:spPr>
-        <p:style>
-          <a:lnRef idx="1">
-            <a:schemeClr val="accent1"/>
-          </a:lnRef>
-          <a:fillRef idx="3">
-            <a:schemeClr val="accent1"/>
-          </a:fillRef>
-          <a:effectRef idx="2">
-            <a:schemeClr val="accent1"/>
-          </a:effectRef>
-          <a:fontRef idx="minor">
-            <a:schemeClr val="lt1"/>
-          </a:fontRef>
-        </p:style>
-        <p:txBody>
-          <a:bodyPr rtlCol="0" anchor="ctr"/>
-          <a:lstStyle/>
-          <a:p>
-            <a:pPr algn="ctr"/>
-          </a:p>
-        </p:txBody>
-      </p:sp>
-      <p:sp>
-        <p:nvSpPr>
-          <p:cNvPr id="10" name="Rounded Rectangle 9"/>
-          <p:cNvSpPr/>
-          <p:nvPr/>
-        </p:nvSpPr>
-        <p:spPr>
-          <a:xfrm>
-            <a:off x="822959" y="5212080"/>
-            <a:ext cx="900684" cy="310896"/>
-          </a:xfrm>
-          <a:prstGeom prst="roundRect">
-            <a:avLst>
-              <a:gd name="adj" fmla="val 50000"/>
-            </a:avLst>
-          </a:prstGeom>
-          <a:solidFill>
-            <a:srgbClr val="B3261E"/>
-          </a:solidFill>
-          <a:ln>
-            <a:noFill/>
-          </a:ln>
-          <a:effectLst/>
-        </p:spPr>
-        <p:style>
-          <a:lnRef idx="1">
-            <a:schemeClr val="accent1"/>
-          </a:lnRef>
-          <a:fillRef idx="3">
-            <a:schemeClr val="accent1"/>
-          </a:fillRef>
-          <a:effectRef idx="2">
-            <a:schemeClr val="accent1"/>
-          </a:effectRef>
-          <a:fontRef idx="minor">
-            <a:schemeClr val="lt1"/>
-          </a:fontRef>
-        </p:style>
-        <p:txBody>
-          <a:bodyPr rtlCol="0" anchor="ctr" lIns="0" rIns="0" tIns="0" bIns="0"/>
-          <a:lstStyle/>
-          <a:p>
-            <a:pPr algn="ctr"/>
-            <a:r>
-              <a:rPr sz="1050" i="0" b="1" spc="100">
-                <a:solidFill>
-                  <a:srgbClr val="FFFFFF"/>
-                </a:solidFill>
-                <a:latin typeface="Calibri"/>
-              </a:rPr>
-              <a:t>CAUTION</a:t>
-            </a:r>
-          </a:p>
-        </p:txBody>
-      </p:sp>
-      <p:sp>
-        <p:nvSpPr>
-          <p:cNvPr id="11" name="TextBox 10"/>
-          <p:cNvSpPr txBox="1"/>
-          <p:nvPr/>
-        </p:nvSpPr>
-        <p:spPr>
-          <a:xfrm>
-            <a:off x="822959" y="5669280"/>
-            <a:ext cx="10545775" cy="365760"/>
-          </a:xfrm>
-          <a:prstGeom prst="rect">
-            <a:avLst/>
-          </a:prstGeom>
-          <a:noFill/>
-        </p:spPr>
-        <p:txBody>
-          <a:bodyPr wrap="square" anchor="t" lIns="0" rIns="0" tIns="0" bIns="0">
-            <a:spAutoFit/>
-          </a:bodyPr>
-          <a:lstStyle/>
-          <a:p>
-            <a:r>
-              <a:rPr sz="1500" i="0" b="0">
-                <a:solidFill>
-                  <a:srgbClr val="2B211C"/>
-                </a:solidFill>
-                <a:latin typeface="Calibri"/>
-              </a:rPr>
-              <a:t>Report medication errors, even near misses. The aim is to fix the system, not to blame a person.</a:t>
-            </a:r>
-          </a:p>
-        </p:txBody>
-      </p:sp>
     </p:spTree>
   </p:cSld>
   <p:clrMapOvr>
@@ -5510,7 +5494,7 @@
           </a:fontRef>
         </p:style>
         <p:txBody>
-          <a:bodyPr rtlCol="0" anchor="ctr" lIns="0" rIns="0"/>
+          <a:bodyPr rtlCol="0" anchor="ctr" lIns="0" rIns="0" tIns="0" bIns="0"/>
           <a:lstStyle/>
           <a:p>
             <a:pPr algn="ctr"/>
@@ -5704,7 +5688,7 @@
             </a:avLst>
           </a:prstGeom>
           <a:solidFill>
-            <a:srgbClr val="FBF3EE"/>
+            <a:srgbClr val="FBEAEA"/>
           </a:solidFill>
           <a:ln>
             <a:noFill/>
@@ -5742,7 +5726,7 @@
         <p:spPr>
           <a:xfrm>
             <a:off x="1920239" y="2331720"/>
-            <a:ext cx="996695" cy="310896"/>
+            <a:ext cx="900684" cy="310896"/>
           </a:xfrm>
           <a:prstGeom prst="roundRect">
             <a:avLst>
@@ -5750,7 +5734,7 @@
             </a:avLst>
           </a:prstGeom>
           <a:solidFill>
-            <a:srgbClr val="A4472B"/>
+            <a:srgbClr val="B3261E"/>
           </a:solidFill>
           <a:ln>
             <a:noFill/>
@@ -5777,13 +5761,13 @@
           <a:p>
             <a:pPr algn="ctr"/>
             <a:r>
-              <a:rPr sz="1050" i="0" b="1" spc="100">
+              <a:rPr sz="1050" i="0" b="1">
                 <a:solidFill>
                   <a:srgbClr val="FFFFFF"/>
                 </a:solidFill>
                 <a:latin typeface="Calibri"/>
               </a:rPr>
-              <a:t>EXAM TIP</a:t>
+              <a:t>CAUTION</a:t>
             </a:r>
           </a:p>
         </p:txBody>
@@ -5817,7 +5801,7 @@
                 </a:solidFill>
                 <a:latin typeface="Calibri"/>
               </a:rPr>
-              <a:t>An ADR can happen with correct use; a medication error is always preventable.</a:t>
+              <a:t>Report medication errors, even near misses. The aim is to fix the system, not to blame a person.</a:t>
             </a:r>
           </a:p>
         </p:txBody>
@@ -5885,7 +5869,7 @@
           </a:fontRef>
         </p:style>
         <p:txBody>
-          <a:bodyPr rtlCol="0" anchor="ctr" lIns="0" rIns="0"/>
+          <a:bodyPr rtlCol="0" anchor="ctr" lIns="0" rIns="0" tIns="0" bIns="0"/>
           <a:lstStyle/>
           <a:p>
             <a:pPr algn="ctr"/>
@@ -5930,7 +5914,7 @@
                 </a:solidFill>
                 <a:latin typeface="Calibri"/>
               </a:rPr>
-              <a:t>SELF-ASSESSMENT  ·  QUESTION 1 OF 5</a:t>
+              <a:t>SECTION 9</a:t>
             </a:r>
           </a:p>
         </p:txBody>
@@ -5964,7 +5948,7 @@
                 </a:solidFill>
                 <a:latin typeface="Cambria"/>
               </a:rPr>
-              <a:t>Your turn</a:t>
+              <a:t>Preventing Medication Errors</a:t>
             </a:r>
           </a:p>
         </p:txBody>
@@ -6064,56 +6048,22 @@
       </p:pic>
       <p:sp>
         <p:nvSpPr>
-          <p:cNvPr id="8" name="TextBox 7"/>
-          <p:cNvSpPr txBox="1"/>
-          <p:nvPr/>
-        </p:nvSpPr>
-        <p:spPr>
-          <a:xfrm>
-            <a:off x="548640" y="1554480"/>
-            <a:ext cx="11094415" cy="1005840"/>
-          </a:xfrm>
-          <a:prstGeom prst="rect">
-            <a:avLst/>
-          </a:prstGeom>
-          <a:noFill/>
-        </p:spPr>
-        <p:txBody>
-          <a:bodyPr wrap="square" anchor="t" lIns="0" rIns="0" tIns="0" bIns="0">
-            <a:spAutoFit/>
-          </a:bodyPr>
-          <a:lstStyle/>
-          <a:p>
-            <a:r>
-              <a:rPr sz="2400" i="0" b="1">
-                <a:solidFill>
-                  <a:srgbClr val="2B211C"/>
-                </a:solidFill>
-                <a:latin typeface="Calibri"/>
-              </a:rPr>
-              <a:t>Why are post-marketing studies needed?</a:t>
-            </a:r>
-          </a:p>
-        </p:txBody>
-      </p:sp>
-      <p:sp>
-        <p:nvSpPr>
-          <p:cNvPr id="9" name="Rounded Rectangle 8"/>
+          <p:cNvPr id="8" name="Rounded Rectangle 7"/>
           <p:cNvSpPr/>
           <p:nvPr/>
         </p:nvSpPr>
         <p:spPr>
           <a:xfrm>
-            <a:off x="548640" y="2697480"/>
-            <a:ext cx="11094415" cy="640080"/>
+            <a:off x="1645919" y="2103120"/>
+            <a:ext cx="8899855" cy="2377440"/>
           </a:xfrm>
           <a:prstGeom prst="roundRect">
             <a:avLst>
-              <a:gd name="adj" fmla="val 18000"/>
+              <a:gd name="adj" fmla="val 6000"/>
             </a:avLst>
           </a:prstGeom>
           <a:solidFill>
-            <a:srgbClr val="FBF3EE"/>
+            <a:srgbClr val="F6E5DE"/>
           </a:solidFill>
           <a:ln>
             <a:noFill/>
@@ -6144,17 +6094,19 @@
       </p:sp>
       <p:sp>
         <p:nvSpPr>
-          <p:cNvPr id="10" name="Oval 9"/>
+          <p:cNvPr id="9" name="Rounded Rectangle 8"/>
           <p:cNvSpPr/>
           <p:nvPr/>
         </p:nvSpPr>
         <p:spPr>
           <a:xfrm>
-            <a:off x="713232" y="2807208"/>
-            <a:ext cx="420624" cy="420624"/>
-          </a:xfrm>
-          <a:prstGeom prst="ellipse">
-            <a:avLst/>
+            <a:off x="1920239" y="2331720"/>
+            <a:ext cx="996695" cy="310896"/>
+          </a:xfrm>
+          <a:prstGeom prst="roundRect">
+            <a:avLst>
+              <a:gd name="adj" fmla="val 50000"/>
+            </a:avLst>
           </a:prstGeom>
           <a:solidFill>
             <a:srgbClr val="A4472B"/>
@@ -6179,32 +6131,32 @@
           </a:fontRef>
         </p:style>
         <p:txBody>
-          <a:bodyPr rtlCol="0" anchor="ctr" lIns="0" rIns="0"/>
+          <a:bodyPr rtlCol="0" anchor="ctr" lIns="0" rIns="0" tIns="0" bIns="0"/>
           <a:lstStyle/>
           <a:p>
             <a:pPr algn="ctr"/>
             <a:r>
-              <a:rPr sz="1500" i="0" b="1">
+              <a:rPr sz="1050" i="0" b="1">
                 <a:solidFill>
                   <a:srgbClr val="FFFFFF"/>
                 </a:solidFill>
                 <a:latin typeface="Calibri"/>
               </a:rPr>
-              <a:t>A</a:t>
-            </a:r>
-          </a:p>
-        </p:txBody>
-      </p:sp>
-      <p:sp>
-        <p:nvSpPr>
-          <p:cNvPr id="11" name="TextBox 10"/>
+              <a:t>EXAM TIP</a:t>
+            </a:r>
+          </a:p>
+        </p:txBody>
+      </p:sp>
+      <p:sp>
+        <p:nvSpPr>
+          <p:cNvPr id="10" name="TextBox 9"/>
           <p:cNvSpPr txBox="1"/>
           <p:nvPr/>
         </p:nvSpPr>
         <p:spPr>
           <a:xfrm>
-            <a:off x="1371600" y="2697480"/>
-            <a:ext cx="10088575" cy="640080"/>
+            <a:off x="1920239" y="2788920"/>
+            <a:ext cx="8351215" cy="1508760"/>
           </a:xfrm>
           <a:prstGeom prst="rect">
             <a:avLst/>
@@ -6212,418 +6164,19 @@
           <a:noFill/>
         </p:spPr>
         <p:txBody>
-          <a:bodyPr wrap="square" anchor="ctr" lIns="0" rIns="0" tIns="0" bIns="0">
+          <a:bodyPr wrap="square" anchor="t" lIns="0" rIns="0" tIns="0" bIns="0">
             <a:spAutoFit/>
           </a:bodyPr>
           <a:lstStyle/>
           <a:p>
             <a:r>
-              <a:rPr sz="1900" i="0" b="0">
+              <a:rPr sz="2600" i="0" b="0">
                 <a:solidFill>
                   <a:srgbClr val="2B211C"/>
                 </a:solidFill>
                 <a:latin typeface="Calibri"/>
               </a:rPr>
-              <a:t>Trials include too many patients</a:t>
-            </a:r>
-          </a:p>
-        </p:txBody>
-      </p:sp>
-      <p:sp>
-        <p:nvSpPr>
-          <p:cNvPr id="12" name="Rounded Rectangle 11"/>
-          <p:cNvSpPr/>
-          <p:nvPr/>
-        </p:nvSpPr>
-        <p:spPr>
-          <a:xfrm>
-            <a:off x="548640" y="3465576"/>
-            <a:ext cx="11094415" cy="640080"/>
-          </a:xfrm>
-          <a:prstGeom prst="roundRect">
-            <a:avLst>
-              <a:gd name="adj" fmla="val 18000"/>
-            </a:avLst>
-          </a:prstGeom>
-          <a:solidFill>
-            <a:srgbClr val="FBF3EE"/>
-          </a:solidFill>
-          <a:ln>
-            <a:noFill/>
-          </a:ln>
-          <a:effectLst/>
-        </p:spPr>
-        <p:style>
-          <a:lnRef idx="1">
-            <a:schemeClr val="accent1"/>
-          </a:lnRef>
-          <a:fillRef idx="3">
-            <a:schemeClr val="accent1"/>
-          </a:fillRef>
-          <a:effectRef idx="2">
-            <a:schemeClr val="accent1"/>
-          </a:effectRef>
-          <a:fontRef idx="minor">
-            <a:schemeClr val="lt1"/>
-          </a:fontRef>
-        </p:style>
-        <p:txBody>
-          <a:bodyPr rtlCol="0" anchor="ctr"/>
-          <a:lstStyle/>
-          <a:p>
-            <a:pPr algn="ctr"/>
-          </a:p>
-        </p:txBody>
-      </p:sp>
-      <p:sp>
-        <p:nvSpPr>
-          <p:cNvPr id="13" name="Oval 12"/>
-          <p:cNvSpPr/>
-          <p:nvPr/>
-        </p:nvSpPr>
-        <p:spPr>
-          <a:xfrm>
-            <a:off x="713232" y="3575304"/>
-            <a:ext cx="420624" cy="420624"/>
-          </a:xfrm>
-          <a:prstGeom prst="ellipse">
-            <a:avLst/>
-          </a:prstGeom>
-          <a:solidFill>
-            <a:srgbClr val="A4472B"/>
-          </a:solidFill>
-          <a:ln>
-            <a:noFill/>
-          </a:ln>
-          <a:effectLst/>
-        </p:spPr>
-        <p:style>
-          <a:lnRef idx="1">
-            <a:schemeClr val="accent1"/>
-          </a:lnRef>
-          <a:fillRef idx="3">
-            <a:schemeClr val="accent1"/>
-          </a:fillRef>
-          <a:effectRef idx="2">
-            <a:schemeClr val="accent1"/>
-          </a:effectRef>
-          <a:fontRef idx="minor">
-            <a:schemeClr val="lt1"/>
-          </a:fontRef>
-        </p:style>
-        <p:txBody>
-          <a:bodyPr rtlCol="0" anchor="ctr" lIns="0" rIns="0"/>
-          <a:lstStyle/>
-          <a:p>
-            <a:pPr algn="ctr"/>
-            <a:r>
-              <a:rPr sz="1500" i="0" b="1">
-                <a:solidFill>
-                  <a:srgbClr val="FFFFFF"/>
-                </a:solidFill>
-                <a:latin typeface="Calibri"/>
-              </a:rPr>
-              <a:t>B</a:t>
-            </a:r>
-          </a:p>
-        </p:txBody>
-      </p:sp>
-      <p:sp>
-        <p:nvSpPr>
-          <p:cNvPr id="14" name="TextBox 13"/>
-          <p:cNvSpPr txBox="1"/>
-          <p:nvPr/>
-        </p:nvSpPr>
-        <p:spPr>
-          <a:xfrm>
-            <a:off x="1371600" y="3465576"/>
-            <a:ext cx="10088575" cy="640080"/>
-          </a:xfrm>
-          <a:prstGeom prst="rect">
-            <a:avLst/>
-          </a:prstGeom>
-          <a:noFill/>
-        </p:spPr>
-        <p:txBody>
-          <a:bodyPr wrap="square" anchor="ctr" lIns="0" rIns="0" tIns="0" bIns="0">
-            <a:spAutoFit/>
-          </a:bodyPr>
-          <a:lstStyle/>
-          <a:p>
-            <a:r>
-              <a:rPr sz="1900" i="0" b="0">
-                <a:solidFill>
-                  <a:srgbClr val="2B211C"/>
-                </a:solidFill>
-                <a:latin typeface="Calibri"/>
-              </a:rPr>
-              <a:t>Trials are too small and short to detect rare ADRs</a:t>
-            </a:r>
-          </a:p>
-        </p:txBody>
-      </p:sp>
-      <p:sp>
-        <p:nvSpPr>
-          <p:cNvPr id="15" name="Rounded Rectangle 14"/>
-          <p:cNvSpPr/>
-          <p:nvPr/>
-        </p:nvSpPr>
-        <p:spPr>
-          <a:xfrm>
-            <a:off x="548640" y="4233672"/>
-            <a:ext cx="11094415" cy="640080"/>
-          </a:xfrm>
-          <a:prstGeom prst="roundRect">
-            <a:avLst>
-              <a:gd name="adj" fmla="val 18000"/>
-            </a:avLst>
-          </a:prstGeom>
-          <a:solidFill>
-            <a:srgbClr val="FBF3EE"/>
-          </a:solidFill>
-          <a:ln>
-            <a:noFill/>
-          </a:ln>
-          <a:effectLst/>
-        </p:spPr>
-        <p:style>
-          <a:lnRef idx="1">
-            <a:schemeClr val="accent1"/>
-          </a:lnRef>
-          <a:fillRef idx="3">
-            <a:schemeClr val="accent1"/>
-          </a:fillRef>
-          <a:effectRef idx="2">
-            <a:schemeClr val="accent1"/>
-          </a:effectRef>
-          <a:fontRef idx="minor">
-            <a:schemeClr val="lt1"/>
-          </a:fontRef>
-        </p:style>
-        <p:txBody>
-          <a:bodyPr rtlCol="0" anchor="ctr"/>
-          <a:lstStyle/>
-          <a:p>
-            <a:pPr algn="ctr"/>
-          </a:p>
-        </p:txBody>
-      </p:sp>
-      <p:sp>
-        <p:nvSpPr>
-          <p:cNvPr id="16" name="Oval 15"/>
-          <p:cNvSpPr/>
-          <p:nvPr/>
-        </p:nvSpPr>
-        <p:spPr>
-          <a:xfrm>
-            <a:off x="713232" y="4343400"/>
-            <a:ext cx="420624" cy="420624"/>
-          </a:xfrm>
-          <a:prstGeom prst="ellipse">
-            <a:avLst/>
-          </a:prstGeom>
-          <a:solidFill>
-            <a:srgbClr val="A4472B"/>
-          </a:solidFill>
-          <a:ln>
-            <a:noFill/>
-          </a:ln>
-          <a:effectLst/>
-        </p:spPr>
-        <p:style>
-          <a:lnRef idx="1">
-            <a:schemeClr val="accent1"/>
-          </a:lnRef>
-          <a:fillRef idx="3">
-            <a:schemeClr val="accent1"/>
-          </a:fillRef>
-          <a:effectRef idx="2">
-            <a:schemeClr val="accent1"/>
-          </a:effectRef>
-          <a:fontRef idx="minor">
-            <a:schemeClr val="lt1"/>
-          </a:fontRef>
-        </p:style>
-        <p:txBody>
-          <a:bodyPr rtlCol="0" anchor="ctr" lIns="0" rIns="0"/>
-          <a:lstStyle/>
-          <a:p>
-            <a:pPr algn="ctr"/>
-            <a:r>
-              <a:rPr sz="1500" i="0" b="1">
-                <a:solidFill>
-                  <a:srgbClr val="FFFFFF"/>
-                </a:solidFill>
-                <a:latin typeface="Calibri"/>
-              </a:rPr>
-              <a:t>C</a:t>
-            </a:r>
-          </a:p>
-        </p:txBody>
-      </p:sp>
-      <p:sp>
-        <p:nvSpPr>
-          <p:cNvPr id="17" name="TextBox 16"/>
-          <p:cNvSpPr txBox="1"/>
-          <p:nvPr/>
-        </p:nvSpPr>
-        <p:spPr>
-          <a:xfrm>
-            <a:off x="1371600" y="4233672"/>
-            <a:ext cx="10088575" cy="640080"/>
-          </a:xfrm>
-          <a:prstGeom prst="rect">
-            <a:avLst/>
-          </a:prstGeom>
-          <a:noFill/>
-        </p:spPr>
-        <p:txBody>
-          <a:bodyPr wrap="square" anchor="ctr" lIns="0" rIns="0" tIns="0" bIns="0">
-            <a:spAutoFit/>
-          </a:bodyPr>
-          <a:lstStyle/>
-          <a:p>
-            <a:r>
-              <a:rPr sz="1900" i="0" b="0">
-                <a:solidFill>
-                  <a:srgbClr val="2B211C"/>
-                </a:solidFill>
-                <a:latin typeface="Calibri"/>
-              </a:rPr>
-              <a:t>Trials never measure safety</a:t>
-            </a:r>
-          </a:p>
-        </p:txBody>
-      </p:sp>
-      <p:sp>
-        <p:nvSpPr>
-          <p:cNvPr id="18" name="Rounded Rectangle 17"/>
-          <p:cNvSpPr/>
-          <p:nvPr/>
-        </p:nvSpPr>
-        <p:spPr>
-          <a:xfrm>
-            <a:off x="548640" y="5001768"/>
-            <a:ext cx="11094415" cy="640080"/>
-          </a:xfrm>
-          <a:prstGeom prst="roundRect">
-            <a:avLst>
-              <a:gd name="adj" fmla="val 18000"/>
-            </a:avLst>
-          </a:prstGeom>
-          <a:solidFill>
-            <a:srgbClr val="FBF3EE"/>
-          </a:solidFill>
-          <a:ln>
-            <a:noFill/>
-          </a:ln>
-          <a:effectLst/>
-        </p:spPr>
-        <p:style>
-          <a:lnRef idx="1">
-            <a:schemeClr val="accent1"/>
-          </a:lnRef>
-          <a:fillRef idx="3">
-            <a:schemeClr val="accent1"/>
-          </a:fillRef>
-          <a:effectRef idx="2">
-            <a:schemeClr val="accent1"/>
-          </a:effectRef>
-          <a:fontRef idx="minor">
-            <a:schemeClr val="lt1"/>
-          </a:fontRef>
-        </p:style>
-        <p:txBody>
-          <a:bodyPr rtlCol="0" anchor="ctr"/>
-          <a:lstStyle/>
-          <a:p>
-            <a:pPr algn="ctr"/>
-          </a:p>
-        </p:txBody>
-      </p:sp>
-      <p:sp>
-        <p:nvSpPr>
-          <p:cNvPr id="19" name="Oval 18"/>
-          <p:cNvSpPr/>
-          <p:nvPr/>
-        </p:nvSpPr>
-        <p:spPr>
-          <a:xfrm>
-            <a:off x="713232" y="5111496"/>
-            <a:ext cx="420624" cy="420624"/>
-          </a:xfrm>
-          <a:prstGeom prst="ellipse">
-            <a:avLst/>
-          </a:prstGeom>
-          <a:solidFill>
-            <a:srgbClr val="A4472B"/>
-          </a:solidFill>
-          <a:ln>
-            <a:noFill/>
-          </a:ln>
-          <a:effectLst/>
-        </p:spPr>
-        <p:style>
-          <a:lnRef idx="1">
-            <a:schemeClr val="accent1"/>
-          </a:lnRef>
-          <a:fillRef idx="3">
-            <a:schemeClr val="accent1"/>
-          </a:fillRef>
-          <a:effectRef idx="2">
-            <a:schemeClr val="accent1"/>
-          </a:effectRef>
-          <a:fontRef idx="minor">
-            <a:schemeClr val="lt1"/>
-          </a:fontRef>
-        </p:style>
-        <p:txBody>
-          <a:bodyPr rtlCol="0" anchor="ctr" lIns="0" rIns="0"/>
-          <a:lstStyle/>
-          <a:p>
-            <a:pPr algn="ctr"/>
-            <a:r>
-              <a:rPr sz="1500" i="0" b="1">
-                <a:solidFill>
-                  <a:srgbClr val="FFFFFF"/>
-                </a:solidFill>
-                <a:latin typeface="Calibri"/>
-              </a:rPr>
-              <a:t>D</a:t>
-            </a:r>
-          </a:p>
-        </p:txBody>
-      </p:sp>
-      <p:sp>
-        <p:nvSpPr>
-          <p:cNvPr id="20" name="TextBox 19"/>
-          <p:cNvSpPr txBox="1"/>
-          <p:nvPr/>
-        </p:nvSpPr>
-        <p:spPr>
-          <a:xfrm>
-            <a:off x="1371600" y="5001768"/>
-            <a:ext cx="10088575" cy="640080"/>
-          </a:xfrm>
-          <a:prstGeom prst="rect">
-            <a:avLst/>
-          </a:prstGeom>
-          <a:noFill/>
-        </p:spPr>
-        <p:txBody>
-          <a:bodyPr wrap="square" anchor="ctr" lIns="0" rIns="0" tIns="0" bIns="0">
-            <a:spAutoFit/>
-          </a:bodyPr>
-          <a:lstStyle/>
-          <a:p>
-            <a:r>
-              <a:rPr sz="1900" i="0" b="0">
-                <a:solidFill>
-                  <a:srgbClr val="2B211C"/>
-                </a:solidFill>
-                <a:latin typeface="Calibri"/>
-              </a:rPr>
-              <a:t>Marketing studies are cheaper</a:t>
+              <a:t>An ADR can happen with correct use; a medication error is always preventable.</a:t>
             </a:r>
           </a:p>
         </p:txBody>
@@ -6691,7 +6244,7 @@
           </a:fontRef>
         </p:style>
         <p:txBody>
-          <a:bodyPr rtlCol="0" anchor="ctr" lIns="0" rIns="0"/>
+          <a:bodyPr rtlCol="0" anchor="ctr" lIns="0" rIns="0" tIns="0" bIns="0"/>
           <a:lstStyle/>
           <a:p>
             <a:pPr algn="ctr"/>
@@ -6736,7 +6289,7 @@
                 </a:solidFill>
                 <a:latin typeface="Calibri"/>
               </a:rPr>
-              <a:t>SELF-ASSESSMENT  ·  QUESTION 1 OF 5  ·  ANSWER</a:t>
+              <a:t>SECTION 9  ·  QUESTION 1 OF 5</a:t>
             </a:r>
           </a:p>
         </p:txBody>
@@ -6770,7 +6323,7 @@
                 </a:solidFill>
                 <a:latin typeface="Cambria"/>
               </a:rPr>
-              <a:t>Check your answer</a:t>
+              <a:t>Your turn</a:t>
             </a:r>
           </a:p>
         </p:txBody>
@@ -6853,7 +6406,7 @@
           <p:nvPr/>
         </p:nvPicPr>
         <p:blipFill>
-          <a:blip r:embed="rId2"/>
+          <a:blip r:embed="rId3"/>
           <a:stretch>
             <a:fillRect/>
           </a:stretch>
@@ -6910,8 +6463,8 @@
         </p:nvSpPr>
         <p:spPr>
           <a:xfrm>
-            <a:off x="548640" y="2606040"/>
-            <a:ext cx="11094415" cy="548640"/>
+            <a:off x="548640" y="2697480"/>
+            <a:ext cx="11094415" cy="640080"/>
           </a:xfrm>
           <a:prstGeom prst="roundRect">
             <a:avLst>
@@ -6919,7 +6472,7 @@
             </a:avLst>
           </a:prstGeom>
           <a:solidFill>
-            <a:srgbClr val="F7F4F2"/>
+            <a:srgbClr val="FAF4F2"/>
           </a:solidFill>
           <a:ln>
             <a:noFill/>
@@ -6956,14 +6509,14 @@
         </p:nvSpPr>
         <p:spPr>
           <a:xfrm>
-            <a:off x="713232" y="2670048"/>
+            <a:off x="713232" y="2807208"/>
             <a:ext cx="420624" cy="420624"/>
           </a:xfrm>
           <a:prstGeom prst="ellipse">
             <a:avLst/>
           </a:prstGeom>
           <a:solidFill>
-            <a:srgbClr val="E6DFDA"/>
+            <a:srgbClr val="A4472B"/>
           </a:solidFill>
           <a:ln>
             <a:noFill/>
@@ -6985,14 +6538,14 @@
           </a:fontRef>
         </p:style>
         <p:txBody>
-          <a:bodyPr rtlCol="0" anchor="ctr" lIns="0" rIns="0"/>
+          <a:bodyPr rtlCol="0" anchor="ctr" lIns="0" rIns="0" tIns="0" bIns="0"/>
           <a:lstStyle/>
           <a:p>
             <a:pPr algn="ctr"/>
             <a:r>
               <a:rPr sz="1500" i="0" b="1">
                 <a:solidFill>
-                  <a:srgbClr val="6E625B"/>
+                  <a:srgbClr val="FFFFFF"/>
                 </a:solidFill>
                 <a:latin typeface="Calibri"/>
               </a:rPr>
@@ -7009,8 +6562,8 @@
         </p:nvSpPr>
         <p:spPr>
           <a:xfrm>
-            <a:off x="1371600" y="2606040"/>
-            <a:ext cx="10088575" cy="548640"/>
+            <a:off x="1371600" y="2697480"/>
+            <a:ext cx="10088575" cy="640080"/>
           </a:xfrm>
           <a:prstGeom prst="rect">
             <a:avLst/>
@@ -7026,7 +6579,7 @@
             <a:r>
               <a:rPr sz="1900" i="0" b="0">
                 <a:solidFill>
-                  <a:srgbClr val="6E625B"/>
+                  <a:srgbClr val="2B211C"/>
                 </a:solidFill>
                 <a:latin typeface="Calibri"/>
               </a:rPr>
@@ -7043,8 +6596,8 @@
         </p:nvSpPr>
         <p:spPr>
           <a:xfrm>
-            <a:off x="548640" y="3282696"/>
-            <a:ext cx="11094415" cy="548640"/>
+            <a:off x="548640" y="3465576"/>
+            <a:ext cx="11094415" cy="640080"/>
           </a:xfrm>
           <a:prstGeom prst="roundRect">
             <a:avLst>
@@ -7052,7 +6605,7 @@
             </a:avLst>
           </a:prstGeom>
           <a:solidFill>
-            <a:srgbClr val="2F6F7A"/>
+            <a:srgbClr val="FAF4F2"/>
           </a:solidFill>
           <a:ln>
             <a:noFill/>
@@ -7089,14 +6642,14 @@
         </p:nvSpPr>
         <p:spPr>
           <a:xfrm>
-            <a:off x="713232" y="3346703"/>
+            <a:off x="713232" y="3575304"/>
             <a:ext cx="420624" cy="420624"/>
           </a:xfrm>
           <a:prstGeom prst="ellipse">
             <a:avLst/>
           </a:prstGeom>
           <a:solidFill>
-            <a:srgbClr val="FFFFFF"/>
+            <a:srgbClr val="A4472B"/>
           </a:solidFill>
           <a:ln>
             <a:noFill/>
@@ -7118,14 +6671,14 @@
           </a:fontRef>
         </p:style>
         <p:txBody>
-          <a:bodyPr rtlCol="0" anchor="ctr" lIns="0" rIns="0"/>
+          <a:bodyPr rtlCol="0" anchor="ctr" lIns="0" rIns="0" tIns="0" bIns="0"/>
           <a:lstStyle/>
           <a:p>
             <a:pPr algn="ctr"/>
             <a:r>
               <a:rPr sz="1500" i="0" b="1">
                 <a:solidFill>
-                  <a:srgbClr val="2F6F7A"/>
+                  <a:srgbClr val="FFFFFF"/>
                 </a:solidFill>
                 <a:latin typeface="Calibri"/>
               </a:rPr>
@@ -7142,8 +6695,8 @@
         </p:nvSpPr>
         <p:spPr>
           <a:xfrm>
-            <a:off x="1371600" y="3282696"/>
-            <a:ext cx="10088575" cy="548640"/>
+            <a:off x="1371600" y="3465576"/>
+            <a:ext cx="10088575" cy="640080"/>
           </a:xfrm>
           <a:prstGeom prst="rect">
             <a:avLst/>
@@ -7157,9 +6710,9 @@
           <a:lstStyle/>
           <a:p>
             <a:r>
-              <a:rPr sz="1900" i="0" b="1">
-                <a:solidFill>
-                  <a:srgbClr val="FFFFFF"/>
+              <a:rPr sz="1900" i="0" b="0">
+                <a:solidFill>
+                  <a:srgbClr val="2B211C"/>
                 </a:solidFill>
                 <a:latin typeface="Calibri"/>
               </a:rPr>
@@ -7176,8 +6729,8 @@
         </p:nvSpPr>
         <p:spPr>
           <a:xfrm>
-            <a:off x="548640" y="3959352"/>
-            <a:ext cx="11094415" cy="548640"/>
+            <a:off x="548640" y="4233672"/>
+            <a:ext cx="11094415" cy="640080"/>
           </a:xfrm>
           <a:prstGeom prst="roundRect">
             <a:avLst>
@@ -7185,7 +6738,7 @@
             </a:avLst>
           </a:prstGeom>
           <a:solidFill>
-            <a:srgbClr val="F7F4F2"/>
+            <a:srgbClr val="FAF4F2"/>
           </a:solidFill>
           <a:ln>
             <a:noFill/>
@@ -7222,14 +6775,14 @@
         </p:nvSpPr>
         <p:spPr>
           <a:xfrm>
-            <a:off x="713232" y="4023360"/>
+            <a:off x="713232" y="4343400"/>
             <a:ext cx="420624" cy="420624"/>
           </a:xfrm>
           <a:prstGeom prst="ellipse">
             <a:avLst/>
           </a:prstGeom>
           <a:solidFill>
-            <a:srgbClr val="E6DFDA"/>
+            <a:srgbClr val="A4472B"/>
           </a:solidFill>
           <a:ln>
             <a:noFill/>
@@ -7251,14 +6804,14 @@
           </a:fontRef>
         </p:style>
         <p:txBody>
-          <a:bodyPr rtlCol="0" anchor="ctr" lIns="0" rIns="0"/>
+          <a:bodyPr rtlCol="0" anchor="ctr" lIns="0" rIns="0" tIns="0" bIns="0"/>
           <a:lstStyle/>
           <a:p>
             <a:pPr algn="ctr"/>
             <a:r>
               <a:rPr sz="1500" i="0" b="1">
                 <a:solidFill>
-                  <a:srgbClr val="6E625B"/>
+                  <a:srgbClr val="FFFFFF"/>
                 </a:solidFill>
                 <a:latin typeface="Calibri"/>
               </a:rPr>
@@ -7275,8 +6828,8 @@
         </p:nvSpPr>
         <p:spPr>
           <a:xfrm>
-            <a:off x="1371600" y="3959352"/>
-            <a:ext cx="10088575" cy="548640"/>
+            <a:off x="1371600" y="4233672"/>
+            <a:ext cx="10088575" cy="640080"/>
           </a:xfrm>
           <a:prstGeom prst="rect">
             <a:avLst/>
@@ -7292,7 +6845,7 @@
             <a:r>
               <a:rPr sz="1900" i="0" b="0">
                 <a:solidFill>
-                  <a:srgbClr val="6E625B"/>
+                  <a:srgbClr val="2B211C"/>
                 </a:solidFill>
                 <a:latin typeface="Calibri"/>
               </a:rPr>
@@ -7309,8 +6862,8 @@
         </p:nvSpPr>
         <p:spPr>
           <a:xfrm>
-            <a:off x="548640" y="4636008"/>
-            <a:ext cx="11094415" cy="548640"/>
+            <a:off x="548640" y="5001768"/>
+            <a:ext cx="11094415" cy="640080"/>
           </a:xfrm>
           <a:prstGeom prst="roundRect">
             <a:avLst>
@@ -7318,7 +6871,7 @@
             </a:avLst>
           </a:prstGeom>
           <a:solidFill>
-            <a:srgbClr val="F7F4F2"/>
+            <a:srgbClr val="FAF4F2"/>
           </a:solidFill>
           <a:ln>
             <a:noFill/>
@@ -7355,14 +6908,14 @@
         </p:nvSpPr>
         <p:spPr>
           <a:xfrm>
-            <a:off x="713232" y="4700016"/>
+            <a:off x="713232" y="5111496"/>
             <a:ext cx="420624" cy="420624"/>
           </a:xfrm>
           <a:prstGeom prst="ellipse">
             <a:avLst/>
           </a:prstGeom>
           <a:solidFill>
-            <a:srgbClr val="E6DFDA"/>
+            <a:srgbClr val="A4472B"/>
           </a:solidFill>
           <a:ln>
             <a:noFill/>
@@ -7384,14 +6937,14 @@
           </a:fontRef>
         </p:style>
         <p:txBody>
-          <a:bodyPr rtlCol="0" anchor="ctr" lIns="0" rIns="0"/>
+          <a:bodyPr rtlCol="0" anchor="ctr" lIns="0" rIns="0" tIns="0" bIns="0"/>
           <a:lstStyle/>
           <a:p>
             <a:pPr algn="ctr"/>
             <a:r>
               <a:rPr sz="1500" i="0" b="1">
                 <a:solidFill>
-                  <a:srgbClr val="6E625B"/>
+                  <a:srgbClr val="FFFFFF"/>
                 </a:solidFill>
                 <a:latin typeface="Calibri"/>
               </a:rPr>
@@ -7408,8 +6961,8 @@
         </p:nvSpPr>
         <p:spPr>
           <a:xfrm>
-            <a:off x="1371600" y="4636008"/>
-            <a:ext cx="10088575" cy="548640"/>
+            <a:off x="1371600" y="5001768"/>
+            <a:ext cx="10088575" cy="640080"/>
           </a:xfrm>
           <a:prstGeom prst="rect">
             <a:avLst/>
@@ -7425,54 +6978,11 @@
             <a:r>
               <a:rPr sz="1900" i="0" b="0">
                 <a:solidFill>
-                  <a:srgbClr val="6E625B"/>
+                  <a:srgbClr val="2B211C"/>
                 </a:solidFill>
                 <a:latin typeface="Calibri"/>
               </a:rPr>
               <a:t>Marketing studies are cheaper</a:t>
-            </a:r>
-          </a:p>
-        </p:txBody>
-      </p:sp>
-      <p:sp>
-        <p:nvSpPr>
-          <p:cNvPr id="21" name="TextBox 20"/>
-          <p:cNvSpPr txBox="1"/>
-          <p:nvPr/>
-        </p:nvSpPr>
-        <p:spPr>
-          <a:xfrm>
-            <a:off x="548640" y="5358384"/>
-            <a:ext cx="11094415" cy="685800"/>
-          </a:xfrm>
-          <a:prstGeom prst="rect">
-            <a:avLst/>
-          </a:prstGeom>
-          <a:noFill/>
-        </p:spPr>
-        <p:txBody>
-          <a:bodyPr wrap="square" anchor="t" lIns="0" rIns="0" tIns="0" bIns="0">
-            <a:spAutoFit/>
-          </a:bodyPr>
-          <a:lstStyle/>
-          <a:p>
-            <a:r>
-              <a:rPr sz="1500" i="0" b="1">
-                <a:solidFill>
-                  <a:srgbClr val="2F6F7A"/>
-                </a:solidFill>
-                <a:latin typeface="Calibri"/>
-              </a:rPr>
-              <a:t>Why:  </a:t>
-            </a:r>
-            <a:r>
-              <a:rPr sz="1500" i="0" b="0">
-                <a:solidFill>
-                  <a:srgbClr val="2B211C"/>
-                </a:solidFill>
-                <a:latin typeface="Calibri"/>
-              </a:rPr>
-              <a:t>Trials are too small and short to find rare reactions. A, C and D are false.</a:t>
             </a:r>
           </a:p>
         </p:txBody>
@@ -7540,7 +7050,7 @@
           </a:fontRef>
         </p:style>
         <p:txBody>
-          <a:bodyPr rtlCol="0" anchor="ctr" lIns="0" rIns="0"/>
+          <a:bodyPr rtlCol="0" anchor="ctr" lIns="0" rIns="0" tIns="0" bIns="0"/>
           <a:lstStyle/>
           <a:p>
             <a:pPr algn="ctr"/>
@@ -7585,7 +7095,7 @@
                 </a:solidFill>
                 <a:latin typeface="Calibri"/>
               </a:rPr>
-              <a:t>SELF-ASSESSMENT  ·  QUESTION 2 OF 5</a:t>
+              <a:t>SECTION 9  ·  QUESTION 1 OF 5  ·  ANSWER</a:t>
             </a:r>
           </a:p>
         </p:txBody>
@@ -7619,7 +7129,7 @@
                 </a:solidFill>
                 <a:latin typeface="Cambria"/>
               </a:rPr>
-              <a:t>Your turn</a:t>
+              <a:t>Check your answer</a:t>
             </a:r>
           </a:p>
         </p:txBody>
@@ -7702,7 +7212,7 @@
           <p:nvPr/>
         </p:nvPicPr>
         <p:blipFill>
-          <a:blip r:embed="rId3"/>
+          <a:blip r:embed="rId2"/>
           <a:stretch>
             <a:fillRect/>
           </a:stretch>
@@ -7746,7 +7256,7 @@
                 </a:solidFill>
                 <a:latin typeface="Calibri"/>
               </a:rPr>
-              <a:t>A pharmacist suspects, but is not sure, that a drug caused a rash. What should she do?</a:t>
+              <a:t>Why are post-marketing studies needed?</a:t>
             </a:r>
           </a:p>
         </p:txBody>
@@ -7759,8 +7269,8 @@
         </p:nvSpPr>
         <p:spPr>
           <a:xfrm>
-            <a:off x="548640" y="2697480"/>
-            <a:ext cx="11094415" cy="640080"/>
+            <a:off x="548640" y="2606040"/>
+            <a:ext cx="11094415" cy="548640"/>
           </a:xfrm>
           <a:prstGeom prst="roundRect">
             <a:avLst>
@@ -7768,7 +7278,7 @@
             </a:avLst>
           </a:prstGeom>
           <a:solidFill>
-            <a:srgbClr val="FBF3EE"/>
+            <a:srgbClr val="F5F4F4"/>
           </a:solidFill>
           <a:ln>
             <a:noFill/>
@@ -7805,14 +7315,14 @@
         </p:nvSpPr>
         <p:spPr>
           <a:xfrm>
-            <a:off x="713232" y="2807208"/>
+            <a:off x="713232" y="2670048"/>
             <a:ext cx="420624" cy="420624"/>
           </a:xfrm>
           <a:prstGeom prst="ellipse">
             <a:avLst/>
           </a:prstGeom>
           <a:solidFill>
-            <a:srgbClr val="A4472B"/>
+            <a:srgbClr val="E2E0DE"/>
           </a:solidFill>
           <a:ln>
             <a:noFill/>
@@ -7834,14 +7344,14 @@
           </a:fontRef>
         </p:style>
         <p:txBody>
-          <a:bodyPr rtlCol="0" anchor="ctr" lIns="0" rIns="0"/>
+          <a:bodyPr rtlCol="0" anchor="ctr" lIns="0" rIns="0" tIns="0" bIns="0"/>
           <a:lstStyle/>
           <a:p>
             <a:pPr algn="ctr"/>
             <a:r>
               <a:rPr sz="1500" i="0" b="1">
                 <a:solidFill>
-                  <a:srgbClr val="FFFFFF"/>
+                  <a:srgbClr val="6E625B"/>
                 </a:solidFill>
                 <a:latin typeface="Calibri"/>
               </a:rPr>
@@ -7858,8 +7368,8 @@
         </p:nvSpPr>
         <p:spPr>
           <a:xfrm>
-            <a:off x="1371600" y="2697480"/>
-            <a:ext cx="10088575" cy="640080"/>
+            <a:off x="1371600" y="2606040"/>
+            <a:ext cx="10088575" cy="548640"/>
           </a:xfrm>
           <a:prstGeom prst="rect">
             <a:avLst/>
@@ -7875,11 +7385,11 @@
             <a:r>
               <a:rPr sz="1900" i="0" b="0">
                 <a:solidFill>
-                  <a:srgbClr val="2B211C"/>
-                </a:solidFill>
-                <a:latin typeface="Calibri"/>
-              </a:rPr>
-              <a:t>Wait until she is certain</a:t>
+                  <a:srgbClr val="6E625B"/>
+                </a:solidFill>
+                <a:latin typeface="Calibri"/>
+              </a:rPr>
+              <a:t>Trials include too many patients</a:t>
             </a:r>
           </a:p>
         </p:txBody>
@@ -7892,8 +7402,8 @@
         </p:nvSpPr>
         <p:spPr>
           <a:xfrm>
-            <a:off x="548640" y="3465576"/>
-            <a:ext cx="11094415" cy="640080"/>
+            <a:off x="548640" y="3282696"/>
+            <a:ext cx="11094415" cy="548640"/>
           </a:xfrm>
           <a:prstGeom prst="roundRect">
             <a:avLst>
@@ -7901,7 +7411,7 @@
             </a:avLst>
           </a:prstGeom>
           <a:solidFill>
-            <a:srgbClr val="FBF3EE"/>
+            <a:srgbClr val="2F6F7A"/>
           </a:solidFill>
           <a:ln>
             <a:noFill/>
@@ -7938,14 +7448,14 @@
         </p:nvSpPr>
         <p:spPr>
           <a:xfrm>
-            <a:off x="713232" y="3575304"/>
+            <a:off x="713232" y="3346703"/>
             <a:ext cx="420624" cy="420624"/>
           </a:xfrm>
           <a:prstGeom prst="ellipse">
             <a:avLst/>
           </a:prstGeom>
           <a:solidFill>
-            <a:srgbClr val="A4472B"/>
+            <a:srgbClr val="FFFFFF"/>
           </a:solidFill>
           <a:ln>
             <a:noFill/>
@@ -7967,14 +7477,14 @@
           </a:fontRef>
         </p:style>
         <p:txBody>
-          <a:bodyPr rtlCol="0" anchor="ctr" lIns="0" rIns="0"/>
+          <a:bodyPr rtlCol="0" anchor="ctr" lIns="0" rIns="0" tIns="0" bIns="0"/>
           <a:lstStyle/>
           <a:p>
             <a:pPr algn="ctr"/>
             <a:r>
               <a:rPr sz="1500" i="0" b="1">
                 <a:solidFill>
-                  <a:srgbClr val="FFFFFF"/>
+                  <a:srgbClr val="2F6F7A"/>
                 </a:solidFill>
                 <a:latin typeface="Calibri"/>
               </a:rPr>
@@ -7991,8 +7501,8 @@
         </p:nvSpPr>
         <p:spPr>
           <a:xfrm>
-            <a:off x="1371600" y="3465576"/>
-            <a:ext cx="10088575" cy="640080"/>
+            <a:off x="1371600" y="3282696"/>
+            <a:ext cx="10088575" cy="548640"/>
           </a:xfrm>
           <a:prstGeom prst="rect">
             <a:avLst/>
@@ -8006,13 +7516,13 @@
           <a:lstStyle/>
           <a:p>
             <a:r>
-              <a:rPr sz="1900" i="0" b="0">
-                <a:solidFill>
-                  <a:srgbClr val="2B211C"/>
-                </a:solidFill>
-                <a:latin typeface="Calibri"/>
-              </a:rPr>
-              <a:t>Report only if the patient is admitted</a:t>
+              <a:rPr sz="1900" i="0" b="1">
+                <a:solidFill>
+                  <a:srgbClr val="FFFFFF"/>
+                </a:solidFill>
+                <a:latin typeface="Calibri"/>
+              </a:rPr>
+              <a:t>Trials are too small and short to detect rare ADRs</a:t>
             </a:r>
           </a:p>
         </p:txBody>
@@ -8025,8 +7535,8 @@
         </p:nvSpPr>
         <p:spPr>
           <a:xfrm>
-            <a:off x="548640" y="4233672"/>
-            <a:ext cx="11094415" cy="640080"/>
+            <a:off x="548640" y="3959352"/>
+            <a:ext cx="11094415" cy="548640"/>
           </a:xfrm>
           <a:prstGeom prst="roundRect">
             <a:avLst>
@@ -8034,7 +7544,7 @@
             </a:avLst>
           </a:prstGeom>
           <a:solidFill>
-            <a:srgbClr val="FBF3EE"/>
+            <a:srgbClr val="F5F4F4"/>
           </a:solidFill>
           <a:ln>
             <a:noFill/>
@@ -8071,14 +7581,14 @@
         </p:nvSpPr>
         <p:spPr>
           <a:xfrm>
-            <a:off x="713232" y="4343400"/>
+            <a:off x="713232" y="4023360"/>
             <a:ext cx="420624" cy="420624"/>
           </a:xfrm>
           <a:prstGeom prst="ellipse">
             <a:avLst/>
           </a:prstGeom>
           <a:solidFill>
-            <a:srgbClr val="A4472B"/>
+            <a:srgbClr val="E2E0DE"/>
           </a:solidFill>
           <a:ln>
             <a:noFill/>
@@ -8100,14 +7610,14 @@
           </a:fontRef>
         </p:style>
         <p:txBody>
-          <a:bodyPr rtlCol="0" anchor="ctr" lIns="0" rIns="0"/>
+          <a:bodyPr rtlCol="0" anchor="ctr" lIns="0" rIns="0" tIns="0" bIns="0"/>
           <a:lstStyle/>
           <a:p>
             <a:pPr algn="ctr"/>
             <a:r>
               <a:rPr sz="1500" i="0" b="1">
                 <a:solidFill>
-                  <a:srgbClr val="FFFFFF"/>
+                  <a:srgbClr val="6E625B"/>
                 </a:solidFill>
                 <a:latin typeface="Calibri"/>
               </a:rPr>
@@ -8124,8 +7634,8 @@
         </p:nvSpPr>
         <p:spPr>
           <a:xfrm>
-            <a:off x="1371600" y="4233672"/>
-            <a:ext cx="10088575" cy="640080"/>
+            <a:off x="1371600" y="3959352"/>
+            <a:ext cx="10088575" cy="548640"/>
           </a:xfrm>
           <a:prstGeom prst="rect">
             <a:avLst/>
@@ -8141,11 +7651,11 @@
             <a:r>
               <a:rPr sz="1900" i="0" b="0">
                 <a:solidFill>
-                  <a:srgbClr val="2B211C"/>
-                </a:solidFill>
-                <a:latin typeface="Calibri"/>
-              </a:rPr>
-              <a:t>Tell the patient to stop all drugs</a:t>
+                  <a:srgbClr val="6E625B"/>
+                </a:solidFill>
+                <a:latin typeface="Calibri"/>
+              </a:rPr>
+              <a:t>Trials never measure safety</a:t>
             </a:r>
           </a:p>
         </p:txBody>
@@ -8158,8 +7668,8 @@
         </p:nvSpPr>
         <p:spPr>
           <a:xfrm>
-            <a:off x="548640" y="5001768"/>
-            <a:ext cx="11094415" cy="640080"/>
+            <a:off x="548640" y="4636008"/>
+            <a:ext cx="11094415" cy="548640"/>
           </a:xfrm>
           <a:prstGeom prst="roundRect">
             <a:avLst>
@@ -8167,7 +7677,7 @@
             </a:avLst>
           </a:prstGeom>
           <a:solidFill>
-            <a:srgbClr val="FBF3EE"/>
+            <a:srgbClr val="F5F4F4"/>
           </a:solidFill>
           <a:ln>
             <a:noFill/>
@@ -8204,14 +7714,14 @@
         </p:nvSpPr>
         <p:spPr>
           <a:xfrm>
-            <a:off x="713232" y="5111496"/>
+            <a:off x="713232" y="4700016"/>
             <a:ext cx="420624" cy="420624"/>
           </a:xfrm>
           <a:prstGeom prst="ellipse">
             <a:avLst/>
           </a:prstGeom>
           <a:solidFill>
-            <a:srgbClr val="A4472B"/>
+            <a:srgbClr val="E2E0DE"/>
           </a:solidFill>
           <a:ln>
             <a:noFill/>
@@ -8233,14 +7743,14 @@
           </a:fontRef>
         </p:style>
         <p:txBody>
-          <a:bodyPr rtlCol="0" anchor="ctr" lIns="0" rIns="0"/>
+          <a:bodyPr rtlCol="0" anchor="ctr" lIns="0" rIns="0" tIns="0" bIns="0"/>
           <a:lstStyle/>
           <a:p>
             <a:pPr algn="ctr"/>
             <a:r>
               <a:rPr sz="1500" i="0" b="1">
                 <a:solidFill>
-                  <a:srgbClr val="FFFFFF"/>
+                  <a:srgbClr val="6E625B"/>
                 </a:solidFill>
                 <a:latin typeface="Calibri"/>
               </a:rPr>
@@ -8257,8 +7767,8 @@
         </p:nvSpPr>
         <p:spPr>
           <a:xfrm>
-            <a:off x="1371600" y="5001768"/>
-            <a:ext cx="10088575" cy="640080"/>
+            <a:off x="1371600" y="4636008"/>
+            <a:ext cx="10088575" cy="548640"/>
           </a:xfrm>
           <a:prstGeom prst="rect">
             <a:avLst/>
@@ -8274,11 +7784,54 @@
             <a:r>
               <a:rPr sz="1900" i="0" b="0">
                 <a:solidFill>
+                  <a:srgbClr val="6E625B"/>
+                </a:solidFill>
+                <a:latin typeface="Calibri"/>
+              </a:rPr>
+              <a:t>Marketing studies are cheaper</a:t>
+            </a:r>
+          </a:p>
+        </p:txBody>
+      </p:sp>
+      <p:sp>
+        <p:nvSpPr>
+          <p:cNvPr id="21" name="TextBox 20"/>
+          <p:cNvSpPr txBox="1"/>
+          <p:nvPr/>
+        </p:nvSpPr>
+        <p:spPr>
+          <a:xfrm>
+            <a:off x="548640" y="5358384"/>
+            <a:ext cx="11094415" cy="685800"/>
+          </a:xfrm>
+          <a:prstGeom prst="rect">
+            <a:avLst/>
+          </a:prstGeom>
+          <a:noFill/>
+        </p:spPr>
+        <p:txBody>
+          <a:bodyPr wrap="square" anchor="t" lIns="0" rIns="0" tIns="0" bIns="0">
+            <a:spAutoFit/>
+          </a:bodyPr>
+          <a:lstStyle/>
+          <a:p>
+            <a:r>
+              <a:rPr sz="1500" i="0" b="1">
+                <a:solidFill>
+                  <a:srgbClr val="2F6F7A"/>
+                </a:solidFill>
+                <a:latin typeface="Calibri"/>
+              </a:rPr>
+              <a:t>Why:  </a:t>
+            </a:r>
+            <a:r>
+              <a:rPr sz="1500" i="0" b="0">
+                <a:solidFill>
                   <a:srgbClr val="2B211C"/>
                 </a:solidFill>
                 <a:latin typeface="Calibri"/>
               </a:rPr>
-              <a:t>Report it to the EPVC</a:t>
+              <a:t>Trials are too small and short to find rare reactions. A, C and D are false.</a:t>
             </a:r>
           </a:p>
         </p:txBody>
@@ -8346,7 +7899,7 @@
           </a:fontRef>
         </p:style>
         <p:txBody>
-          <a:bodyPr rtlCol="0" anchor="ctr" lIns="0" rIns="0"/>
+          <a:bodyPr rtlCol="0" anchor="ctr" lIns="0" rIns="0" tIns="0" bIns="0"/>
           <a:lstStyle/>
           <a:p>
             <a:pPr algn="ctr"/>
@@ -8391,7 +7944,7 @@
                 </a:solidFill>
                 <a:latin typeface="Calibri"/>
               </a:rPr>
-              <a:t>SELF-ASSESSMENT  ·  QUESTION 2 OF 5  ·  ANSWER</a:t>
+              <a:t>SECTION 9  ·  QUESTION 2 OF 5</a:t>
             </a:r>
           </a:p>
         </p:txBody>
@@ -8425,7 +7978,7 @@
                 </a:solidFill>
                 <a:latin typeface="Cambria"/>
               </a:rPr>
-              <a:t>Check your answer</a:t>
+              <a:t>Your turn</a:t>
             </a:r>
           </a:p>
         </p:txBody>
@@ -8508,7 +8061,7 @@
           <p:nvPr/>
         </p:nvPicPr>
         <p:blipFill>
-          <a:blip r:embed="rId2"/>
+          <a:blip r:embed="rId3"/>
           <a:stretch>
             <a:fillRect/>
           </a:stretch>
@@ -8565,8 +8118,8 @@
         </p:nvSpPr>
         <p:spPr>
           <a:xfrm>
-            <a:off x="548640" y="2606040"/>
-            <a:ext cx="11094415" cy="548640"/>
+            <a:off x="548640" y="2697480"/>
+            <a:ext cx="11094415" cy="640080"/>
           </a:xfrm>
           <a:prstGeom prst="roundRect">
             <a:avLst>
@@ -8574,7 +8127,7 @@
             </a:avLst>
           </a:prstGeom>
           <a:solidFill>
-            <a:srgbClr val="F7F4F2"/>
+            <a:srgbClr val="FAF4F2"/>
           </a:solidFill>
           <a:ln>
             <a:noFill/>
@@ -8611,14 +8164,14 @@
         </p:nvSpPr>
         <p:spPr>
           <a:xfrm>
-            <a:off x="713232" y="2670048"/>
+            <a:off x="713232" y="2807208"/>
             <a:ext cx="420624" cy="420624"/>
           </a:xfrm>
           <a:prstGeom prst="ellipse">
             <a:avLst/>
           </a:prstGeom>
           <a:solidFill>
-            <a:srgbClr val="E6DFDA"/>
+            <a:srgbClr val="A4472B"/>
           </a:solidFill>
           <a:ln>
             <a:noFill/>
@@ -8640,14 +8193,14 @@
           </a:fontRef>
         </p:style>
         <p:txBody>
-          <a:bodyPr rtlCol="0" anchor="ctr" lIns="0" rIns="0"/>
+          <a:bodyPr rtlCol="0" anchor="ctr" lIns="0" rIns="0" tIns="0" bIns="0"/>
           <a:lstStyle/>
           <a:p>
             <a:pPr algn="ctr"/>
             <a:r>
               <a:rPr sz="1500" i="0" b="1">
                 <a:solidFill>
-                  <a:srgbClr val="6E625B"/>
+                  <a:srgbClr val="FFFFFF"/>
                 </a:solidFill>
                 <a:latin typeface="Calibri"/>
               </a:rPr>
@@ -8664,8 +8217,8 @@
         </p:nvSpPr>
         <p:spPr>
           <a:xfrm>
-            <a:off x="1371600" y="2606040"/>
-            <a:ext cx="10088575" cy="548640"/>
+            <a:off x="1371600" y="2697480"/>
+            <a:ext cx="10088575" cy="640080"/>
           </a:xfrm>
           <a:prstGeom prst="rect">
             <a:avLst/>
@@ -8681,7 +8234,7 @@
             <a:r>
               <a:rPr sz="1900" i="0" b="0">
                 <a:solidFill>
-                  <a:srgbClr val="6E625B"/>
+                  <a:srgbClr val="2B211C"/>
                 </a:solidFill>
                 <a:latin typeface="Calibri"/>
               </a:rPr>
@@ -8698,8 +8251,8 @@
         </p:nvSpPr>
         <p:spPr>
           <a:xfrm>
-            <a:off x="548640" y="3282696"/>
-            <a:ext cx="11094415" cy="548640"/>
+            <a:off x="548640" y="3465576"/>
+            <a:ext cx="11094415" cy="640080"/>
           </a:xfrm>
           <a:prstGeom prst="roundRect">
             <a:avLst>
@@ -8707,7 +8260,7 @@
             </a:avLst>
           </a:prstGeom>
           <a:solidFill>
-            <a:srgbClr val="F7F4F2"/>
+            <a:srgbClr val="FAF4F2"/>
           </a:solidFill>
           <a:ln>
             <a:noFill/>
@@ -8744,14 +8297,14 @@
         </p:nvSpPr>
         <p:spPr>
           <a:xfrm>
-            <a:off x="713232" y="3346703"/>
+            <a:off x="713232" y="3575304"/>
             <a:ext cx="420624" cy="420624"/>
           </a:xfrm>
           <a:prstGeom prst="ellipse">
             <a:avLst/>
           </a:prstGeom>
           <a:solidFill>
-            <a:srgbClr val="E6DFDA"/>
+            <a:srgbClr val="A4472B"/>
           </a:solidFill>
           <a:ln>
             <a:noFill/>
@@ -8773,14 +8326,14 @@
           </a:fontRef>
         </p:style>
         <p:txBody>
-          <a:bodyPr rtlCol="0" anchor="ctr" lIns="0" rIns="0"/>
+          <a:bodyPr rtlCol="0" anchor="ctr" lIns="0" rIns="0" tIns="0" bIns="0"/>
           <a:lstStyle/>
           <a:p>
             <a:pPr algn="ctr"/>
             <a:r>
               <a:rPr sz="1500" i="0" b="1">
                 <a:solidFill>
-                  <a:srgbClr val="6E625B"/>
+                  <a:srgbClr val="FFFFFF"/>
                 </a:solidFill>
                 <a:latin typeface="Calibri"/>
               </a:rPr>
@@ -8797,8 +8350,8 @@
         </p:nvSpPr>
         <p:spPr>
           <a:xfrm>
-            <a:off x="1371600" y="3282696"/>
-            <a:ext cx="10088575" cy="548640"/>
+            <a:off x="1371600" y="3465576"/>
+            <a:ext cx="10088575" cy="640080"/>
           </a:xfrm>
           <a:prstGeom prst="rect">
             <a:avLst/>
@@ -8814,7 +8367,7 @@
             <a:r>
               <a:rPr sz="1900" i="0" b="0">
                 <a:solidFill>
-                  <a:srgbClr val="6E625B"/>
+                  <a:srgbClr val="2B211C"/>
                 </a:solidFill>
                 <a:latin typeface="Calibri"/>
               </a:rPr>
@@ -8831,8 +8384,8 @@
         </p:nvSpPr>
         <p:spPr>
           <a:xfrm>
-            <a:off x="548640" y="3959352"/>
-            <a:ext cx="11094415" cy="548640"/>
+            <a:off x="548640" y="4233672"/>
+            <a:ext cx="11094415" cy="640080"/>
           </a:xfrm>
           <a:prstGeom prst="roundRect">
             <a:avLst>
@@ -8840,7 +8393,7 @@
             </a:avLst>
           </a:prstGeom>
           <a:solidFill>
-            <a:srgbClr val="F7F4F2"/>
+            <a:srgbClr val="FAF4F2"/>
           </a:solidFill>
           <a:ln>
             <a:noFill/>
@@ -8877,14 +8430,14 @@
         </p:nvSpPr>
         <p:spPr>
           <a:xfrm>
-            <a:off x="713232" y="4023360"/>
+            <a:off x="713232" y="4343400"/>
             <a:ext cx="420624" cy="420624"/>
           </a:xfrm>
           <a:prstGeom prst="ellipse">
             <a:avLst/>
           </a:prstGeom>
           <a:solidFill>
-            <a:srgbClr val="E6DFDA"/>
+            <a:srgbClr val="A4472B"/>
           </a:solidFill>
           <a:ln>
             <a:noFill/>
@@ -8906,14 +8459,14 @@
           </a:fontRef>
         </p:style>
         <p:txBody>
-          <a:bodyPr rtlCol="0" anchor="ctr" lIns="0" rIns="0"/>
+          <a:bodyPr rtlCol="0" anchor="ctr" lIns="0" rIns="0" tIns="0" bIns="0"/>
           <a:lstStyle/>
           <a:p>
             <a:pPr algn="ctr"/>
             <a:r>
               <a:rPr sz="1500" i="0" b="1">
                 <a:solidFill>
-                  <a:srgbClr val="6E625B"/>
+                  <a:srgbClr val="FFFFFF"/>
                 </a:solidFill>
                 <a:latin typeface="Calibri"/>
               </a:rPr>
@@ -8930,8 +8483,8 @@
         </p:nvSpPr>
         <p:spPr>
           <a:xfrm>
-            <a:off x="1371600" y="3959352"/>
-            <a:ext cx="10088575" cy="548640"/>
+            <a:off x="1371600" y="4233672"/>
+            <a:ext cx="10088575" cy="640080"/>
           </a:xfrm>
           <a:prstGeom prst="rect">
             <a:avLst/>
@@ -8947,7 +8500,7 @@
             <a:r>
               <a:rPr sz="1900" i="0" b="0">
                 <a:solidFill>
-                  <a:srgbClr val="6E625B"/>
+                  <a:srgbClr val="2B211C"/>
                 </a:solidFill>
                 <a:latin typeface="Calibri"/>
               </a:rPr>
@@ -8964,8 +8517,8 @@
         </p:nvSpPr>
         <p:spPr>
           <a:xfrm>
-            <a:off x="548640" y="4636008"/>
-            <a:ext cx="11094415" cy="548640"/>
+            <a:off x="548640" y="5001768"/>
+            <a:ext cx="11094415" cy="640080"/>
           </a:xfrm>
           <a:prstGeom prst="roundRect">
             <a:avLst>
@@ -8973,7 +8526,7 @@
             </a:avLst>
           </a:prstGeom>
           <a:solidFill>
-            <a:srgbClr val="2F6F7A"/>
+            <a:srgbClr val="FAF4F2"/>
           </a:solidFill>
           <a:ln>
             <a:noFill/>
@@ -9010,14 +8563,14 @@
         </p:nvSpPr>
         <p:spPr>
           <a:xfrm>
-            <a:off x="713232" y="4700016"/>
+            <a:off x="713232" y="5111496"/>
             <a:ext cx="420624" cy="420624"/>
           </a:xfrm>
           <a:prstGeom prst="ellipse">
             <a:avLst/>
           </a:prstGeom>
           <a:solidFill>
-            <a:srgbClr val="FFFFFF"/>
+            <a:srgbClr val="A4472B"/>
           </a:solidFill>
           <a:ln>
             <a:noFill/>
@@ -9039,14 +8592,14 @@
           </a:fontRef>
         </p:style>
         <p:txBody>
-          <a:bodyPr rtlCol="0" anchor="ctr" lIns="0" rIns="0"/>
+          <a:bodyPr rtlCol="0" anchor="ctr" lIns="0" rIns="0" tIns="0" bIns="0"/>
           <a:lstStyle/>
           <a:p>
             <a:pPr algn="ctr"/>
             <a:r>
               <a:rPr sz="1500" i="0" b="1">
                 <a:solidFill>
-                  <a:srgbClr val="2F6F7A"/>
+                  <a:srgbClr val="FFFFFF"/>
                 </a:solidFill>
                 <a:latin typeface="Calibri"/>
               </a:rPr>
@@ -9063,8 +8616,8 @@
         </p:nvSpPr>
         <p:spPr>
           <a:xfrm>
-            <a:off x="1371600" y="4636008"/>
-            <a:ext cx="10088575" cy="548640"/>
+            <a:off x="1371600" y="5001768"/>
+            <a:ext cx="10088575" cy="640080"/>
           </a:xfrm>
           <a:prstGeom prst="rect">
             <a:avLst/>
@@ -9078,56 +8631,13 @@
           <a:lstStyle/>
           <a:p>
             <a:r>
-              <a:rPr sz="1900" i="0" b="1">
-                <a:solidFill>
-                  <a:srgbClr val="FFFFFF"/>
+              <a:rPr sz="1900" i="0" b="0">
+                <a:solidFill>
+                  <a:srgbClr val="2B211C"/>
                 </a:solidFill>
                 <a:latin typeface="Calibri"/>
               </a:rPr>
               <a:t>Report it to the EPVC</a:t>
-            </a:r>
-          </a:p>
-        </p:txBody>
-      </p:sp>
-      <p:sp>
-        <p:nvSpPr>
-          <p:cNvPr id="21" name="TextBox 20"/>
-          <p:cNvSpPr txBox="1"/>
-          <p:nvPr/>
-        </p:nvSpPr>
-        <p:spPr>
-          <a:xfrm>
-            <a:off x="548640" y="5358384"/>
-            <a:ext cx="11094415" cy="685800"/>
-          </a:xfrm>
-          <a:prstGeom prst="rect">
-            <a:avLst/>
-          </a:prstGeom>
-          <a:noFill/>
-        </p:spPr>
-        <p:txBody>
-          <a:bodyPr wrap="square" anchor="t" lIns="0" rIns="0" tIns="0" bIns="0">
-            <a:spAutoFit/>
-          </a:bodyPr>
-          <a:lstStyle/>
-          <a:p>
-            <a:r>
-              <a:rPr sz="1500" i="0" b="1">
-                <a:solidFill>
-                  <a:srgbClr val="2F6F7A"/>
-                </a:solidFill>
-                <a:latin typeface="Calibri"/>
-              </a:rPr>
-              <a:t>Why:  </a:t>
-            </a:r>
-            <a:r>
-              <a:rPr sz="1500" i="0" b="0">
-                <a:solidFill>
-                  <a:srgbClr val="2B211C"/>
-                </a:solidFill>
-                <a:latin typeface="Calibri"/>
-              </a:rPr>
-              <a:t>Suspicion is enough to report. A and B delay safety signals; C is unsafe advice.</a:t>
             </a:r>
           </a:p>
         </p:txBody>
@@ -9195,7 +8705,7 @@
           </a:fontRef>
         </p:style>
         <p:txBody>
-          <a:bodyPr rtlCol="0" anchor="ctr" lIns="0" rIns="0"/>
+          <a:bodyPr rtlCol="0" anchor="ctr" lIns="0" rIns="0" tIns="0" bIns="0"/>
           <a:lstStyle/>
           <a:p>
             <a:pPr algn="ctr"/>
@@ -9240,7 +8750,7 @@
                 </a:solidFill>
                 <a:latin typeface="Calibri"/>
               </a:rPr>
-              <a:t>SELF-ASSESSMENT  ·  QUESTION 3 OF 5</a:t>
+              <a:t>SECTION 9  ·  QUESTION 2 OF 5  ·  ANSWER</a:t>
             </a:r>
           </a:p>
         </p:txBody>
@@ -9274,7 +8784,7 @@
                 </a:solidFill>
                 <a:latin typeface="Cambria"/>
               </a:rPr>
-              <a:t>Your turn</a:t>
+              <a:t>Check your answer</a:t>
             </a:r>
           </a:p>
         </p:txBody>
@@ -9357,7 +8867,7 @@
           <p:nvPr/>
         </p:nvPicPr>
         <p:blipFill>
-          <a:blip r:embed="rId3"/>
+          <a:blip r:embed="rId2"/>
           <a:stretch>
             <a:fillRect/>
           </a:stretch>
@@ -9401,7 +8911,7 @@
                 </a:solidFill>
                 <a:latin typeface="Calibri"/>
               </a:rPr>
-              <a:t>Which is a role of the Drug and Therapeutics Committee?</a:t>
+              <a:t>A pharmacist suspects, but is not sure, that a drug caused a rash. What should she do?</a:t>
             </a:r>
           </a:p>
         </p:txBody>
@@ -9414,8 +8924,8 @@
         </p:nvSpPr>
         <p:spPr>
           <a:xfrm>
-            <a:off x="548640" y="2697480"/>
-            <a:ext cx="11094415" cy="640080"/>
+            <a:off x="548640" y="2606040"/>
+            <a:ext cx="11094415" cy="548640"/>
           </a:xfrm>
           <a:prstGeom prst="roundRect">
             <a:avLst>
@@ -9423,7 +8933,7 @@
             </a:avLst>
           </a:prstGeom>
           <a:solidFill>
-            <a:srgbClr val="FBF3EE"/>
+            <a:srgbClr val="F5F4F4"/>
           </a:solidFill>
           <a:ln>
             <a:noFill/>
@@ -9460,14 +8970,14 @@
         </p:nvSpPr>
         <p:spPr>
           <a:xfrm>
-            <a:off x="713232" y="2807208"/>
+            <a:off x="713232" y="2670048"/>
             <a:ext cx="420624" cy="420624"/>
           </a:xfrm>
           <a:prstGeom prst="ellipse">
             <a:avLst/>
           </a:prstGeom>
           <a:solidFill>
-            <a:srgbClr val="A4472B"/>
+            <a:srgbClr val="E2E0DE"/>
           </a:solidFill>
           <a:ln>
             <a:noFill/>
@@ -9489,14 +8999,14 @@
           </a:fontRef>
         </p:style>
         <p:txBody>
-          <a:bodyPr rtlCol="0" anchor="ctr" lIns="0" rIns="0"/>
+          <a:bodyPr rtlCol="0" anchor="ctr" lIns="0" rIns="0" tIns="0" bIns="0"/>
           <a:lstStyle/>
           <a:p>
             <a:pPr algn="ctr"/>
             <a:r>
               <a:rPr sz="1500" i="0" b="1">
                 <a:solidFill>
-                  <a:srgbClr val="FFFFFF"/>
+                  <a:srgbClr val="6E625B"/>
                 </a:solidFill>
                 <a:latin typeface="Calibri"/>
               </a:rPr>
@@ -9513,8 +9023,8 @@
         </p:nvSpPr>
         <p:spPr>
           <a:xfrm>
-            <a:off x="1371600" y="2697480"/>
-            <a:ext cx="10088575" cy="640080"/>
+            <a:off x="1371600" y="2606040"/>
+            <a:ext cx="10088575" cy="548640"/>
           </a:xfrm>
           <a:prstGeom prst="rect">
             <a:avLst/>
@@ -9530,11 +9040,11 @@
             <a:r>
               <a:rPr sz="1900" i="0" b="0">
                 <a:solidFill>
-                  <a:srgbClr val="2B211C"/>
-                </a:solidFill>
-                <a:latin typeface="Calibri"/>
-              </a:rPr>
-              <a:t>Identifying high-risk medicines for close monitoring</a:t>
+                  <a:srgbClr val="6E625B"/>
+                </a:solidFill>
+                <a:latin typeface="Calibri"/>
+              </a:rPr>
+              <a:t>Wait until she is certain</a:t>
             </a:r>
           </a:p>
         </p:txBody>
@@ -9547,8 +9057,8 @@
         </p:nvSpPr>
         <p:spPr>
           <a:xfrm>
-            <a:off x="548640" y="3465576"/>
-            <a:ext cx="11094415" cy="640080"/>
+            <a:off x="548640" y="3282696"/>
+            <a:ext cx="11094415" cy="548640"/>
           </a:xfrm>
           <a:prstGeom prst="roundRect">
             <a:avLst>
@@ -9556,7 +9066,7 @@
             </a:avLst>
           </a:prstGeom>
           <a:solidFill>
-            <a:srgbClr val="FBF3EE"/>
+            <a:srgbClr val="F5F4F4"/>
           </a:solidFill>
           <a:ln>
             <a:noFill/>
@@ -9593,14 +9103,14 @@
         </p:nvSpPr>
         <p:spPr>
           <a:xfrm>
-            <a:off x="713232" y="3575304"/>
+            <a:off x="713232" y="3346703"/>
             <a:ext cx="420624" cy="420624"/>
           </a:xfrm>
           <a:prstGeom prst="ellipse">
             <a:avLst/>
           </a:prstGeom>
           <a:solidFill>
-            <a:srgbClr val="A4472B"/>
+            <a:srgbClr val="E2E0DE"/>
           </a:solidFill>
           <a:ln>
             <a:noFill/>
@@ -9622,14 +9132,14 @@
           </a:fontRef>
         </p:style>
         <p:txBody>
-          <a:bodyPr rtlCol="0" anchor="ctr" lIns="0" rIns="0"/>
+          <a:bodyPr rtlCol="0" anchor="ctr" lIns="0" rIns="0" tIns="0" bIns="0"/>
           <a:lstStyle/>
           <a:p>
             <a:pPr algn="ctr"/>
             <a:r>
               <a:rPr sz="1500" i="0" b="1">
                 <a:solidFill>
-                  <a:srgbClr val="FFFFFF"/>
+                  <a:srgbClr val="6E625B"/>
                 </a:solidFill>
                 <a:latin typeface="Calibri"/>
               </a:rPr>
@@ -9646,8 +9156,8 @@
         </p:nvSpPr>
         <p:spPr>
           <a:xfrm>
-            <a:off x="1371600" y="3465576"/>
-            <a:ext cx="10088575" cy="640080"/>
+            <a:off x="1371600" y="3282696"/>
+            <a:ext cx="10088575" cy="548640"/>
           </a:xfrm>
           <a:prstGeom prst="rect">
             <a:avLst/>
@@ -9663,11 +9173,11 @@
             <a:r>
               <a:rPr sz="1900" i="0" b="0">
                 <a:solidFill>
-                  <a:srgbClr val="2B211C"/>
-                </a:solidFill>
-                <a:latin typeface="Calibri"/>
-              </a:rPr>
-              <a:t>Manufacturing new medicines</a:t>
+                  <a:srgbClr val="6E625B"/>
+                </a:solidFill>
+                <a:latin typeface="Calibri"/>
+              </a:rPr>
+              <a:t>Report only if the patient is admitted</a:t>
             </a:r>
           </a:p>
         </p:txBody>
@@ -9680,8 +9190,8 @@
         </p:nvSpPr>
         <p:spPr>
           <a:xfrm>
-            <a:off x="548640" y="4233672"/>
-            <a:ext cx="11094415" cy="640080"/>
+            <a:off x="548640" y="3959352"/>
+            <a:ext cx="11094415" cy="548640"/>
           </a:xfrm>
           <a:prstGeom prst="roundRect">
             <a:avLst>
@@ -9689,7 +9199,7 @@
             </a:avLst>
           </a:prstGeom>
           <a:solidFill>
-            <a:srgbClr val="FBF3EE"/>
+            <a:srgbClr val="F5F4F4"/>
           </a:solidFill>
           <a:ln>
             <a:noFill/>
@@ -9726,14 +9236,14 @@
         </p:nvSpPr>
         <p:spPr>
           <a:xfrm>
-            <a:off x="713232" y="4343400"/>
+            <a:off x="713232" y="4023360"/>
             <a:ext cx="420624" cy="420624"/>
           </a:xfrm>
           <a:prstGeom prst="ellipse">
             <a:avLst/>
           </a:prstGeom>
           <a:solidFill>
-            <a:srgbClr val="A4472B"/>
+            <a:srgbClr val="E2E0DE"/>
           </a:solidFill>
           <a:ln>
             <a:noFill/>
@@ -9755,14 +9265,14 @@
           </a:fontRef>
         </p:style>
         <p:txBody>
-          <a:bodyPr rtlCol="0" anchor="ctr" lIns="0" rIns="0"/>
+          <a:bodyPr rtlCol="0" anchor="ctr" lIns="0" rIns="0" tIns="0" bIns="0"/>
           <a:lstStyle/>
           <a:p>
             <a:pPr algn="ctr"/>
             <a:r>
               <a:rPr sz="1500" i="0" b="1">
                 <a:solidFill>
-                  <a:srgbClr val="FFFFFF"/>
+                  <a:srgbClr val="6E625B"/>
                 </a:solidFill>
                 <a:latin typeface="Calibri"/>
               </a:rPr>
@@ -9779,8 +9289,8 @@
         </p:nvSpPr>
         <p:spPr>
           <a:xfrm>
-            <a:off x="1371600" y="4233672"/>
-            <a:ext cx="10088575" cy="640080"/>
+            <a:off x="1371600" y="3959352"/>
+            <a:ext cx="10088575" cy="548640"/>
           </a:xfrm>
           <a:prstGeom prst="rect">
             <a:avLst/>
@@ -9796,11 +9306,11 @@
             <a:r>
               <a:rPr sz="1900" i="0" b="0">
                 <a:solidFill>
-                  <a:srgbClr val="2B211C"/>
-                </a:solidFill>
-                <a:latin typeface="Calibri"/>
-              </a:rPr>
-              <a:t>Setting drug prices nationally</a:t>
+                  <a:srgbClr val="6E625B"/>
+                </a:solidFill>
+                <a:latin typeface="Calibri"/>
+              </a:rPr>
+              <a:t>Tell the patient to stop all drugs</a:t>
             </a:r>
           </a:p>
         </p:txBody>
@@ -9813,8 +9323,8 @@
         </p:nvSpPr>
         <p:spPr>
           <a:xfrm>
-            <a:off x="548640" y="5001768"/>
-            <a:ext cx="11094415" cy="640080"/>
+            <a:off x="548640" y="4636008"/>
+            <a:ext cx="11094415" cy="548640"/>
           </a:xfrm>
           <a:prstGeom prst="roundRect">
             <a:avLst>
@@ -9822,7 +9332,7 @@
             </a:avLst>
           </a:prstGeom>
           <a:solidFill>
-            <a:srgbClr val="FBF3EE"/>
+            <a:srgbClr val="2F6F7A"/>
           </a:solidFill>
           <a:ln>
             <a:noFill/>
@@ -9859,14 +9369,14 @@
         </p:nvSpPr>
         <p:spPr>
           <a:xfrm>
-            <a:off x="713232" y="5111496"/>
+            <a:off x="713232" y="4700016"/>
             <a:ext cx="420624" cy="420624"/>
           </a:xfrm>
           <a:prstGeom prst="ellipse">
             <a:avLst/>
           </a:prstGeom>
           <a:solidFill>
-            <a:srgbClr val="A4472B"/>
+            <a:srgbClr val="FFFFFF"/>
           </a:solidFill>
           <a:ln>
             <a:noFill/>
@@ -9888,14 +9398,14 @@
           </a:fontRef>
         </p:style>
         <p:txBody>
-          <a:bodyPr rtlCol="0" anchor="ctr" lIns="0" rIns="0"/>
+          <a:bodyPr rtlCol="0" anchor="ctr" lIns="0" rIns="0" tIns="0" bIns="0"/>
           <a:lstStyle/>
           <a:p>
             <a:pPr algn="ctr"/>
             <a:r>
               <a:rPr sz="1500" i="0" b="1">
                 <a:solidFill>
-                  <a:srgbClr val="FFFFFF"/>
+                  <a:srgbClr val="2F6F7A"/>
                 </a:solidFill>
                 <a:latin typeface="Calibri"/>
               </a:rPr>
@@ -9912,8 +9422,8 @@
         </p:nvSpPr>
         <p:spPr>
           <a:xfrm>
-            <a:off x="1371600" y="5001768"/>
-            <a:ext cx="10088575" cy="640080"/>
+            <a:off x="1371600" y="4636008"/>
+            <a:ext cx="10088575" cy="548640"/>
           </a:xfrm>
           <a:prstGeom prst="rect">
             <a:avLst/>
@@ -9927,13 +9437,56 @@
           <a:lstStyle/>
           <a:p>
             <a:r>
-              <a:rPr sz="1900" i="0" b="0">
+              <a:rPr sz="1900" i="0" b="1">
+                <a:solidFill>
+                  <a:srgbClr val="FFFFFF"/>
+                </a:solidFill>
+                <a:latin typeface="Calibri"/>
+              </a:rPr>
+              <a:t>Report it to the EPVC</a:t>
+            </a:r>
+          </a:p>
+        </p:txBody>
+      </p:sp>
+      <p:sp>
+        <p:nvSpPr>
+          <p:cNvPr id="21" name="TextBox 20"/>
+          <p:cNvSpPr txBox="1"/>
+          <p:nvPr/>
+        </p:nvSpPr>
+        <p:spPr>
+          <a:xfrm>
+            <a:off x="548640" y="5358384"/>
+            <a:ext cx="11094415" cy="685800"/>
+          </a:xfrm>
+          <a:prstGeom prst="rect">
+            <a:avLst/>
+          </a:prstGeom>
+          <a:noFill/>
+        </p:spPr>
+        <p:txBody>
+          <a:bodyPr wrap="square" anchor="t" lIns="0" rIns="0" tIns="0" bIns="0">
+            <a:spAutoFit/>
+          </a:bodyPr>
+          <a:lstStyle/>
+          <a:p>
+            <a:r>
+              <a:rPr sz="1500" i="0" b="1">
+                <a:solidFill>
+                  <a:srgbClr val="2F6F7A"/>
+                </a:solidFill>
+                <a:latin typeface="Calibri"/>
+              </a:rPr>
+              <a:t>Why:  </a:t>
+            </a:r>
+            <a:r>
+              <a:rPr sz="1500" i="0" b="0">
                 <a:solidFill>
                   <a:srgbClr val="2B211C"/>
                 </a:solidFill>
                 <a:latin typeface="Calibri"/>
               </a:rPr>
-              <a:t>Approving marketing authorisations</a:t>
+              <a:t>Suspicion is enough to report. A and B delay safety signals; C is unsafe advice.</a:t>
             </a:r>
           </a:p>
         </p:txBody>
@@ -10001,7 +9554,7 @@
           </a:fontRef>
         </p:style>
         <p:txBody>
-          <a:bodyPr rtlCol="0" anchor="ctr" lIns="0" rIns="0"/>
+          <a:bodyPr rtlCol="0" anchor="ctr" lIns="0" rIns="0" tIns="0" bIns="0"/>
           <a:lstStyle/>
           <a:p>
             <a:pPr algn="ctr"/>
@@ -10046,7 +9599,7 @@
                 </a:solidFill>
                 <a:latin typeface="Calibri"/>
               </a:rPr>
-              <a:t>SELF-ASSESSMENT  ·  QUESTION 3 OF 5  ·  ANSWER</a:t>
+              <a:t>SECTION 9  ·  QUESTION 3 OF 5</a:t>
             </a:r>
           </a:p>
         </p:txBody>
@@ -10080,7 +9633,7 @@
                 </a:solidFill>
                 <a:latin typeface="Cambria"/>
               </a:rPr>
-              <a:t>Check your answer</a:t>
+              <a:t>Your turn</a:t>
             </a:r>
           </a:p>
         </p:txBody>
@@ -10163,7 +9716,7 @@
           <p:nvPr/>
         </p:nvPicPr>
         <p:blipFill>
-          <a:blip r:embed="rId2"/>
+          <a:blip r:embed="rId3"/>
           <a:stretch>
             <a:fillRect/>
           </a:stretch>
@@ -10220,8 +9773,8 @@
         </p:nvSpPr>
         <p:spPr>
           <a:xfrm>
-            <a:off x="548640" y="2606040"/>
-            <a:ext cx="11094415" cy="548640"/>
+            <a:off x="548640" y="2697480"/>
+            <a:ext cx="11094415" cy="640080"/>
           </a:xfrm>
           <a:prstGeom prst="roundRect">
             <a:avLst>
@@ -10229,7 +9782,7 @@
             </a:avLst>
           </a:prstGeom>
           <a:solidFill>
-            <a:srgbClr val="2F6F7A"/>
+            <a:srgbClr val="FAF4F2"/>
           </a:solidFill>
           <a:ln>
             <a:noFill/>
@@ -10266,14 +9819,14 @@
         </p:nvSpPr>
         <p:spPr>
           <a:xfrm>
-            <a:off x="713232" y="2670048"/>
+            <a:off x="713232" y="2807208"/>
             <a:ext cx="420624" cy="420624"/>
           </a:xfrm>
           <a:prstGeom prst="ellipse">
             <a:avLst/>
           </a:prstGeom>
           <a:solidFill>
-            <a:srgbClr val="FFFFFF"/>
+            <a:srgbClr val="A4472B"/>
           </a:solidFill>
           <a:ln>
             <a:noFill/>
@@ -10295,14 +9848,14 @@
           </a:fontRef>
         </p:style>
         <p:txBody>
-          <a:bodyPr rtlCol="0" anchor="ctr" lIns="0" rIns="0"/>
+          <a:bodyPr rtlCol="0" anchor="ctr" lIns="0" rIns="0" tIns="0" bIns="0"/>
           <a:lstStyle/>
           <a:p>
             <a:pPr algn="ctr"/>
             <a:r>
               <a:rPr sz="1500" i="0" b="1">
                 <a:solidFill>
-                  <a:srgbClr val="2F6F7A"/>
+                  <a:srgbClr val="FFFFFF"/>
                 </a:solidFill>
                 <a:latin typeface="Calibri"/>
               </a:rPr>
@@ -10319,8 +9872,8 @@
         </p:nvSpPr>
         <p:spPr>
           <a:xfrm>
-            <a:off x="1371600" y="2606040"/>
-            <a:ext cx="10088575" cy="548640"/>
+            <a:off x="1371600" y="2697480"/>
+            <a:ext cx="10088575" cy="640080"/>
           </a:xfrm>
           <a:prstGeom prst="rect">
             <a:avLst/>
@@ -10334,9 +9887,9 @@
           <a:lstStyle/>
           <a:p>
             <a:r>
-              <a:rPr sz="1900" i="0" b="1">
-                <a:solidFill>
-                  <a:srgbClr val="FFFFFF"/>
+              <a:rPr sz="1900" i="0" b="0">
+                <a:solidFill>
+                  <a:srgbClr val="2B211C"/>
                 </a:solidFill>
                 <a:latin typeface="Calibri"/>
               </a:rPr>
@@ -10353,8 +9906,8 @@
         </p:nvSpPr>
         <p:spPr>
           <a:xfrm>
-            <a:off x="548640" y="3282696"/>
-            <a:ext cx="11094415" cy="548640"/>
+            <a:off x="548640" y="3465576"/>
+            <a:ext cx="11094415" cy="640080"/>
           </a:xfrm>
           <a:prstGeom prst="roundRect">
             <a:avLst>
@@ -10362,7 +9915,7 @@
             </a:avLst>
           </a:prstGeom>
           <a:solidFill>
-            <a:srgbClr val="F7F4F2"/>
+            <a:srgbClr val="FAF4F2"/>
           </a:solidFill>
           <a:ln>
             <a:noFill/>
@@ -10399,14 +9952,14 @@
         </p:nvSpPr>
         <p:spPr>
           <a:xfrm>
-            <a:off x="713232" y="3346703"/>
+            <a:off x="713232" y="3575304"/>
             <a:ext cx="420624" cy="420624"/>
           </a:xfrm>
           <a:prstGeom prst="ellipse">
             <a:avLst/>
           </a:prstGeom>
           <a:solidFill>
-            <a:srgbClr val="E6DFDA"/>
+            <a:srgbClr val="A4472B"/>
           </a:solidFill>
           <a:ln>
             <a:noFill/>
@@ -10428,14 +9981,14 @@
           </a:fontRef>
         </p:style>
         <p:txBody>
-          <a:bodyPr rtlCol="0" anchor="ctr" lIns="0" rIns="0"/>
+          <a:bodyPr rtlCol="0" anchor="ctr" lIns="0" rIns="0" tIns="0" bIns="0"/>
           <a:lstStyle/>
           <a:p>
             <a:pPr algn="ctr"/>
             <a:r>
               <a:rPr sz="1500" i="0" b="1">
                 <a:solidFill>
-                  <a:srgbClr val="6E625B"/>
+                  <a:srgbClr val="FFFFFF"/>
                 </a:solidFill>
                 <a:latin typeface="Calibri"/>
               </a:rPr>
@@ -10452,8 +10005,8 @@
         </p:nvSpPr>
         <p:spPr>
           <a:xfrm>
-            <a:off x="1371600" y="3282696"/>
-            <a:ext cx="10088575" cy="548640"/>
+            <a:off x="1371600" y="3465576"/>
+            <a:ext cx="10088575" cy="640080"/>
           </a:xfrm>
           <a:prstGeom prst="rect">
             <a:avLst/>
@@ -10469,7 +10022,7 @@
             <a:r>
               <a:rPr sz="1900" i="0" b="0">
                 <a:solidFill>
-                  <a:srgbClr val="6E625B"/>
+                  <a:srgbClr val="2B211C"/>
                 </a:solidFill>
                 <a:latin typeface="Calibri"/>
               </a:rPr>
@@ -10486,8 +10039,8 @@
         </p:nvSpPr>
         <p:spPr>
           <a:xfrm>
-            <a:off x="548640" y="3959352"/>
-            <a:ext cx="11094415" cy="548640"/>
+            <a:off x="548640" y="4233672"/>
+            <a:ext cx="11094415" cy="640080"/>
           </a:xfrm>
           <a:prstGeom prst="roundRect">
             <a:avLst>
@@ -10495,7 +10048,7 @@
             </a:avLst>
           </a:prstGeom>
           <a:solidFill>
-            <a:srgbClr val="F7F4F2"/>
+            <a:srgbClr val="FAF4F2"/>
           </a:solidFill>
           <a:ln>
             <a:noFill/>
@@ -10532,14 +10085,14 @@
         </p:nvSpPr>
         <p:spPr>
           <a:xfrm>
-            <a:off x="713232" y="4023360"/>
+            <a:off x="713232" y="4343400"/>
             <a:ext cx="420624" cy="420624"/>
           </a:xfrm>
           <a:prstGeom prst="ellipse">
             <a:avLst/>
           </a:prstGeom>
           <a:solidFill>
-            <a:srgbClr val="E6DFDA"/>
+            <a:srgbClr val="A4472B"/>
           </a:solidFill>
           <a:ln>
             <a:noFill/>
@@ -10561,14 +10114,14 @@
           </a:fontRef>
         </p:style>
         <p:txBody>
-          <a:bodyPr rtlCol="0" anchor="ctr" lIns="0" rIns="0"/>
+          <a:bodyPr rtlCol="0" anchor="ctr" lIns="0" rIns="0" tIns="0" bIns="0"/>
           <a:lstStyle/>
           <a:p>
             <a:pPr algn="ctr"/>
             <a:r>
               <a:rPr sz="1500" i="0" b="1">
                 <a:solidFill>
-                  <a:srgbClr val="6E625B"/>
+                  <a:srgbClr val="FFFFFF"/>
                 </a:solidFill>
                 <a:latin typeface="Calibri"/>
               </a:rPr>
@@ -10585,8 +10138,8 @@
         </p:nvSpPr>
         <p:spPr>
           <a:xfrm>
-            <a:off x="1371600" y="3959352"/>
-            <a:ext cx="10088575" cy="548640"/>
+            <a:off x="1371600" y="4233672"/>
+            <a:ext cx="10088575" cy="640080"/>
           </a:xfrm>
           <a:prstGeom prst="rect">
             <a:avLst/>
@@ -10602,7 +10155,7 @@
             <a:r>
               <a:rPr sz="1900" i="0" b="0">
                 <a:solidFill>
-                  <a:srgbClr val="6E625B"/>
+                  <a:srgbClr val="2B211C"/>
                 </a:solidFill>
                 <a:latin typeface="Calibri"/>
               </a:rPr>
@@ -10619,8 +10172,8 @@
         </p:nvSpPr>
         <p:spPr>
           <a:xfrm>
-            <a:off x="548640" y="4636008"/>
-            <a:ext cx="11094415" cy="548640"/>
+            <a:off x="548640" y="5001768"/>
+            <a:ext cx="11094415" cy="640080"/>
           </a:xfrm>
           <a:prstGeom prst="roundRect">
             <a:avLst>
@@ -10628,7 +10181,7 @@
             </a:avLst>
           </a:prstGeom>
           <a:solidFill>
-            <a:srgbClr val="F7F4F2"/>
+            <a:srgbClr val="FAF4F2"/>
           </a:solidFill>
           <a:ln>
             <a:noFill/>
@@ -10665,14 +10218,14 @@
         </p:nvSpPr>
         <p:spPr>
           <a:xfrm>
-            <a:off x="713232" y="4700016"/>
+            <a:off x="713232" y="5111496"/>
             <a:ext cx="420624" cy="420624"/>
           </a:xfrm>
           <a:prstGeom prst="ellipse">
             <a:avLst/>
           </a:prstGeom>
           <a:solidFill>
-            <a:srgbClr val="E6DFDA"/>
+            <a:srgbClr val="A4472B"/>
           </a:solidFill>
           <a:ln>
             <a:noFill/>
@@ -10694,14 +10247,14 @@
           </a:fontRef>
         </p:style>
         <p:txBody>
-          <a:bodyPr rtlCol="0" anchor="ctr" lIns="0" rIns="0"/>
+          <a:bodyPr rtlCol="0" anchor="ctr" lIns="0" rIns="0" tIns="0" bIns="0"/>
           <a:lstStyle/>
           <a:p>
             <a:pPr algn="ctr"/>
             <a:r>
               <a:rPr sz="1500" i="0" b="1">
                 <a:solidFill>
-                  <a:srgbClr val="6E625B"/>
+                  <a:srgbClr val="FFFFFF"/>
                 </a:solidFill>
                 <a:latin typeface="Calibri"/>
               </a:rPr>
@@ -10718,8 +10271,8 @@
         </p:nvSpPr>
         <p:spPr>
           <a:xfrm>
-            <a:off x="1371600" y="4636008"/>
-            <a:ext cx="10088575" cy="548640"/>
+            <a:off x="1371600" y="5001768"/>
+            <a:ext cx="10088575" cy="640080"/>
           </a:xfrm>
           <a:prstGeom prst="rect">
             <a:avLst/>
@@ -10735,54 +10288,11 @@
             <a:r>
               <a:rPr sz="1900" i="0" b="0">
                 <a:solidFill>
-                  <a:srgbClr val="6E625B"/>
+                  <a:srgbClr val="2B211C"/>
                 </a:solidFill>
                 <a:latin typeface="Calibri"/>
               </a:rPr>
               <a:t>Approving marketing authorisations</a:t>
-            </a:r>
-          </a:p>
-        </p:txBody>
-      </p:sp>
-      <p:sp>
-        <p:nvSpPr>
-          <p:cNvPr id="21" name="TextBox 20"/>
-          <p:cNvSpPr txBox="1"/>
-          <p:nvPr/>
-        </p:nvSpPr>
-        <p:spPr>
-          <a:xfrm>
-            <a:off x="548640" y="5358384"/>
-            <a:ext cx="11094415" cy="685800"/>
-          </a:xfrm>
-          <a:prstGeom prst="rect">
-            <a:avLst/>
-          </a:prstGeom>
-          <a:noFill/>
-        </p:spPr>
-        <p:txBody>
-          <a:bodyPr wrap="square" anchor="t" lIns="0" rIns="0" tIns="0" bIns="0">
-            <a:spAutoFit/>
-          </a:bodyPr>
-          <a:lstStyle/>
-          <a:p>
-            <a:r>
-              <a:rPr sz="1500" i="0" b="1">
-                <a:solidFill>
-                  <a:srgbClr val="2F6F7A"/>
-                </a:solidFill>
-                <a:latin typeface="Calibri"/>
-              </a:rPr>
-              <a:t>Why:  </a:t>
-            </a:r>
-            <a:r>
-              <a:rPr sz="1500" i="0" b="0">
-                <a:solidFill>
-                  <a:srgbClr val="2B211C"/>
-                </a:solidFill>
-                <a:latin typeface="Calibri"/>
-              </a:rPr>
-              <a:t>The DTC identifies and monitors high-risk medicines. B, C and D belong to others.</a:t>
             </a:r>
           </a:p>
         </p:txBody>
@@ -10850,7 +10360,7 @@
           </a:fontRef>
         </p:style>
         <p:txBody>
-          <a:bodyPr rtlCol="0" anchor="ctr" lIns="0" rIns="0"/>
+          <a:bodyPr rtlCol="0" anchor="ctr" lIns="0" rIns="0" tIns="0" bIns="0"/>
           <a:lstStyle/>
           <a:p>
             <a:pPr algn="ctr"/>
@@ -10895,7 +10405,7 @@
                 </a:solidFill>
                 <a:latin typeface="Calibri"/>
               </a:rPr>
-              <a:t>SELF-ASSESSMENT  ·  QUESTION 4 OF 5</a:t>
+              <a:t>SECTION 9  ·  QUESTION 3 OF 5  ·  ANSWER</a:t>
             </a:r>
           </a:p>
         </p:txBody>
@@ -10929,7 +10439,7 @@
                 </a:solidFill>
                 <a:latin typeface="Cambria"/>
               </a:rPr>
-              <a:t>Your turn</a:t>
+              <a:t>Check your answer</a:t>
             </a:r>
           </a:p>
         </p:txBody>
@@ -11012,7 +10522,7 @@
           <p:nvPr/>
         </p:nvPicPr>
         <p:blipFill>
-          <a:blip r:embed="rId3"/>
+          <a:blip r:embed="rId2"/>
           <a:stretch>
             <a:fillRect/>
           </a:stretch>
@@ -11056,7 +10566,7 @@
                 </a:solidFill>
                 <a:latin typeface="Calibri"/>
               </a:rPr>
-              <a:t>A nurse forgets to give a patient's evening insulin. This is:</a:t>
+              <a:t>Which is a role of the Drug and Therapeutics Committee?</a:t>
             </a:r>
           </a:p>
         </p:txBody>
@@ -11069,8 +10579,8 @@
         </p:nvSpPr>
         <p:spPr>
           <a:xfrm>
-            <a:off x="548640" y="2697480"/>
-            <a:ext cx="11094415" cy="640080"/>
+            <a:off x="548640" y="2606040"/>
+            <a:ext cx="11094415" cy="548640"/>
           </a:xfrm>
           <a:prstGeom prst="roundRect">
             <a:avLst>
@@ -11078,7 +10588,7 @@
             </a:avLst>
           </a:prstGeom>
           <a:solidFill>
-            <a:srgbClr val="FBF3EE"/>
+            <a:srgbClr val="2F6F7A"/>
           </a:solidFill>
           <a:ln>
             <a:noFill/>
@@ -11115,14 +10625,14 @@
         </p:nvSpPr>
         <p:spPr>
           <a:xfrm>
-            <a:off x="713232" y="2807208"/>
+            <a:off x="713232" y="2670048"/>
             <a:ext cx="420624" cy="420624"/>
           </a:xfrm>
           <a:prstGeom prst="ellipse">
             <a:avLst/>
           </a:prstGeom>
           <a:solidFill>
-            <a:srgbClr val="A4472B"/>
+            <a:srgbClr val="FFFFFF"/>
           </a:solidFill>
           <a:ln>
             <a:noFill/>
@@ -11144,14 +10654,14 @@
           </a:fontRef>
         </p:style>
         <p:txBody>
-          <a:bodyPr rtlCol="0" anchor="ctr" lIns="0" rIns="0"/>
+          <a:bodyPr rtlCol="0" anchor="ctr" lIns="0" rIns="0" tIns="0" bIns="0"/>
           <a:lstStyle/>
           <a:p>
             <a:pPr algn="ctr"/>
             <a:r>
               <a:rPr sz="1500" i="0" b="1">
                 <a:solidFill>
-                  <a:srgbClr val="FFFFFF"/>
+                  <a:srgbClr val="2F6F7A"/>
                 </a:solidFill>
                 <a:latin typeface="Calibri"/>
               </a:rPr>
@@ -11168,8 +10678,8 @@
         </p:nvSpPr>
         <p:spPr>
           <a:xfrm>
-            <a:off x="1371600" y="2697480"/>
-            <a:ext cx="10088575" cy="640080"/>
+            <a:off x="1371600" y="2606040"/>
+            <a:ext cx="10088575" cy="548640"/>
           </a:xfrm>
           <a:prstGeom prst="rect">
             <a:avLst/>
@@ -11183,13 +10693,13 @@
           <a:lstStyle/>
           <a:p>
             <a:r>
-              <a:rPr sz="1900" i="0" b="0">
-                <a:solidFill>
-                  <a:srgbClr val="2B211C"/>
-                </a:solidFill>
-                <a:latin typeface="Calibri"/>
-              </a:rPr>
-              <a:t>An error of commission</a:t>
+              <a:rPr sz="1900" i="0" b="1">
+                <a:solidFill>
+                  <a:srgbClr val="FFFFFF"/>
+                </a:solidFill>
+                <a:latin typeface="Calibri"/>
+              </a:rPr>
+              <a:t>Identifying high-risk medicines for close monitoring</a:t>
             </a:r>
           </a:p>
         </p:txBody>
@@ -11202,8 +10712,8 @@
         </p:nvSpPr>
         <p:spPr>
           <a:xfrm>
-            <a:off x="548640" y="3465576"/>
-            <a:ext cx="11094415" cy="640080"/>
+            <a:off x="548640" y="3282696"/>
+            <a:ext cx="11094415" cy="548640"/>
           </a:xfrm>
           <a:prstGeom prst="roundRect">
             <a:avLst>
@@ -11211,7 +10721,7 @@
             </a:avLst>
           </a:prstGeom>
           <a:solidFill>
-            <a:srgbClr val="FBF3EE"/>
+            <a:srgbClr val="F5F4F4"/>
           </a:solidFill>
           <a:ln>
             <a:noFill/>
@@ -11248,14 +10758,14 @@
         </p:nvSpPr>
         <p:spPr>
           <a:xfrm>
-            <a:off x="713232" y="3575304"/>
+            <a:off x="713232" y="3346703"/>
             <a:ext cx="420624" cy="420624"/>
           </a:xfrm>
           <a:prstGeom prst="ellipse">
             <a:avLst/>
           </a:prstGeom>
           <a:solidFill>
-            <a:srgbClr val="A4472B"/>
+            <a:srgbClr val="E2E0DE"/>
           </a:solidFill>
           <a:ln>
             <a:noFill/>
@@ -11277,14 +10787,14 @@
           </a:fontRef>
         </p:style>
         <p:txBody>
-          <a:bodyPr rtlCol="0" anchor="ctr" lIns="0" rIns="0"/>
+          <a:bodyPr rtlCol="0" anchor="ctr" lIns="0" rIns="0" tIns="0" bIns="0"/>
           <a:lstStyle/>
           <a:p>
             <a:pPr algn="ctr"/>
             <a:r>
               <a:rPr sz="1500" i="0" b="1">
                 <a:solidFill>
-                  <a:srgbClr val="FFFFFF"/>
+                  <a:srgbClr val="6E625B"/>
                 </a:solidFill>
                 <a:latin typeface="Calibri"/>
               </a:rPr>
@@ -11301,8 +10811,8 @@
         </p:nvSpPr>
         <p:spPr>
           <a:xfrm>
-            <a:off x="1371600" y="3465576"/>
-            <a:ext cx="10088575" cy="640080"/>
+            <a:off x="1371600" y="3282696"/>
+            <a:ext cx="10088575" cy="548640"/>
           </a:xfrm>
           <a:prstGeom prst="rect">
             <a:avLst/>
@@ -11318,11 +10828,11 @@
             <a:r>
               <a:rPr sz="1900" i="0" b="0">
                 <a:solidFill>
-                  <a:srgbClr val="2B211C"/>
-                </a:solidFill>
-                <a:latin typeface="Calibri"/>
-              </a:rPr>
-              <a:t>A Type A ADR</a:t>
+                  <a:srgbClr val="6E625B"/>
+                </a:solidFill>
+                <a:latin typeface="Calibri"/>
+              </a:rPr>
+              <a:t>Manufacturing new medicines</a:t>
             </a:r>
           </a:p>
         </p:txBody>
@@ -11335,8 +10845,8 @@
         </p:nvSpPr>
         <p:spPr>
           <a:xfrm>
-            <a:off x="548640" y="4233672"/>
-            <a:ext cx="11094415" cy="640080"/>
+            <a:off x="548640" y="3959352"/>
+            <a:ext cx="11094415" cy="548640"/>
           </a:xfrm>
           <a:prstGeom prst="roundRect">
             <a:avLst>
@@ -11344,7 +10854,7 @@
             </a:avLst>
           </a:prstGeom>
           <a:solidFill>
-            <a:srgbClr val="FBF3EE"/>
+            <a:srgbClr val="F5F4F4"/>
           </a:solidFill>
           <a:ln>
             <a:noFill/>
@@ -11381,14 +10891,14 @@
         </p:nvSpPr>
         <p:spPr>
           <a:xfrm>
-            <a:off x="713232" y="4343400"/>
+            <a:off x="713232" y="4023360"/>
             <a:ext cx="420624" cy="420624"/>
           </a:xfrm>
           <a:prstGeom prst="ellipse">
             <a:avLst/>
           </a:prstGeom>
           <a:solidFill>
-            <a:srgbClr val="A4472B"/>
+            <a:srgbClr val="E2E0DE"/>
           </a:solidFill>
           <a:ln>
             <a:noFill/>
@@ -11410,14 +10920,14 @@
           </a:fontRef>
         </p:style>
         <p:txBody>
-          <a:bodyPr rtlCol="0" anchor="ctr" lIns="0" rIns="0"/>
+          <a:bodyPr rtlCol="0" anchor="ctr" lIns="0" rIns="0" tIns="0" bIns="0"/>
           <a:lstStyle/>
           <a:p>
             <a:pPr algn="ctr"/>
             <a:r>
               <a:rPr sz="1500" i="0" b="1">
                 <a:solidFill>
-                  <a:srgbClr val="FFFFFF"/>
+                  <a:srgbClr val="6E625B"/>
                 </a:solidFill>
                 <a:latin typeface="Calibri"/>
               </a:rPr>
@@ -11434,8 +10944,8 @@
         </p:nvSpPr>
         <p:spPr>
           <a:xfrm>
-            <a:off x="1371600" y="4233672"/>
-            <a:ext cx="10088575" cy="640080"/>
+            <a:off x="1371600" y="3959352"/>
+            <a:ext cx="10088575" cy="548640"/>
           </a:xfrm>
           <a:prstGeom prst="rect">
             <a:avLst/>
@@ -11451,11 +10961,11 @@
             <a:r>
               <a:rPr sz="1900" i="0" b="0">
                 <a:solidFill>
-                  <a:srgbClr val="2B211C"/>
-                </a:solidFill>
-                <a:latin typeface="Calibri"/>
-              </a:rPr>
-              <a:t>An error of omission</a:t>
+                  <a:srgbClr val="6E625B"/>
+                </a:solidFill>
+                <a:latin typeface="Calibri"/>
+              </a:rPr>
+              <a:t>Setting drug prices nationally</a:t>
             </a:r>
           </a:p>
         </p:txBody>
@@ -11468,8 +10978,8 @@
         </p:nvSpPr>
         <p:spPr>
           <a:xfrm>
-            <a:off x="548640" y="5001768"/>
-            <a:ext cx="11094415" cy="640080"/>
+            <a:off x="548640" y="4636008"/>
+            <a:ext cx="11094415" cy="548640"/>
           </a:xfrm>
           <a:prstGeom prst="roundRect">
             <a:avLst>
@@ -11477,7 +10987,7 @@
             </a:avLst>
           </a:prstGeom>
           <a:solidFill>
-            <a:srgbClr val="FBF3EE"/>
+            <a:srgbClr val="F5F4F4"/>
           </a:solidFill>
           <a:ln>
             <a:noFill/>
@@ -11514,14 +11024,14 @@
         </p:nvSpPr>
         <p:spPr>
           <a:xfrm>
-            <a:off x="713232" y="5111496"/>
+            <a:off x="713232" y="4700016"/>
             <a:ext cx="420624" cy="420624"/>
           </a:xfrm>
           <a:prstGeom prst="ellipse">
             <a:avLst/>
           </a:prstGeom>
           <a:solidFill>
-            <a:srgbClr val="A4472B"/>
+            <a:srgbClr val="E2E0DE"/>
           </a:solidFill>
           <a:ln>
             <a:noFill/>
@@ -11543,14 +11053,14 @@
           </a:fontRef>
         </p:style>
         <p:txBody>
-          <a:bodyPr rtlCol="0" anchor="ctr" lIns="0" rIns="0"/>
+          <a:bodyPr rtlCol="0" anchor="ctr" lIns="0" rIns="0" tIns="0" bIns="0"/>
           <a:lstStyle/>
           <a:p>
             <a:pPr algn="ctr"/>
             <a:r>
               <a:rPr sz="1500" i="0" b="1">
                 <a:solidFill>
-                  <a:srgbClr val="FFFFFF"/>
+                  <a:srgbClr val="6E625B"/>
                 </a:solidFill>
                 <a:latin typeface="Calibri"/>
               </a:rPr>
@@ -11567,8 +11077,8 @@
         </p:nvSpPr>
         <p:spPr>
           <a:xfrm>
-            <a:off x="1371600" y="5001768"/>
-            <a:ext cx="10088575" cy="640080"/>
+            <a:off x="1371600" y="4636008"/>
+            <a:ext cx="10088575" cy="548640"/>
           </a:xfrm>
           <a:prstGeom prst="rect">
             <a:avLst/>
@@ -11584,11 +11094,54 @@
             <a:r>
               <a:rPr sz="1900" i="0" b="0">
                 <a:solidFill>
+                  <a:srgbClr val="6E625B"/>
+                </a:solidFill>
+                <a:latin typeface="Calibri"/>
+              </a:rPr>
+              <a:t>Approving marketing authorisations</a:t>
+            </a:r>
+          </a:p>
+        </p:txBody>
+      </p:sp>
+      <p:sp>
+        <p:nvSpPr>
+          <p:cNvPr id="21" name="TextBox 20"/>
+          <p:cNvSpPr txBox="1"/>
+          <p:nvPr/>
+        </p:nvSpPr>
+        <p:spPr>
+          <a:xfrm>
+            <a:off x="548640" y="5358384"/>
+            <a:ext cx="11094415" cy="685800"/>
+          </a:xfrm>
+          <a:prstGeom prst="rect">
+            <a:avLst/>
+          </a:prstGeom>
+          <a:noFill/>
+        </p:spPr>
+        <p:txBody>
+          <a:bodyPr wrap="square" anchor="t" lIns="0" rIns="0" tIns="0" bIns="0">
+            <a:spAutoFit/>
+          </a:bodyPr>
+          <a:lstStyle/>
+          <a:p>
+            <a:r>
+              <a:rPr sz="1500" i="0" b="1">
+                <a:solidFill>
+                  <a:srgbClr val="2F6F7A"/>
+                </a:solidFill>
+                <a:latin typeface="Calibri"/>
+              </a:rPr>
+              <a:t>Why:  </a:t>
+            </a:r>
+            <a:r>
+              <a:rPr sz="1500" i="0" b="0">
+                <a:solidFill>
                   <a:srgbClr val="2B211C"/>
                 </a:solidFill>
                 <a:latin typeface="Calibri"/>
               </a:rPr>
-              <a:t>A Type B ADR</a:t>
+              <a:t>The DTC identifies and monitors high-risk medicines. B, C and D belong to others.</a:t>
             </a:r>
           </a:p>
         </p:txBody>
@@ -11656,7 +11209,7 @@
           </a:fontRef>
         </p:style>
         <p:txBody>
-          <a:bodyPr rtlCol="0" anchor="ctr" lIns="0" rIns="0"/>
+          <a:bodyPr rtlCol="0" anchor="ctr" lIns="0" rIns="0" tIns="0" bIns="0"/>
           <a:lstStyle/>
           <a:p>
             <a:pPr algn="ctr"/>
@@ -11701,7 +11254,7 @@
                 </a:solidFill>
                 <a:latin typeface="Calibri"/>
               </a:rPr>
-              <a:t>SELF-ASSESSMENT  ·  QUESTION 4 OF 5  ·  ANSWER</a:t>
+              <a:t>SECTION 9  ·  QUESTION 4 OF 5</a:t>
             </a:r>
           </a:p>
         </p:txBody>
@@ -11735,7 +11288,7 @@
                 </a:solidFill>
                 <a:latin typeface="Cambria"/>
               </a:rPr>
-              <a:t>Check your answer</a:t>
+              <a:t>Your turn</a:t>
             </a:r>
           </a:p>
         </p:txBody>
@@ -11818,7 +11371,7 @@
           <p:nvPr/>
         </p:nvPicPr>
         <p:blipFill>
-          <a:blip r:embed="rId2"/>
+          <a:blip r:embed="rId3"/>
           <a:stretch>
             <a:fillRect/>
           </a:stretch>
@@ -11875,8 +11428,8 @@
         </p:nvSpPr>
         <p:spPr>
           <a:xfrm>
-            <a:off x="548640" y="2606040"/>
-            <a:ext cx="11094415" cy="548640"/>
+            <a:off x="548640" y="2697480"/>
+            <a:ext cx="11094415" cy="640080"/>
           </a:xfrm>
           <a:prstGeom prst="roundRect">
             <a:avLst>
@@ -11884,7 +11437,7 @@
             </a:avLst>
           </a:prstGeom>
           <a:solidFill>
-            <a:srgbClr val="F7F4F2"/>
+            <a:srgbClr val="FAF4F2"/>
           </a:solidFill>
           <a:ln>
             <a:noFill/>
@@ -11921,14 +11474,14 @@
         </p:nvSpPr>
         <p:spPr>
           <a:xfrm>
-            <a:off x="713232" y="2670048"/>
+            <a:off x="713232" y="2807208"/>
             <a:ext cx="420624" cy="420624"/>
           </a:xfrm>
           <a:prstGeom prst="ellipse">
             <a:avLst/>
           </a:prstGeom>
           <a:solidFill>
-            <a:srgbClr val="E6DFDA"/>
+            <a:srgbClr val="A4472B"/>
           </a:solidFill>
           <a:ln>
             <a:noFill/>
@@ -11950,14 +11503,14 @@
           </a:fontRef>
         </p:style>
         <p:txBody>
-          <a:bodyPr rtlCol="0" anchor="ctr" lIns="0" rIns="0"/>
+          <a:bodyPr rtlCol="0" anchor="ctr" lIns="0" rIns="0" tIns="0" bIns="0"/>
           <a:lstStyle/>
           <a:p>
             <a:pPr algn="ctr"/>
             <a:r>
               <a:rPr sz="1500" i="0" b="1">
                 <a:solidFill>
-                  <a:srgbClr val="6E625B"/>
+                  <a:srgbClr val="FFFFFF"/>
                 </a:solidFill>
                 <a:latin typeface="Calibri"/>
               </a:rPr>
@@ -11974,8 +11527,8 @@
         </p:nvSpPr>
         <p:spPr>
           <a:xfrm>
-            <a:off x="1371600" y="2606040"/>
-            <a:ext cx="10088575" cy="548640"/>
+            <a:off x="1371600" y="2697480"/>
+            <a:ext cx="10088575" cy="640080"/>
           </a:xfrm>
           <a:prstGeom prst="rect">
             <a:avLst/>
@@ -11991,7 +11544,7 @@
             <a:r>
               <a:rPr sz="1900" i="0" b="0">
                 <a:solidFill>
-                  <a:srgbClr val="6E625B"/>
+                  <a:srgbClr val="2B211C"/>
                 </a:solidFill>
                 <a:latin typeface="Calibri"/>
               </a:rPr>
@@ -12008,8 +11561,8 @@
         </p:nvSpPr>
         <p:spPr>
           <a:xfrm>
-            <a:off x="548640" y="3282696"/>
-            <a:ext cx="11094415" cy="548640"/>
+            <a:off x="548640" y="3465576"/>
+            <a:ext cx="11094415" cy="640080"/>
           </a:xfrm>
           <a:prstGeom prst="roundRect">
             <a:avLst>
@@ -12017,7 +11570,7 @@
             </a:avLst>
           </a:prstGeom>
           <a:solidFill>
-            <a:srgbClr val="F7F4F2"/>
+            <a:srgbClr val="FAF4F2"/>
           </a:solidFill>
           <a:ln>
             <a:noFill/>
@@ -12054,14 +11607,14 @@
         </p:nvSpPr>
         <p:spPr>
           <a:xfrm>
-            <a:off x="713232" y="3346703"/>
+            <a:off x="713232" y="3575304"/>
             <a:ext cx="420624" cy="420624"/>
           </a:xfrm>
           <a:prstGeom prst="ellipse">
             <a:avLst/>
           </a:prstGeom>
           <a:solidFill>
-            <a:srgbClr val="E6DFDA"/>
+            <a:srgbClr val="A4472B"/>
           </a:solidFill>
           <a:ln>
             <a:noFill/>
@@ -12083,14 +11636,14 @@
           </a:fontRef>
         </p:style>
         <p:txBody>
-          <a:bodyPr rtlCol="0" anchor="ctr" lIns="0" rIns="0"/>
+          <a:bodyPr rtlCol="0" anchor="ctr" lIns="0" rIns="0" tIns="0" bIns="0"/>
           <a:lstStyle/>
           <a:p>
             <a:pPr algn="ctr"/>
             <a:r>
               <a:rPr sz="1500" i="0" b="1">
                 <a:solidFill>
-                  <a:srgbClr val="6E625B"/>
+                  <a:srgbClr val="FFFFFF"/>
                 </a:solidFill>
                 <a:latin typeface="Calibri"/>
               </a:rPr>
@@ -12107,8 +11660,8 @@
         </p:nvSpPr>
         <p:spPr>
           <a:xfrm>
-            <a:off x="1371600" y="3282696"/>
-            <a:ext cx="10088575" cy="548640"/>
+            <a:off x="1371600" y="3465576"/>
+            <a:ext cx="10088575" cy="640080"/>
           </a:xfrm>
           <a:prstGeom prst="rect">
             <a:avLst/>
@@ -12124,7 +11677,7 @@
             <a:r>
               <a:rPr sz="1900" i="0" b="0">
                 <a:solidFill>
-                  <a:srgbClr val="6E625B"/>
+                  <a:srgbClr val="2B211C"/>
                 </a:solidFill>
                 <a:latin typeface="Calibri"/>
               </a:rPr>
@@ -12141,8 +11694,8 @@
         </p:nvSpPr>
         <p:spPr>
           <a:xfrm>
-            <a:off x="548640" y="3959352"/>
-            <a:ext cx="11094415" cy="548640"/>
+            <a:off x="548640" y="4233672"/>
+            <a:ext cx="11094415" cy="640080"/>
           </a:xfrm>
           <a:prstGeom prst="roundRect">
             <a:avLst>
@@ -12150,7 +11703,7 @@
             </a:avLst>
           </a:prstGeom>
           <a:solidFill>
-            <a:srgbClr val="2F6F7A"/>
+            <a:srgbClr val="FAF4F2"/>
           </a:solidFill>
           <a:ln>
             <a:noFill/>
@@ -12187,14 +11740,14 @@
         </p:nvSpPr>
         <p:spPr>
           <a:xfrm>
-            <a:off x="713232" y="4023360"/>
+            <a:off x="713232" y="4343400"/>
             <a:ext cx="420624" cy="420624"/>
           </a:xfrm>
           <a:prstGeom prst="ellipse">
             <a:avLst/>
           </a:prstGeom>
           <a:solidFill>
-            <a:srgbClr val="FFFFFF"/>
+            <a:srgbClr val="A4472B"/>
           </a:solidFill>
           <a:ln>
             <a:noFill/>
@@ -12216,14 +11769,14 @@
           </a:fontRef>
         </p:style>
         <p:txBody>
-          <a:bodyPr rtlCol="0" anchor="ctr" lIns="0" rIns="0"/>
+          <a:bodyPr rtlCol="0" anchor="ctr" lIns="0" rIns="0" tIns="0" bIns="0"/>
           <a:lstStyle/>
           <a:p>
             <a:pPr algn="ctr"/>
             <a:r>
               <a:rPr sz="1500" i="0" b="1">
                 <a:solidFill>
-                  <a:srgbClr val="2F6F7A"/>
+                  <a:srgbClr val="FFFFFF"/>
                 </a:solidFill>
                 <a:latin typeface="Calibri"/>
               </a:rPr>
@@ -12240,8 +11793,8 @@
         </p:nvSpPr>
         <p:spPr>
           <a:xfrm>
-            <a:off x="1371600" y="3959352"/>
-            <a:ext cx="10088575" cy="548640"/>
+            <a:off x="1371600" y="4233672"/>
+            <a:ext cx="10088575" cy="640080"/>
           </a:xfrm>
           <a:prstGeom prst="rect">
             <a:avLst/>
@@ -12255,9 +11808,9 @@
           <a:lstStyle/>
           <a:p>
             <a:r>
-              <a:rPr sz="1900" i="0" b="1">
-                <a:solidFill>
-                  <a:srgbClr val="FFFFFF"/>
+              <a:rPr sz="1900" i="0" b="0">
+                <a:solidFill>
+                  <a:srgbClr val="2B211C"/>
                 </a:solidFill>
                 <a:latin typeface="Calibri"/>
               </a:rPr>
@@ -12274,8 +11827,8 @@
         </p:nvSpPr>
         <p:spPr>
           <a:xfrm>
-            <a:off x="548640" y="4636008"/>
-            <a:ext cx="11094415" cy="548640"/>
+            <a:off x="548640" y="5001768"/>
+            <a:ext cx="11094415" cy="640080"/>
           </a:xfrm>
           <a:prstGeom prst="roundRect">
             <a:avLst>
@@ -12283,7 +11836,7 @@
             </a:avLst>
           </a:prstGeom>
           <a:solidFill>
-            <a:srgbClr val="F7F4F2"/>
+            <a:srgbClr val="FAF4F2"/>
           </a:solidFill>
           <a:ln>
             <a:noFill/>
@@ -12320,14 +11873,14 @@
         </p:nvSpPr>
         <p:spPr>
           <a:xfrm>
-            <a:off x="713232" y="4700016"/>
+            <a:off x="713232" y="5111496"/>
             <a:ext cx="420624" cy="420624"/>
           </a:xfrm>
           <a:prstGeom prst="ellipse">
             <a:avLst/>
           </a:prstGeom>
           <a:solidFill>
-            <a:srgbClr val="E6DFDA"/>
+            <a:srgbClr val="A4472B"/>
           </a:solidFill>
           <a:ln>
             <a:noFill/>
@@ -12349,14 +11902,14 @@
           </a:fontRef>
         </p:style>
         <p:txBody>
-          <a:bodyPr rtlCol="0" anchor="ctr" lIns="0" rIns="0"/>
+          <a:bodyPr rtlCol="0" anchor="ctr" lIns="0" rIns="0" tIns="0" bIns="0"/>
           <a:lstStyle/>
           <a:p>
             <a:pPr algn="ctr"/>
             <a:r>
               <a:rPr sz="1500" i="0" b="1">
                 <a:solidFill>
-                  <a:srgbClr val="6E625B"/>
+                  <a:srgbClr val="FFFFFF"/>
                 </a:solidFill>
                 <a:latin typeface="Calibri"/>
               </a:rPr>
@@ -12373,8 +11926,8 @@
         </p:nvSpPr>
         <p:spPr>
           <a:xfrm>
-            <a:off x="1371600" y="4636008"/>
-            <a:ext cx="10088575" cy="548640"/>
+            <a:off x="1371600" y="5001768"/>
+            <a:ext cx="10088575" cy="640080"/>
           </a:xfrm>
           <a:prstGeom prst="rect">
             <a:avLst/>
@@ -12390,54 +11943,11 @@
             <a:r>
               <a:rPr sz="1900" i="0" b="0">
                 <a:solidFill>
-                  <a:srgbClr val="6E625B"/>
+                  <a:srgbClr val="2B211C"/>
                 </a:solidFill>
                 <a:latin typeface="Calibri"/>
               </a:rPr>
               <a:t>A Type B ADR</a:t>
-            </a:r>
-          </a:p>
-        </p:txBody>
-      </p:sp>
-      <p:sp>
-        <p:nvSpPr>
-          <p:cNvPr id="21" name="TextBox 20"/>
-          <p:cNvSpPr txBox="1"/>
-          <p:nvPr/>
-        </p:nvSpPr>
-        <p:spPr>
-          <a:xfrm>
-            <a:off x="548640" y="5358384"/>
-            <a:ext cx="11094415" cy="685800"/>
-          </a:xfrm>
-          <a:prstGeom prst="rect">
-            <a:avLst/>
-          </a:prstGeom>
-          <a:noFill/>
-        </p:spPr>
-        <p:txBody>
-          <a:bodyPr wrap="square" anchor="t" lIns="0" rIns="0" tIns="0" bIns="0">
-            <a:spAutoFit/>
-          </a:bodyPr>
-          <a:lstStyle/>
-          <a:p>
-            <a:r>
-              <a:rPr sz="1500" i="0" b="1">
-                <a:solidFill>
-                  <a:srgbClr val="2F6F7A"/>
-                </a:solidFill>
-                <a:latin typeface="Calibri"/>
-              </a:rPr>
-              <a:t>Why:  </a:t>
-            </a:r>
-            <a:r>
-              <a:rPr sz="1500" i="0" b="0">
-                <a:solidFill>
-                  <a:srgbClr val="2B211C"/>
-                </a:solidFill>
-                <a:latin typeface="Calibri"/>
-              </a:rPr>
-              <a:t>A missed dose is an error of omission. A is doing the wrong thing; B and D are ADRs.</a:t>
             </a:r>
           </a:p>
         </p:txBody>
@@ -12505,7 +12015,7 @@
           </a:fontRef>
         </p:style>
         <p:txBody>
-          <a:bodyPr rtlCol="0" anchor="ctr" lIns="0" rIns="0"/>
+          <a:bodyPr rtlCol="0" anchor="ctr" lIns="0" rIns="0" tIns="0" bIns="0"/>
           <a:lstStyle/>
           <a:p>
             <a:pPr algn="ctr"/>
@@ -12550,7 +12060,7 @@
                 </a:solidFill>
                 <a:latin typeface="Calibri"/>
               </a:rPr>
-              <a:t>SECTION GOALS</a:t>
+              <a:t>SECTION 9</a:t>
             </a:r>
           </a:p>
         </p:txBody>
@@ -12690,14 +12200,14 @@
         </p:nvSpPr>
         <p:spPr>
           <a:xfrm>
-            <a:off x="548640" y="1618488"/>
+            <a:off x="548640" y="1572768"/>
             <a:ext cx="402336" cy="402336"/>
           </a:xfrm>
           <a:prstGeom prst="ellipse">
             <a:avLst/>
           </a:prstGeom>
           <a:solidFill>
-            <a:srgbClr val="E0EEF0"/>
+            <a:srgbClr val="E6EEEF"/>
           </a:solidFill>
           <a:ln>
             <a:noFill/>
@@ -12719,7 +12229,7 @@
           </a:fontRef>
         </p:style>
         <p:txBody>
-          <a:bodyPr rtlCol="0" anchor="ctr" lIns="0" rIns="0"/>
+          <a:bodyPr rtlCol="0" anchor="ctr" lIns="0" rIns="0" tIns="0" bIns="0"/>
           <a:lstStyle/>
           <a:p>
             <a:pPr algn="ctr"/>
@@ -12743,8 +12253,8 @@
         </p:nvSpPr>
         <p:spPr>
           <a:xfrm>
-            <a:off x="1143000" y="1636776"/>
-            <a:ext cx="6629400" cy="926211"/>
+            <a:off x="1143000" y="1591056"/>
+            <a:ext cx="6629400" cy="944499"/>
           </a:xfrm>
           <a:prstGeom prst="rect">
             <a:avLst/>
@@ -12777,14 +12287,14 @@
         </p:nvSpPr>
         <p:spPr>
           <a:xfrm>
-            <a:off x="548640" y="2590419"/>
+            <a:off x="548640" y="2562987"/>
             <a:ext cx="402336" cy="402336"/>
           </a:xfrm>
           <a:prstGeom prst="ellipse">
             <a:avLst/>
           </a:prstGeom>
           <a:solidFill>
-            <a:srgbClr val="E0EEF0"/>
+            <a:srgbClr val="E6EEEF"/>
           </a:solidFill>
           <a:ln>
             <a:noFill/>
@@ -12806,7 +12316,7 @@
           </a:fontRef>
         </p:style>
         <p:txBody>
-          <a:bodyPr rtlCol="0" anchor="ctr" lIns="0" rIns="0"/>
+          <a:bodyPr rtlCol="0" anchor="ctr" lIns="0" rIns="0" tIns="0" bIns="0"/>
           <a:lstStyle/>
           <a:p>
             <a:pPr algn="ctr"/>
@@ -12830,8 +12340,8 @@
         </p:nvSpPr>
         <p:spPr>
           <a:xfrm>
-            <a:off x="1143000" y="2608707"/>
-            <a:ext cx="6629400" cy="926211"/>
+            <a:off x="1143000" y="2581275"/>
+            <a:ext cx="6629400" cy="944499"/>
           </a:xfrm>
           <a:prstGeom prst="rect">
             <a:avLst/>
@@ -12864,14 +12374,14 @@
         </p:nvSpPr>
         <p:spPr>
           <a:xfrm>
-            <a:off x="548640" y="3562350"/>
+            <a:off x="548640" y="3553206"/>
             <a:ext cx="402336" cy="402336"/>
           </a:xfrm>
           <a:prstGeom prst="ellipse">
             <a:avLst/>
           </a:prstGeom>
           <a:solidFill>
-            <a:srgbClr val="E0EEF0"/>
+            <a:srgbClr val="E6EEEF"/>
           </a:solidFill>
           <a:ln>
             <a:noFill/>
@@ -12893,7 +12403,7 @@
           </a:fontRef>
         </p:style>
         <p:txBody>
-          <a:bodyPr rtlCol="0" anchor="ctr" lIns="0" rIns="0"/>
+          <a:bodyPr rtlCol="0" anchor="ctr" lIns="0" rIns="0" tIns="0" bIns="0"/>
           <a:lstStyle/>
           <a:p>
             <a:pPr algn="ctr"/>
@@ -12917,8 +12427,8 @@
         </p:nvSpPr>
         <p:spPr>
           <a:xfrm>
-            <a:off x="1143000" y="3580638"/>
-            <a:ext cx="6629400" cy="926211"/>
+            <a:off x="1143000" y="3571494"/>
+            <a:ext cx="6629400" cy="944499"/>
           </a:xfrm>
           <a:prstGeom prst="rect">
             <a:avLst/>
@@ -12951,14 +12461,14 @@
         </p:nvSpPr>
         <p:spPr>
           <a:xfrm>
-            <a:off x="548640" y="4534281"/>
+            <a:off x="548640" y="4543425"/>
             <a:ext cx="402336" cy="402336"/>
           </a:xfrm>
           <a:prstGeom prst="ellipse">
             <a:avLst/>
           </a:prstGeom>
           <a:solidFill>
-            <a:srgbClr val="E0EEF0"/>
+            <a:srgbClr val="E6EEEF"/>
           </a:solidFill>
           <a:ln>
             <a:noFill/>
@@ -12980,7 +12490,7 @@
           </a:fontRef>
         </p:style>
         <p:txBody>
-          <a:bodyPr rtlCol="0" anchor="ctr" lIns="0" rIns="0"/>
+          <a:bodyPr rtlCol="0" anchor="ctr" lIns="0" rIns="0" tIns="0" bIns="0"/>
           <a:lstStyle/>
           <a:p>
             <a:pPr algn="ctr"/>
@@ -13004,8 +12514,8 @@
         </p:nvSpPr>
         <p:spPr>
           <a:xfrm>
-            <a:off x="1143000" y="4552569"/>
-            <a:ext cx="6629400" cy="926211"/>
+            <a:off x="1143000" y="4561713"/>
+            <a:ext cx="6629400" cy="944499"/>
           </a:xfrm>
           <a:prstGeom prst="rect">
             <a:avLst/>
@@ -13038,14 +12548,14 @@
         </p:nvSpPr>
         <p:spPr>
           <a:xfrm>
-            <a:off x="548640" y="5506212"/>
+            <a:off x="548640" y="5533644"/>
             <a:ext cx="402336" cy="402336"/>
           </a:xfrm>
           <a:prstGeom prst="ellipse">
             <a:avLst/>
           </a:prstGeom>
           <a:solidFill>
-            <a:srgbClr val="E0EEF0"/>
+            <a:srgbClr val="E6EEEF"/>
           </a:solidFill>
           <a:ln>
             <a:noFill/>
@@ -13067,7 +12577,7 @@
           </a:fontRef>
         </p:style>
         <p:txBody>
-          <a:bodyPr rtlCol="0" anchor="ctr" lIns="0" rIns="0"/>
+          <a:bodyPr rtlCol="0" anchor="ctr" lIns="0" rIns="0" tIns="0" bIns="0"/>
           <a:lstStyle/>
           <a:p>
             <a:pPr algn="ctr"/>
@@ -13091,8 +12601,8 @@
         </p:nvSpPr>
         <p:spPr>
           <a:xfrm>
-            <a:off x="1143000" y="5524500"/>
-            <a:ext cx="6629400" cy="592836"/>
+            <a:off x="1143000" y="5551932"/>
+            <a:ext cx="6629400" cy="611124"/>
           </a:xfrm>
           <a:prstGeom prst="rect">
             <a:avLst/>
@@ -13134,7 +12644,7 @@
             </a:avLst>
           </a:prstGeom>
           <a:solidFill>
-            <a:srgbClr val="FBF3EE"/>
+            <a:srgbClr val="FAF4F2"/>
           </a:solidFill>
           <a:ln>
             <a:noFill/>
@@ -13330,7 +12840,7 @@
           </a:fontRef>
         </p:style>
         <p:txBody>
-          <a:bodyPr rtlCol="0" anchor="ctr" lIns="0" rIns="0"/>
+          <a:bodyPr rtlCol="0" anchor="ctr" lIns="0" rIns="0" tIns="0" bIns="0"/>
           <a:lstStyle/>
           <a:p>
             <a:pPr algn="ctr"/>
@@ -13375,7 +12885,7 @@
                 </a:solidFill>
                 <a:latin typeface="Calibri"/>
               </a:rPr>
-              <a:t>SELF-ASSESSMENT  ·  QUESTION 5 OF 5</a:t>
+              <a:t>SECTION 9  ·  QUESTION 4 OF 5  ·  ANSWER</a:t>
             </a:r>
           </a:p>
         </p:txBody>
@@ -13409,7 +12919,7 @@
                 </a:solidFill>
                 <a:latin typeface="Cambria"/>
               </a:rPr>
-              <a:t>Your turn</a:t>
+              <a:t>Check your answer</a:t>
             </a:r>
           </a:p>
         </p:txBody>
@@ -13492,7 +13002,7 @@
           <p:nvPr/>
         </p:nvPicPr>
         <p:blipFill>
-          <a:blip r:embed="rId3"/>
+          <a:blip r:embed="rId2"/>
           <a:stretch>
             <a:fillRect/>
           </a:stretch>
@@ -13536,7 +13046,7 @@
                 </a:solidFill>
                 <a:latin typeface="Calibri"/>
               </a:rPr>
-              <a:t>Which measure best reduces dispensing errors with look-alike drug names?</a:t>
+              <a:t>A nurse forgets to give a patient's evening insulin. This is:</a:t>
             </a:r>
           </a:p>
         </p:txBody>
@@ -13549,8 +13059,8 @@
         </p:nvSpPr>
         <p:spPr>
           <a:xfrm>
-            <a:off x="548640" y="2697480"/>
-            <a:ext cx="11094415" cy="640080"/>
+            <a:off x="548640" y="2606040"/>
+            <a:ext cx="11094415" cy="548640"/>
           </a:xfrm>
           <a:prstGeom prst="roundRect">
             <a:avLst>
@@ -13558,7 +13068,7 @@
             </a:avLst>
           </a:prstGeom>
           <a:solidFill>
-            <a:srgbClr val="FBF3EE"/>
+            <a:srgbClr val="F5F4F4"/>
           </a:solidFill>
           <a:ln>
             <a:noFill/>
@@ -13595,14 +13105,14 @@
         </p:nvSpPr>
         <p:spPr>
           <a:xfrm>
-            <a:off x="713232" y="2807208"/>
+            <a:off x="713232" y="2670048"/>
             <a:ext cx="420624" cy="420624"/>
           </a:xfrm>
           <a:prstGeom prst="ellipse">
             <a:avLst/>
           </a:prstGeom>
           <a:solidFill>
-            <a:srgbClr val="A4472B"/>
+            <a:srgbClr val="E2E0DE"/>
           </a:solidFill>
           <a:ln>
             <a:noFill/>
@@ -13624,14 +13134,14 @@
           </a:fontRef>
         </p:style>
         <p:txBody>
-          <a:bodyPr rtlCol="0" anchor="ctr" lIns="0" rIns="0"/>
+          <a:bodyPr rtlCol="0" anchor="ctr" lIns="0" rIns="0" tIns="0" bIns="0"/>
           <a:lstStyle/>
           <a:p>
             <a:pPr algn="ctr"/>
             <a:r>
               <a:rPr sz="1500" i="0" b="1">
                 <a:solidFill>
-                  <a:srgbClr val="FFFFFF"/>
+                  <a:srgbClr val="6E625B"/>
                 </a:solidFill>
                 <a:latin typeface="Calibri"/>
               </a:rPr>
@@ -13648,8 +13158,8 @@
         </p:nvSpPr>
         <p:spPr>
           <a:xfrm>
-            <a:off x="1371600" y="2697480"/>
-            <a:ext cx="10088575" cy="640080"/>
+            <a:off x="1371600" y="2606040"/>
+            <a:ext cx="10088575" cy="548640"/>
           </a:xfrm>
           <a:prstGeom prst="rect">
             <a:avLst/>
@@ -13665,11 +13175,11 @@
             <a:r>
               <a:rPr sz="1900" i="0" b="0">
                 <a:solidFill>
-                  <a:srgbClr val="2B211C"/>
-                </a:solidFill>
-                <a:latin typeface="Calibri"/>
-              </a:rPr>
-              <a:t>Storing LASA drugs side by side</a:t>
+                  <a:srgbClr val="6E625B"/>
+                </a:solidFill>
+                <a:latin typeface="Calibri"/>
+              </a:rPr>
+              <a:t>An error of commission</a:t>
             </a:r>
           </a:p>
         </p:txBody>
@@ -13682,8 +13192,8 @@
         </p:nvSpPr>
         <p:spPr>
           <a:xfrm>
-            <a:off x="548640" y="3465576"/>
-            <a:ext cx="11094415" cy="640080"/>
+            <a:off x="548640" y="3282696"/>
+            <a:ext cx="11094415" cy="548640"/>
           </a:xfrm>
           <a:prstGeom prst="roundRect">
             <a:avLst>
@@ -13691,7 +13201,7 @@
             </a:avLst>
           </a:prstGeom>
           <a:solidFill>
-            <a:srgbClr val="FBF3EE"/>
+            <a:srgbClr val="F5F4F4"/>
           </a:solidFill>
           <a:ln>
             <a:noFill/>
@@ -13728,14 +13238,14 @@
         </p:nvSpPr>
         <p:spPr>
           <a:xfrm>
-            <a:off x="713232" y="3575304"/>
+            <a:off x="713232" y="3346703"/>
             <a:ext cx="420624" cy="420624"/>
           </a:xfrm>
           <a:prstGeom prst="ellipse">
             <a:avLst/>
           </a:prstGeom>
           <a:solidFill>
-            <a:srgbClr val="A4472B"/>
+            <a:srgbClr val="E2E0DE"/>
           </a:solidFill>
           <a:ln>
             <a:noFill/>
@@ -13757,14 +13267,14 @@
           </a:fontRef>
         </p:style>
         <p:txBody>
-          <a:bodyPr rtlCol="0" anchor="ctr" lIns="0" rIns="0"/>
+          <a:bodyPr rtlCol="0" anchor="ctr" lIns="0" rIns="0" tIns="0" bIns="0"/>
           <a:lstStyle/>
           <a:p>
             <a:pPr algn="ctr"/>
             <a:r>
               <a:rPr sz="1500" i="0" b="1">
                 <a:solidFill>
-                  <a:srgbClr val="FFFFFF"/>
+                  <a:srgbClr val="6E625B"/>
                 </a:solidFill>
                 <a:latin typeface="Calibri"/>
               </a:rPr>
@@ -13781,8 +13291,8 @@
         </p:nvSpPr>
         <p:spPr>
           <a:xfrm>
-            <a:off x="1371600" y="3465576"/>
-            <a:ext cx="10088575" cy="640080"/>
+            <a:off x="1371600" y="3282696"/>
+            <a:ext cx="10088575" cy="548640"/>
           </a:xfrm>
           <a:prstGeom prst="rect">
             <a:avLst/>
@@ -13798,11 +13308,11 @@
             <a:r>
               <a:rPr sz="1900" i="0" b="0">
                 <a:solidFill>
-                  <a:srgbClr val="2B211C"/>
-                </a:solidFill>
-                <a:latin typeface="Calibri"/>
-              </a:rPr>
-              <a:t>Using "tall man" lettering and separating them on shelves</a:t>
+                  <a:srgbClr val="6E625B"/>
+                </a:solidFill>
+                <a:latin typeface="Calibri"/>
+              </a:rPr>
+              <a:t>A Type A ADR</a:t>
             </a:r>
           </a:p>
         </p:txBody>
@@ -13815,8 +13325,8 @@
         </p:nvSpPr>
         <p:spPr>
           <a:xfrm>
-            <a:off x="548640" y="4233672"/>
-            <a:ext cx="11094415" cy="640080"/>
+            <a:off x="548640" y="3959352"/>
+            <a:ext cx="11094415" cy="548640"/>
           </a:xfrm>
           <a:prstGeom prst="roundRect">
             <a:avLst>
@@ -13824,7 +13334,7 @@
             </a:avLst>
           </a:prstGeom>
           <a:solidFill>
-            <a:srgbClr val="FBF3EE"/>
+            <a:srgbClr val="2F6F7A"/>
           </a:solidFill>
           <a:ln>
             <a:noFill/>
@@ -13861,14 +13371,14 @@
         </p:nvSpPr>
         <p:spPr>
           <a:xfrm>
-            <a:off x="713232" y="4343400"/>
+            <a:off x="713232" y="4023360"/>
             <a:ext cx="420624" cy="420624"/>
           </a:xfrm>
           <a:prstGeom prst="ellipse">
             <a:avLst/>
           </a:prstGeom>
           <a:solidFill>
-            <a:srgbClr val="A4472B"/>
+            <a:srgbClr val="FFFFFF"/>
           </a:solidFill>
           <a:ln>
             <a:noFill/>
@@ -13890,14 +13400,14 @@
           </a:fontRef>
         </p:style>
         <p:txBody>
-          <a:bodyPr rtlCol="0" anchor="ctr" lIns="0" rIns="0"/>
+          <a:bodyPr rtlCol="0" anchor="ctr" lIns="0" rIns="0" tIns="0" bIns="0"/>
           <a:lstStyle/>
           <a:p>
             <a:pPr algn="ctr"/>
             <a:r>
               <a:rPr sz="1500" i="0" b="1">
                 <a:solidFill>
-                  <a:srgbClr val="FFFFFF"/>
+                  <a:srgbClr val="2F6F7A"/>
                 </a:solidFill>
                 <a:latin typeface="Calibri"/>
               </a:rPr>
@@ -13914,8 +13424,8 @@
         </p:nvSpPr>
         <p:spPr>
           <a:xfrm>
-            <a:off x="1371600" y="4233672"/>
-            <a:ext cx="10088575" cy="640080"/>
+            <a:off x="1371600" y="3959352"/>
+            <a:ext cx="10088575" cy="548640"/>
           </a:xfrm>
           <a:prstGeom prst="rect">
             <a:avLst/>
@@ -13929,13 +13439,13 @@
           <a:lstStyle/>
           <a:p>
             <a:r>
-              <a:rPr sz="1900" i="0" b="0">
-                <a:solidFill>
-                  <a:srgbClr val="2B211C"/>
-                </a:solidFill>
-                <a:latin typeface="Calibri"/>
-              </a:rPr>
-              <a:t>Removing all labels</a:t>
+              <a:rPr sz="1900" i="0" b="1">
+                <a:solidFill>
+                  <a:srgbClr val="FFFFFF"/>
+                </a:solidFill>
+                <a:latin typeface="Calibri"/>
+              </a:rPr>
+              <a:t>An error of omission</a:t>
             </a:r>
           </a:p>
         </p:txBody>
@@ -13948,8 +13458,8 @@
         </p:nvSpPr>
         <p:spPr>
           <a:xfrm>
-            <a:off x="548640" y="5001768"/>
-            <a:ext cx="11094415" cy="640080"/>
+            <a:off x="548640" y="4636008"/>
+            <a:ext cx="11094415" cy="548640"/>
           </a:xfrm>
           <a:prstGeom prst="roundRect">
             <a:avLst>
@@ -13957,7 +13467,7 @@
             </a:avLst>
           </a:prstGeom>
           <a:solidFill>
-            <a:srgbClr val="FBF3EE"/>
+            <a:srgbClr val="F5F4F4"/>
           </a:solidFill>
           <a:ln>
             <a:noFill/>
@@ -13994,14 +13504,14 @@
         </p:nvSpPr>
         <p:spPr>
           <a:xfrm>
-            <a:off x="713232" y="5111496"/>
+            <a:off x="713232" y="4700016"/>
             <a:ext cx="420624" cy="420624"/>
           </a:xfrm>
           <a:prstGeom prst="ellipse">
             <a:avLst/>
           </a:prstGeom>
           <a:solidFill>
-            <a:srgbClr val="A4472B"/>
+            <a:srgbClr val="E2E0DE"/>
           </a:solidFill>
           <a:ln>
             <a:noFill/>
@@ -14023,14 +13533,14 @@
           </a:fontRef>
         </p:style>
         <p:txBody>
-          <a:bodyPr rtlCol="0" anchor="ctr" lIns="0" rIns="0"/>
+          <a:bodyPr rtlCol="0" anchor="ctr" lIns="0" rIns="0" tIns="0" bIns="0"/>
           <a:lstStyle/>
           <a:p>
             <a:pPr algn="ctr"/>
             <a:r>
               <a:rPr sz="1500" i="0" b="1">
                 <a:solidFill>
-                  <a:srgbClr val="FFFFFF"/>
+                  <a:srgbClr val="6E625B"/>
                 </a:solidFill>
                 <a:latin typeface="Calibri"/>
               </a:rPr>
@@ -14047,8 +13557,8 @@
         </p:nvSpPr>
         <p:spPr>
           <a:xfrm>
-            <a:off x="1371600" y="5001768"/>
-            <a:ext cx="10088575" cy="640080"/>
+            <a:off x="1371600" y="4636008"/>
+            <a:ext cx="10088575" cy="548640"/>
           </a:xfrm>
           <a:prstGeom prst="rect">
             <a:avLst/>
@@ -14064,11 +13574,54 @@
             <a:r>
               <a:rPr sz="1900" i="0" b="0">
                 <a:solidFill>
+                  <a:srgbClr val="6E625B"/>
+                </a:solidFill>
+                <a:latin typeface="Calibri"/>
+              </a:rPr>
+              <a:t>A Type B ADR</a:t>
+            </a:r>
+          </a:p>
+        </p:txBody>
+      </p:sp>
+      <p:sp>
+        <p:nvSpPr>
+          <p:cNvPr id="21" name="TextBox 20"/>
+          <p:cNvSpPr txBox="1"/>
+          <p:nvPr/>
+        </p:nvSpPr>
+        <p:spPr>
+          <a:xfrm>
+            <a:off x="548640" y="5358384"/>
+            <a:ext cx="11094415" cy="685800"/>
+          </a:xfrm>
+          <a:prstGeom prst="rect">
+            <a:avLst/>
+          </a:prstGeom>
+          <a:noFill/>
+        </p:spPr>
+        <p:txBody>
+          <a:bodyPr wrap="square" anchor="t" lIns="0" rIns="0" tIns="0" bIns="0">
+            <a:spAutoFit/>
+          </a:bodyPr>
+          <a:lstStyle/>
+          <a:p>
+            <a:r>
+              <a:rPr sz="1500" i="0" b="1">
+                <a:solidFill>
+                  <a:srgbClr val="2F6F7A"/>
+                </a:solidFill>
+                <a:latin typeface="Calibri"/>
+              </a:rPr>
+              <a:t>Why:  </a:t>
+            </a:r>
+            <a:r>
+              <a:rPr sz="1500" i="0" b="0">
+                <a:solidFill>
                   <a:srgbClr val="2B211C"/>
                 </a:solidFill>
                 <a:latin typeface="Calibri"/>
               </a:rPr>
-              <a:t>Dispensing from memory</a:t>
+              <a:t>A missed dose is an error of omission. A is doing the wrong thing; B and D are ADRs.</a:t>
             </a:r>
           </a:p>
         </p:txBody>
@@ -14136,7 +13689,7 @@
           </a:fontRef>
         </p:style>
         <p:txBody>
-          <a:bodyPr rtlCol="0" anchor="ctr" lIns="0" rIns="0"/>
+          <a:bodyPr rtlCol="0" anchor="ctr" lIns="0" rIns="0" tIns="0" bIns="0"/>
           <a:lstStyle/>
           <a:p>
             <a:pPr algn="ctr"/>
@@ -14181,7 +13734,7 @@
                 </a:solidFill>
                 <a:latin typeface="Calibri"/>
               </a:rPr>
-              <a:t>SELF-ASSESSMENT  ·  QUESTION 5 OF 5  ·  ANSWER</a:t>
+              <a:t>SECTION 9  ·  QUESTION 5 OF 5</a:t>
             </a:r>
           </a:p>
         </p:txBody>
@@ -14215,7 +13768,7 @@
                 </a:solidFill>
                 <a:latin typeface="Cambria"/>
               </a:rPr>
-              <a:t>Check your answer</a:t>
+              <a:t>Your turn</a:t>
             </a:r>
           </a:p>
         </p:txBody>
@@ -14298,7 +13851,7 @@
           <p:nvPr/>
         </p:nvPicPr>
         <p:blipFill>
-          <a:blip r:embed="rId2"/>
+          <a:blip r:embed="rId3"/>
           <a:stretch>
             <a:fillRect/>
           </a:stretch>
@@ -14355,8 +13908,8 @@
         </p:nvSpPr>
         <p:spPr>
           <a:xfrm>
-            <a:off x="548640" y="2606040"/>
-            <a:ext cx="11094415" cy="548640"/>
+            <a:off x="548640" y="2697480"/>
+            <a:ext cx="11094415" cy="640080"/>
           </a:xfrm>
           <a:prstGeom prst="roundRect">
             <a:avLst>
@@ -14364,7 +13917,7 @@
             </a:avLst>
           </a:prstGeom>
           <a:solidFill>
-            <a:srgbClr val="F7F4F2"/>
+            <a:srgbClr val="FAF4F2"/>
           </a:solidFill>
           <a:ln>
             <a:noFill/>
@@ -14401,14 +13954,14 @@
         </p:nvSpPr>
         <p:spPr>
           <a:xfrm>
-            <a:off x="713232" y="2670048"/>
+            <a:off x="713232" y="2807208"/>
             <a:ext cx="420624" cy="420624"/>
           </a:xfrm>
           <a:prstGeom prst="ellipse">
             <a:avLst/>
           </a:prstGeom>
           <a:solidFill>
-            <a:srgbClr val="E6DFDA"/>
+            <a:srgbClr val="A4472B"/>
           </a:solidFill>
           <a:ln>
             <a:noFill/>
@@ -14430,14 +13983,14 @@
           </a:fontRef>
         </p:style>
         <p:txBody>
-          <a:bodyPr rtlCol="0" anchor="ctr" lIns="0" rIns="0"/>
+          <a:bodyPr rtlCol="0" anchor="ctr" lIns="0" rIns="0" tIns="0" bIns="0"/>
           <a:lstStyle/>
           <a:p>
             <a:pPr algn="ctr"/>
             <a:r>
               <a:rPr sz="1500" i="0" b="1">
                 <a:solidFill>
-                  <a:srgbClr val="6E625B"/>
+                  <a:srgbClr val="FFFFFF"/>
                 </a:solidFill>
                 <a:latin typeface="Calibri"/>
               </a:rPr>
@@ -14454,8 +14007,8 @@
         </p:nvSpPr>
         <p:spPr>
           <a:xfrm>
-            <a:off x="1371600" y="2606040"/>
-            <a:ext cx="10088575" cy="548640"/>
+            <a:off x="1371600" y="2697480"/>
+            <a:ext cx="10088575" cy="640080"/>
           </a:xfrm>
           <a:prstGeom prst="rect">
             <a:avLst/>
@@ -14471,7 +14024,7 @@
             <a:r>
               <a:rPr sz="1900" i="0" b="0">
                 <a:solidFill>
-                  <a:srgbClr val="6E625B"/>
+                  <a:srgbClr val="2B211C"/>
                 </a:solidFill>
                 <a:latin typeface="Calibri"/>
               </a:rPr>
@@ -14488,8 +14041,8 @@
         </p:nvSpPr>
         <p:spPr>
           <a:xfrm>
-            <a:off x="548640" y="3282696"/>
-            <a:ext cx="11094415" cy="548640"/>
+            <a:off x="548640" y="3465576"/>
+            <a:ext cx="11094415" cy="640080"/>
           </a:xfrm>
           <a:prstGeom prst="roundRect">
             <a:avLst>
@@ -14497,7 +14050,7 @@
             </a:avLst>
           </a:prstGeom>
           <a:solidFill>
-            <a:srgbClr val="2F6F7A"/>
+            <a:srgbClr val="FAF4F2"/>
           </a:solidFill>
           <a:ln>
             <a:noFill/>
@@ -14534,14 +14087,14 @@
         </p:nvSpPr>
         <p:spPr>
           <a:xfrm>
-            <a:off x="713232" y="3346703"/>
+            <a:off x="713232" y="3575304"/>
             <a:ext cx="420624" cy="420624"/>
           </a:xfrm>
           <a:prstGeom prst="ellipse">
             <a:avLst/>
           </a:prstGeom>
           <a:solidFill>
-            <a:srgbClr val="FFFFFF"/>
+            <a:srgbClr val="A4472B"/>
           </a:solidFill>
           <a:ln>
             <a:noFill/>
@@ -14563,14 +14116,14 @@
           </a:fontRef>
         </p:style>
         <p:txBody>
-          <a:bodyPr rtlCol="0" anchor="ctr" lIns="0" rIns="0"/>
+          <a:bodyPr rtlCol="0" anchor="ctr" lIns="0" rIns="0" tIns="0" bIns="0"/>
           <a:lstStyle/>
           <a:p>
             <a:pPr algn="ctr"/>
             <a:r>
               <a:rPr sz="1500" i="0" b="1">
                 <a:solidFill>
-                  <a:srgbClr val="2F6F7A"/>
+                  <a:srgbClr val="FFFFFF"/>
                 </a:solidFill>
                 <a:latin typeface="Calibri"/>
               </a:rPr>
@@ -14587,8 +14140,8 @@
         </p:nvSpPr>
         <p:spPr>
           <a:xfrm>
-            <a:off x="1371600" y="3282696"/>
-            <a:ext cx="10088575" cy="548640"/>
+            <a:off x="1371600" y="3465576"/>
+            <a:ext cx="10088575" cy="640080"/>
           </a:xfrm>
           <a:prstGeom prst="rect">
             <a:avLst/>
@@ -14602,9 +14155,9 @@
           <a:lstStyle/>
           <a:p>
             <a:r>
-              <a:rPr sz="1900" i="0" b="1">
-                <a:solidFill>
-                  <a:srgbClr val="FFFFFF"/>
+              <a:rPr sz="1900" i="0" b="0">
+                <a:solidFill>
+                  <a:srgbClr val="2B211C"/>
                 </a:solidFill>
                 <a:latin typeface="Calibri"/>
               </a:rPr>
@@ -14621,8 +14174,8 @@
         </p:nvSpPr>
         <p:spPr>
           <a:xfrm>
-            <a:off x="548640" y="3959352"/>
-            <a:ext cx="11094415" cy="548640"/>
+            <a:off x="548640" y="4233672"/>
+            <a:ext cx="11094415" cy="640080"/>
           </a:xfrm>
           <a:prstGeom prst="roundRect">
             <a:avLst>
@@ -14630,7 +14183,7 @@
             </a:avLst>
           </a:prstGeom>
           <a:solidFill>
-            <a:srgbClr val="F7F4F2"/>
+            <a:srgbClr val="FAF4F2"/>
           </a:solidFill>
           <a:ln>
             <a:noFill/>
@@ -14667,14 +14220,14 @@
         </p:nvSpPr>
         <p:spPr>
           <a:xfrm>
-            <a:off x="713232" y="4023360"/>
+            <a:off x="713232" y="4343400"/>
             <a:ext cx="420624" cy="420624"/>
           </a:xfrm>
           <a:prstGeom prst="ellipse">
             <a:avLst/>
           </a:prstGeom>
           <a:solidFill>
-            <a:srgbClr val="E6DFDA"/>
+            <a:srgbClr val="A4472B"/>
           </a:solidFill>
           <a:ln>
             <a:noFill/>
@@ -14696,14 +14249,14 @@
           </a:fontRef>
         </p:style>
         <p:txBody>
-          <a:bodyPr rtlCol="0" anchor="ctr" lIns="0" rIns="0"/>
+          <a:bodyPr rtlCol="0" anchor="ctr" lIns="0" rIns="0" tIns="0" bIns="0"/>
           <a:lstStyle/>
           <a:p>
             <a:pPr algn="ctr"/>
             <a:r>
               <a:rPr sz="1500" i="0" b="1">
                 <a:solidFill>
-                  <a:srgbClr val="6E625B"/>
+                  <a:srgbClr val="FFFFFF"/>
                 </a:solidFill>
                 <a:latin typeface="Calibri"/>
               </a:rPr>
@@ -14720,8 +14273,8 @@
         </p:nvSpPr>
         <p:spPr>
           <a:xfrm>
-            <a:off x="1371600" y="3959352"/>
-            <a:ext cx="10088575" cy="548640"/>
+            <a:off x="1371600" y="4233672"/>
+            <a:ext cx="10088575" cy="640080"/>
           </a:xfrm>
           <a:prstGeom prst="rect">
             <a:avLst/>
@@ -14737,7 +14290,7 @@
             <a:r>
               <a:rPr sz="1900" i="0" b="0">
                 <a:solidFill>
-                  <a:srgbClr val="6E625B"/>
+                  <a:srgbClr val="2B211C"/>
                 </a:solidFill>
                 <a:latin typeface="Calibri"/>
               </a:rPr>
@@ -14754,8 +14307,8 @@
         </p:nvSpPr>
         <p:spPr>
           <a:xfrm>
-            <a:off x="548640" y="4636008"/>
-            <a:ext cx="11094415" cy="548640"/>
+            <a:off x="548640" y="5001768"/>
+            <a:ext cx="11094415" cy="640080"/>
           </a:xfrm>
           <a:prstGeom prst="roundRect">
             <a:avLst>
@@ -14763,7 +14316,7 @@
             </a:avLst>
           </a:prstGeom>
           <a:solidFill>
-            <a:srgbClr val="F7F4F2"/>
+            <a:srgbClr val="FAF4F2"/>
           </a:solidFill>
           <a:ln>
             <a:noFill/>
@@ -14800,14 +14353,14 @@
         </p:nvSpPr>
         <p:spPr>
           <a:xfrm>
-            <a:off x="713232" y="4700016"/>
+            <a:off x="713232" y="5111496"/>
             <a:ext cx="420624" cy="420624"/>
           </a:xfrm>
           <a:prstGeom prst="ellipse">
             <a:avLst/>
           </a:prstGeom>
           <a:solidFill>
-            <a:srgbClr val="E6DFDA"/>
+            <a:srgbClr val="A4472B"/>
           </a:solidFill>
           <a:ln>
             <a:noFill/>
@@ -14829,14 +14382,14 @@
           </a:fontRef>
         </p:style>
         <p:txBody>
-          <a:bodyPr rtlCol="0" anchor="ctr" lIns="0" rIns="0"/>
+          <a:bodyPr rtlCol="0" anchor="ctr" lIns="0" rIns="0" tIns="0" bIns="0"/>
           <a:lstStyle/>
           <a:p>
             <a:pPr algn="ctr"/>
             <a:r>
               <a:rPr sz="1500" i="0" b="1">
                 <a:solidFill>
-                  <a:srgbClr val="6E625B"/>
+                  <a:srgbClr val="FFFFFF"/>
                 </a:solidFill>
                 <a:latin typeface="Calibri"/>
               </a:rPr>
@@ -14853,8 +14406,8 @@
         </p:nvSpPr>
         <p:spPr>
           <a:xfrm>
-            <a:off x="1371600" y="4636008"/>
-            <a:ext cx="10088575" cy="548640"/>
+            <a:off x="1371600" y="5001768"/>
+            <a:ext cx="10088575" cy="640080"/>
           </a:xfrm>
           <a:prstGeom prst="rect">
             <a:avLst/>
@@ -14870,54 +14423,11 @@
             <a:r>
               <a:rPr sz="1900" i="0" b="0">
                 <a:solidFill>
-                  <a:srgbClr val="6E625B"/>
+                  <a:srgbClr val="2B211C"/>
                 </a:solidFill>
                 <a:latin typeface="Calibri"/>
               </a:rPr>
               <a:t>Dispensing from memory</a:t>
-            </a:r>
-          </a:p>
-        </p:txBody>
-      </p:sp>
-      <p:sp>
-        <p:nvSpPr>
-          <p:cNvPr id="21" name="TextBox 20"/>
-          <p:cNvSpPr txBox="1"/>
-          <p:nvPr/>
-        </p:nvSpPr>
-        <p:spPr>
-          <a:xfrm>
-            <a:off x="548640" y="5358384"/>
-            <a:ext cx="11094415" cy="685800"/>
-          </a:xfrm>
-          <a:prstGeom prst="rect">
-            <a:avLst/>
-          </a:prstGeom>
-          <a:noFill/>
-        </p:spPr>
-        <p:txBody>
-          <a:bodyPr wrap="square" anchor="t" lIns="0" rIns="0" tIns="0" bIns="0">
-            <a:spAutoFit/>
-          </a:bodyPr>
-          <a:lstStyle/>
-          <a:p>
-            <a:r>
-              <a:rPr sz="1500" i="0" b="1">
-                <a:solidFill>
-                  <a:srgbClr val="2F6F7A"/>
-                </a:solidFill>
-                <a:latin typeface="Calibri"/>
-              </a:rPr>
-              <a:t>Why:  </a:t>
-            </a:r>
-            <a:r>
-              <a:rPr sz="1500" i="0" b="0">
-                <a:solidFill>
-                  <a:srgbClr val="2B211C"/>
-                </a:solidFill>
-                <a:latin typeface="Calibri"/>
-              </a:rPr>
-              <a:t>Tall man letters and separation reduce LASA errors. A, C and D increase risk.</a:t>
             </a:r>
           </a:p>
         </p:txBody>
@@ -14950,6 +14460,855 @@
       <p:grpSpPr/>
       <p:sp>
         <p:nvSpPr>
+          <p:cNvPr id="2" name="Oval 1"/>
+          <p:cNvSpPr/>
+          <p:nvPr/>
+        </p:nvSpPr>
+        <p:spPr>
+          <a:xfrm>
+            <a:off x="548640" y="475488"/>
+            <a:ext cx="658368" cy="658368"/>
+          </a:xfrm>
+          <a:prstGeom prst="ellipse">
+            <a:avLst/>
+          </a:prstGeom>
+          <a:solidFill>
+            <a:srgbClr val="2F6F7A"/>
+          </a:solidFill>
+          <a:ln>
+            <a:noFill/>
+          </a:ln>
+          <a:effectLst/>
+        </p:spPr>
+        <p:style>
+          <a:lnRef idx="1">
+            <a:schemeClr val="accent1"/>
+          </a:lnRef>
+          <a:fillRef idx="3">
+            <a:schemeClr val="accent1"/>
+          </a:fillRef>
+          <a:effectRef idx="2">
+            <a:schemeClr val="accent1"/>
+          </a:effectRef>
+          <a:fontRef idx="minor">
+            <a:schemeClr val="lt1"/>
+          </a:fontRef>
+        </p:style>
+        <p:txBody>
+          <a:bodyPr rtlCol="0" anchor="ctr" lIns="0" rIns="0" tIns="0" bIns="0"/>
+          <a:lstStyle/>
+          <a:p>
+            <a:pPr algn="ctr"/>
+            <a:r>
+              <a:rPr sz="1800" i="0" b="1">
+                <a:solidFill>
+                  <a:srgbClr val="FFFFFF"/>
+                </a:solidFill>
+                <a:latin typeface="Cambria"/>
+              </a:rPr>
+              <a:t>09</a:t>
+            </a:r>
+          </a:p>
+        </p:txBody>
+      </p:sp>
+      <p:sp>
+        <p:nvSpPr>
+          <p:cNvPr id="3" name="TextBox 2"/>
+          <p:cNvSpPr txBox="1"/>
+          <p:nvPr/>
+        </p:nvSpPr>
+        <p:spPr>
+          <a:xfrm>
+            <a:off x="1417319" y="438912"/>
+            <a:ext cx="10180015" cy="292608"/>
+          </a:xfrm>
+          <a:prstGeom prst="rect">
+            <a:avLst/>
+          </a:prstGeom>
+          <a:noFill/>
+        </p:spPr>
+        <p:txBody>
+          <a:bodyPr wrap="square" anchor="t" lIns="0" rIns="0" tIns="0" bIns="0">
+            <a:spAutoFit/>
+          </a:bodyPr>
+          <a:lstStyle/>
+          <a:p>
+            <a:r>
+              <a:rPr sz="1200" i="0" b="1" spc="150">
+                <a:solidFill>
+                  <a:srgbClr val="2F6F7A"/>
+                </a:solidFill>
+                <a:latin typeface="Calibri"/>
+              </a:rPr>
+              <a:t>SECTION 9  ·  QUESTION 5 OF 5  ·  ANSWER</a:t>
+            </a:r>
+          </a:p>
+        </p:txBody>
+      </p:sp>
+      <p:sp>
+        <p:nvSpPr>
+          <p:cNvPr id="4" name="TextBox 3"/>
+          <p:cNvSpPr txBox="1"/>
+          <p:nvPr/>
+        </p:nvSpPr>
+        <p:spPr>
+          <a:xfrm>
+            <a:off x="1417319" y="676656"/>
+            <a:ext cx="10180015" cy="640080"/>
+          </a:xfrm>
+          <a:prstGeom prst="rect">
+            <a:avLst/>
+          </a:prstGeom>
+          <a:noFill/>
+        </p:spPr>
+        <p:txBody>
+          <a:bodyPr wrap="square" anchor="t" lIns="0" rIns="0" tIns="0" bIns="0">
+            <a:spAutoFit/>
+          </a:bodyPr>
+          <a:lstStyle/>
+          <a:p>
+            <a:r>
+              <a:rPr sz="3200" i="0" b="1">
+                <a:solidFill>
+                  <a:srgbClr val="2B211C"/>
+                </a:solidFill>
+                <a:latin typeface="Cambria"/>
+              </a:rPr>
+              <a:t>Check your answer</a:t>
+            </a:r>
+          </a:p>
+        </p:txBody>
+      </p:sp>
+      <p:sp>
+        <p:nvSpPr>
+          <p:cNvPr id="5" name="TextBox 4"/>
+          <p:cNvSpPr txBox="1"/>
+          <p:nvPr/>
+        </p:nvSpPr>
+        <p:spPr>
+          <a:xfrm>
+            <a:off x="548640" y="6419088"/>
+            <a:ext cx="8229600" cy="274320"/>
+          </a:xfrm>
+          <a:prstGeom prst="rect">
+            <a:avLst/>
+          </a:prstGeom>
+          <a:noFill/>
+        </p:spPr>
+        <p:txBody>
+          <a:bodyPr wrap="square" anchor="t" lIns="0" rIns="0" tIns="0" bIns="0">
+            <a:spAutoFit/>
+          </a:bodyPr>
+          <a:lstStyle/>
+          <a:p>
+            <a:r>
+              <a:rPr sz="1000" i="0" b="0">
+                <a:solidFill>
+                  <a:srgbClr val="6E625B"/>
+                </a:solidFill>
+                <a:latin typeface="Calibri"/>
+              </a:rPr>
+              <a:t>Drug Information  ·  Section 9  ·  Pharmacovigilance, ADR Reporting and Medication Errors</a:t>
+            </a:r>
+          </a:p>
+        </p:txBody>
+      </p:sp>
+      <p:sp>
+        <p:nvSpPr>
+          <p:cNvPr id="6" name="TextBox 5"/>
+          <p:cNvSpPr txBox="1"/>
+          <p:nvPr/>
+        </p:nvSpPr>
+        <p:spPr>
+          <a:xfrm>
+            <a:off x="10424160" y="6419088"/>
+            <a:ext cx="731520" cy="274320"/>
+          </a:xfrm>
+          <a:prstGeom prst="rect">
+            <a:avLst/>
+          </a:prstGeom>
+          <a:noFill/>
+        </p:spPr>
+        <p:txBody>
+          <a:bodyPr wrap="square" anchor="t" lIns="0" rIns="0" tIns="0" bIns="0">
+            <a:spAutoFit/>
+          </a:bodyPr>
+          <a:lstStyle/>
+          <a:p>
+            <a:pPr algn="r"/>
+            <a:r>
+              <a:rPr sz="1000" i="0" b="1">
+                <a:solidFill>
+                  <a:srgbClr val="6E625B"/>
+                </a:solidFill>
+                <a:latin typeface="Calibri"/>
+              </a:rPr>
+              <a:t>22</a:t>
+            </a:r>
+          </a:p>
+        </p:txBody>
+      </p:sp>
+      <p:pic>
+        <p:nvPicPr>
+          <p:cNvPr id="7" name="Picture 6" descr="faculty-of-pharmacy.png"/>
+          <p:cNvPicPr>
+            <a:picLocks noChangeAspect="1"/>
+          </p:cNvPicPr>
+          <p:nvPr/>
+        </p:nvPicPr>
+        <p:blipFill>
+          <a:blip r:embed="rId2"/>
+          <a:stretch>
+            <a:fillRect/>
+          </a:stretch>
+        </p:blipFill>
+        <p:spPr>
+          <a:xfrm>
+            <a:off x="11247120" y="6309360"/>
+            <a:ext cx="384048" cy="384048"/>
+          </a:xfrm>
+          <a:prstGeom prst="rect">
+            <a:avLst/>
+          </a:prstGeom>
+        </p:spPr>
+      </p:pic>
+      <p:sp>
+        <p:nvSpPr>
+          <p:cNvPr id="8" name="TextBox 7"/>
+          <p:cNvSpPr txBox="1"/>
+          <p:nvPr/>
+        </p:nvSpPr>
+        <p:spPr>
+          <a:xfrm>
+            <a:off x="548640" y="1554480"/>
+            <a:ext cx="11094415" cy="1005840"/>
+          </a:xfrm>
+          <a:prstGeom prst="rect">
+            <a:avLst/>
+          </a:prstGeom>
+          <a:noFill/>
+        </p:spPr>
+        <p:txBody>
+          <a:bodyPr wrap="square" anchor="t" lIns="0" rIns="0" tIns="0" bIns="0">
+            <a:spAutoFit/>
+          </a:bodyPr>
+          <a:lstStyle/>
+          <a:p>
+            <a:r>
+              <a:rPr sz="2400" i="0" b="1">
+                <a:solidFill>
+                  <a:srgbClr val="2B211C"/>
+                </a:solidFill>
+                <a:latin typeface="Calibri"/>
+              </a:rPr>
+              <a:t>Which measure best reduces dispensing errors with look-alike drug names?</a:t>
+            </a:r>
+          </a:p>
+        </p:txBody>
+      </p:sp>
+      <p:sp>
+        <p:nvSpPr>
+          <p:cNvPr id="9" name="Rounded Rectangle 8"/>
+          <p:cNvSpPr/>
+          <p:nvPr/>
+        </p:nvSpPr>
+        <p:spPr>
+          <a:xfrm>
+            <a:off x="548640" y="2606040"/>
+            <a:ext cx="11094415" cy="548640"/>
+          </a:xfrm>
+          <a:prstGeom prst="roundRect">
+            <a:avLst>
+              <a:gd name="adj" fmla="val 18000"/>
+            </a:avLst>
+          </a:prstGeom>
+          <a:solidFill>
+            <a:srgbClr val="F5F4F4"/>
+          </a:solidFill>
+          <a:ln>
+            <a:noFill/>
+          </a:ln>
+          <a:effectLst/>
+        </p:spPr>
+        <p:style>
+          <a:lnRef idx="1">
+            <a:schemeClr val="accent1"/>
+          </a:lnRef>
+          <a:fillRef idx="3">
+            <a:schemeClr val="accent1"/>
+          </a:fillRef>
+          <a:effectRef idx="2">
+            <a:schemeClr val="accent1"/>
+          </a:effectRef>
+          <a:fontRef idx="minor">
+            <a:schemeClr val="lt1"/>
+          </a:fontRef>
+        </p:style>
+        <p:txBody>
+          <a:bodyPr rtlCol="0" anchor="ctr"/>
+          <a:lstStyle/>
+          <a:p>
+            <a:pPr algn="ctr"/>
+          </a:p>
+        </p:txBody>
+      </p:sp>
+      <p:sp>
+        <p:nvSpPr>
+          <p:cNvPr id="10" name="Oval 9"/>
+          <p:cNvSpPr/>
+          <p:nvPr/>
+        </p:nvSpPr>
+        <p:spPr>
+          <a:xfrm>
+            <a:off x="713232" y="2670048"/>
+            <a:ext cx="420624" cy="420624"/>
+          </a:xfrm>
+          <a:prstGeom prst="ellipse">
+            <a:avLst/>
+          </a:prstGeom>
+          <a:solidFill>
+            <a:srgbClr val="E2E0DE"/>
+          </a:solidFill>
+          <a:ln>
+            <a:noFill/>
+          </a:ln>
+          <a:effectLst/>
+        </p:spPr>
+        <p:style>
+          <a:lnRef idx="1">
+            <a:schemeClr val="accent1"/>
+          </a:lnRef>
+          <a:fillRef idx="3">
+            <a:schemeClr val="accent1"/>
+          </a:fillRef>
+          <a:effectRef idx="2">
+            <a:schemeClr val="accent1"/>
+          </a:effectRef>
+          <a:fontRef idx="minor">
+            <a:schemeClr val="lt1"/>
+          </a:fontRef>
+        </p:style>
+        <p:txBody>
+          <a:bodyPr rtlCol="0" anchor="ctr" lIns="0" rIns="0" tIns="0" bIns="0"/>
+          <a:lstStyle/>
+          <a:p>
+            <a:pPr algn="ctr"/>
+            <a:r>
+              <a:rPr sz="1500" i="0" b="1">
+                <a:solidFill>
+                  <a:srgbClr val="6E625B"/>
+                </a:solidFill>
+                <a:latin typeface="Calibri"/>
+              </a:rPr>
+              <a:t>A</a:t>
+            </a:r>
+          </a:p>
+        </p:txBody>
+      </p:sp>
+      <p:sp>
+        <p:nvSpPr>
+          <p:cNvPr id="11" name="TextBox 10"/>
+          <p:cNvSpPr txBox="1"/>
+          <p:nvPr/>
+        </p:nvSpPr>
+        <p:spPr>
+          <a:xfrm>
+            <a:off x="1371600" y="2606040"/>
+            <a:ext cx="10088575" cy="548640"/>
+          </a:xfrm>
+          <a:prstGeom prst="rect">
+            <a:avLst/>
+          </a:prstGeom>
+          <a:noFill/>
+        </p:spPr>
+        <p:txBody>
+          <a:bodyPr wrap="square" anchor="ctr" lIns="0" rIns="0" tIns="0" bIns="0">
+            <a:spAutoFit/>
+          </a:bodyPr>
+          <a:lstStyle/>
+          <a:p>
+            <a:r>
+              <a:rPr sz="1900" i="0" b="0">
+                <a:solidFill>
+                  <a:srgbClr val="6E625B"/>
+                </a:solidFill>
+                <a:latin typeface="Calibri"/>
+              </a:rPr>
+              <a:t>Storing LASA drugs side by side</a:t>
+            </a:r>
+          </a:p>
+        </p:txBody>
+      </p:sp>
+      <p:sp>
+        <p:nvSpPr>
+          <p:cNvPr id="12" name="Rounded Rectangle 11"/>
+          <p:cNvSpPr/>
+          <p:nvPr/>
+        </p:nvSpPr>
+        <p:spPr>
+          <a:xfrm>
+            <a:off x="548640" y="3282696"/>
+            <a:ext cx="11094415" cy="548640"/>
+          </a:xfrm>
+          <a:prstGeom prst="roundRect">
+            <a:avLst>
+              <a:gd name="adj" fmla="val 18000"/>
+            </a:avLst>
+          </a:prstGeom>
+          <a:solidFill>
+            <a:srgbClr val="2F6F7A"/>
+          </a:solidFill>
+          <a:ln>
+            <a:noFill/>
+          </a:ln>
+          <a:effectLst/>
+        </p:spPr>
+        <p:style>
+          <a:lnRef idx="1">
+            <a:schemeClr val="accent1"/>
+          </a:lnRef>
+          <a:fillRef idx="3">
+            <a:schemeClr val="accent1"/>
+          </a:fillRef>
+          <a:effectRef idx="2">
+            <a:schemeClr val="accent1"/>
+          </a:effectRef>
+          <a:fontRef idx="minor">
+            <a:schemeClr val="lt1"/>
+          </a:fontRef>
+        </p:style>
+        <p:txBody>
+          <a:bodyPr rtlCol="0" anchor="ctr"/>
+          <a:lstStyle/>
+          <a:p>
+            <a:pPr algn="ctr"/>
+          </a:p>
+        </p:txBody>
+      </p:sp>
+      <p:sp>
+        <p:nvSpPr>
+          <p:cNvPr id="13" name="Oval 12"/>
+          <p:cNvSpPr/>
+          <p:nvPr/>
+        </p:nvSpPr>
+        <p:spPr>
+          <a:xfrm>
+            <a:off x="713232" y="3346703"/>
+            <a:ext cx="420624" cy="420624"/>
+          </a:xfrm>
+          <a:prstGeom prst="ellipse">
+            <a:avLst/>
+          </a:prstGeom>
+          <a:solidFill>
+            <a:srgbClr val="FFFFFF"/>
+          </a:solidFill>
+          <a:ln>
+            <a:noFill/>
+          </a:ln>
+          <a:effectLst/>
+        </p:spPr>
+        <p:style>
+          <a:lnRef idx="1">
+            <a:schemeClr val="accent1"/>
+          </a:lnRef>
+          <a:fillRef idx="3">
+            <a:schemeClr val="accent1"/>
+          </a:fillRef>
+          <a:effectRef idx="2">
+            <a:schemeClr val="accent1"/>
+          </a:effectRef>
+          <a:fontRef idx="minor">
+            <a:schemeClr val="lt1"/>
+          </a:fontRef>
+        </p:style>
+        <p:txBody>
+          <a:bodyPr rtlCol="0" anchor="ctr" lIns="0" rIns="0" tIns="0" bIns="0"/>
+          <a:lstStyle/>
+          <a:p>
+            <a:pPr algn="ctr"/>
+            <a:r>
+              <a:rPr sz="1500" i="0" b="1">
+                <a:solidFill>
+                  <a:srgbClr val="2F6F7A"/>
+                </a:solidFill>
+                <a:latin typeface="Calibri"/>
+              </a:rPr>
+              <a:t>B</a:t>
+            </a:r>
+          </a:p>
+        </p:txBody>
+      </p:sp>
+      <p:sp>
+        <p:nvSpPr>
+          <p:cNvPr id="14" name="TextBox 13"/>
+          <p:cNvSpPr txBox="1"/>
+          <p:nvPr/>
+        </p:nvSpPr>
+        <p:spPr>
+          <a:xfrm>
+            <a:off x="1371600" y="3282696"/>
+            <a:ext cx="10088575" cy="548640"/>
+          </a:xfrm>
+          <a:prstGeom prst="rect">
+            <a:avLst/>
+          </a:prstGeom>
+          <a:noFill/>
+        </p:spPr>
+        <p:txBody>
+          <a:bodyPr wrap="square" anchor="ctr" lIns="0" rIns="0" tIns="0" bIns="0">
+            <a:spAutoFit/>
+          </a:bodyPr>
+          <a:lstStyle/>
+          <a:p>
+            <a:r>
+              <a:rPr sz="1900" i="0" b="1">
+                <a:solidFill>
+                  <a:srgbClr val="FFFFFF"/>
+                </a:solidFill>
+                <a:latin typeface="Calibri"/>
+              </a:rPr>
+              <a:t>Using "tall man" lettering and separating them on shelves</a:t>
+            </a:r>
+          </a:p>
+        </p:txBody>
+      </p:sp>
+      <p:sp>
+        <p:nvSpPr>
+          <p:cNvPr id="15" name="Rounded Rectangle 14"/>
+          <p:cNvSpPr/>
+          <p:nvPr/>
+        </p:nvSpPr>
+        <p:spPr>
+          <a:xfrm>
+            <a:off x="548640" y="3959352"/>
+            <a:ext cx="11094415" cy="548640"/>
+          </a:xfrm>
+          <a:prstGeom prst="roundRect">
+            <a:avLst>
+              <a:gd name="adj" fmla="val 18000"/>
+            </a:avLst>
+          </a:prstGeom>
+          <a:solidFill>
+            <a:srgbClr val="F5F4F4"/>
+          </a:solidFill>
+          <a:ln>
+            <a:noFill/>
+          </a:ln>
+          <a:effectLst/>
+        </p:spPr>
+        <p:style>
+          <a:lnRef idx="1">
+            <a:schemeClr val="accent1"/>
+          </a:lnRef>
+          <a:fillRef idx="3">
+            <a:schemeClr val="accent1"/>
+          </a:fillRef>
+          <a:effectRef idx="2">
+            <a:schemeClr val="accent1"/>
+          </a:effectRef>
+          <a:fontRef idx="minor">
+            <a:schemeClr val="lt1"/>
+          </a:fontRef>
+        </p:style>
+        <p:txBody>
+          <a:bodyPr rtlCol="0" anchor="ctr"/>
+          <a:lstStyle/>
+          <a:p>
+            <a:pPr algn="ctr"/>
+          </a:p>
+        </p:txBody>
+      </p:sp>
+      <p:sp>
+        <p:nvSpPr>
+          <p:cNvPr id="16" name="Oval 15"/>
+          <p:cNvSpPr/>
+          <p:nvPr/>
+        </p:nvSpPr>
+        <p:spPr>
+          <a:xfrm>
+            <a:off x="713232" y="4023360"/>
+            <a:ext cx="420624" cy="420624"/>
+          </a:xfrm>
+          <a:prstGeom prst="ellipse">
+            <a:avLst/>
+          </a:prstGeom>
+          <a:solidFill>
+            <a:srgbClr val="E2E0DE"/>
+          </a:solidFill>
+          <a:ln>
+            <a:noFill/>
+          </a:ln>
+          <a:effectLst/>
+        </p:spPr>
+        <p:style>
+          <a:lnRef idx="1">
+            <a:schemeClr val="accent1"/>
+          </a:lnRef>
+          <a:fillRef idx="3">
+            <a:schemeClr val="accent1"/>
+          </a:fillRef>
+          <a:effectRef idx="2">
+            <a:schemeClr val="accent1"/>
+          </a:effectRef>
+          <a:fontRef idx="minor">
+            <a:schemeClr val="lt1"/>
+          </a:fontRef>
+        </p:style>
+        <p:txBody>
+          <a:bodyPr rtlCol="0" anchor="ctr" lIns="0" rIns="0" tIns="0" bIns="0"/>
+          <a:lstStyle/>
+          <a:p>
+            <a:pPr algn="ctr"/>
+            <a:r>
+              <a:rPr sz="1500" i="0" b="1">
+                <a:solidFill>
+                  <a:srgbClr val="6E625B"/>
+                </a:solidFill>
+                <a:latin typeface="Calibri"/>
+              </a:rPr>
+              <a:t>C</a:t>
+            </a:r>
+          </a:p>
+        </p:txBody>
+      </p:sp>
+      <p:sp>
+        <p:nvSpPr>
+          <p:cNvPr id="17" name="TextBox 16"/>
+          <p:cNvSpPr txBox="1"/>
+          <p:nvPr/>
+        </p:nvSpPr>
+        <p:spPr>
+          <a:xfrm>
+            <a:off x="1371600" y="3959352"/>
+            <a:ext cx="10088575" cy="548640"/>
+          </a:xfrm>
+          <a:prstGeom prst="rect">
+            <a:avLst/>
+          </a:prstGeom>
+          <a:noFill/>
+        </p:spPr>
+        <p:txBody>
+          <a:bodyPr wrap="square" anchor="ctr" lIns="0" rIns="0" tIns="0" bIns="0">
+            <a:spAutoFit/>
+          </a:bodyPr>
+          <a:lstStyle/>
+          <a:p>
+            <a:r>
+              <a:rPr sz="1900" i="0" b="0">
+                <a:solidFill>
+                  <a:srgbClr val="6E625B"/>
+                </a:solidFill>
+                <a:latin typeface="Calibri"/>
+              </a:rPr>
+              <a:t>Removing all labels</a:t>
+            </a:r>
+          </a:p>
+        </p:txBody>
+      </p:sp>
+      <p:sp>
+        <p:nvSpPr>
+          <p:cNvPr id="18" name="Rounded Rectangle 17"/>
+          <p:cNvSpPr/>
+          <p:nvPr/>
+        </p:nvSpPr>
+        <p:spPr>
+          <a:xfrm>
+            <a:off x="548640" y="4636008"/>
+            <a:ext cx="11094415" cy="548640"/>
+          </a:xfrm>
+          <a:prstGeom prst="roundRect">
+            <a:avLst>
+              <a:gd name="adj" fmla="val 18000"/>
+            </a:avLst>
+          </a:prstGeom>
+          <a:solidFill>
+            <a:srgbClr val="F5F4F4"/>
+          </a:solidFill>
+          <a:ln>
+            <a:noFill/>
+          </a:ln>
+          <a:effectLst/>
+        </p:spPr>
+        <p:style>
+          <a:lnRef idx="1">
+            <a:schemeClr val="accent1"/>
+          </a:lnRef>
+          <a:fillRef idx="3">
+            <a:schemeClr val="accent1"/>
+          </a:fillRef>
+          <a:effectRef idx="2">
+            <a:schemeClr val="accent1"/>
+          </a:effectRef>
+          <a:fontRef idx="minor">
+            <a:schemeClr val="lt1"/>
+          </a:fontRef>
+        </p:style>
+        <p:txBody>
+          <a:bodyPr rtlCol="0" anchor="ctr"/>
+          <a:lstStyle/>
+          <a:p>
+            <a:pPr algn="ctr"/>
+          </a:p>
+        </p:txBody>
+      </p:sp>
+      <p:sp>
+        <p:nvSpPr>
+          <p:cNvPr id="19" name="Oval 18"/>
+          <p:cNvSpPr/>
+          <p:nvPr/>
+        </p:nvSpPr>
+        <p:spPr>
+          <a:xfrm>
+            <a:off x="713232" y="4700016"/>
+            <a:ext cx="420624" cy="420624"/>
+          </a:xfrm>
+          <a:prstGeom prst="ellipse">
+            <a:avLst/>
+          </a:prstGeom>
+          <a:solidFill>
+            <a:srgbClr val="E2E0DE"/>
+          </a:solidFill>
+          <a:ln>
+            <a:noFill/>
+          </a:ln>
+          <a:effectLst/>
+        </p:spPr>
+        <p:style>
+          <a:lnRef idx="1">
+            <a:schemeClr val="accent1"/>
+          </a:lnRef>
+          <a:fillRef idx="3">
+            <a:schemeClr val="accent1"/>
+          </a:fillRef>
+          <a:effectRef idx="2">
+            <a:schemeClr val="accent1"/>
+          </a:effectRef>
+          <a:fontRef idx="minor">
+            <a:schemeClr val="lt1"/>
+          </a:fontRef>
+        </p:style>
+        <p:txBody>
+          <a:bodyPr rtlCol="0" anchor="ctr" lIns="0" rIns="0" tIns="0" bIns="0"/>
+          <a:lstStyle/>
+          <a:p>
+            <a:pPr algn="ctr"/>
+            <a:r>
+              <a:rPr sz="1500" i="0" b="1">
+                <a:solidFill>
+                  <a:srgbClr val="6E625B"/>
+                </a:solidFill>
+                <a:latin typeface="Calibri"/>
+              </a:rPr>
+              <a:t>D</a:t>
+            </a:r>
+          </a:p>
+        </p:txBody>
+      </p:sp>
+      <p:sp>
+        <p:nvSpPr>
+          <p:cNvPr id="20" name="TextBox 19"/>
+          <p:cNvSpPr txBox="1"/>
+          <p:nvPr/>
+        </p:nvSpPr>
+        <p:spPr>
+          <a:xfrm>
+            <a:off x="1371600" y="4636008"/>
+            <a:ext cx="10088575" cy="548640"/>
+          </a:xfrm>
+          <a:prstGeom prst="rect">
+            <a:avLst/>
+          </a:prstGeom>
+          <a:noFill/>
+        </p:spPr>
+        <p:txBody>
+          <a:bodyPr wrap="square" anchor="ctr" lIns="0" rIns="0" tIns="0" bIns="0">
+            <a:spAutoFit/>
+          </a:bodyPr>
+          <a:lstStyle/>
+          <a:p>
+            <a:r>
+              <a:rPr sz="1900" i="0" b="0">
+                <a:solidFill>
+                  <a:srgbClr val="6E625B"/>
+                </a:solidFill>
+                <a:latin typeface="Calibri"/>
+              </a:rPr>
+              <a:t>Dispensing from memory</a:t>
+            </a:r>
+          </a:p>
+        </p:txBody>
+      </p:sp>
+      <p:sp>
+        <p:nvSpPr>
+          <p:cNvPr id="21" name="TextBox 20"/>
+          <p:cNvSpPr txBox="1"/>
+          <p:nvPr/>
+        </p:nvSpPr>
+        <p:spPr>
+          <a:xfrm>
+            <a:off x="548640" y="5358384"/>
+            <a:ext cx="11094415" cy="685800"/>
+          </a:xfrm>
+          <a:prstGeom prst="rect">
+            <a:avLst/>
+          </a:prstGeom>
+          <a:noFill/>
+        </p:spPr>
+        <p:txBody>
+          <a:bodyPr wrap="square" anchor="t" lIns="0" rIns="0" tIns="0" bIns="0">
+            <a:spAutoFit/>
+          </a:bodyPr>
+          <a:lstStyle/>
+          <a:p>
+            <a:r>
+              <a:rPr sz="1500" i="0" b="1">
+                <a:solidFill>
+                  <a:srgbClr val="2F6F7A"/>
+                </a:solidFill>
+                <a:latin typeface="Calibri"/>
+              </a:rPr>
+              <a:t>Why:  </a:t>
+            </a:r>
+            <a:r>
+              <a:rPr sz="1500" i="0" b="0">
+                <a:solidFill>
+                  <a:srgbClr val="2B211C"/>
+                </a:solidFill>
+                <a:latin typeface="Calibri"/>
+              </a:rPr>
+              <a:t>Tall man letters and separation reduce LASA errors. A, C and D increase risk.</a:t>
+            </a:r>
+          </a:p>
+        </p:txBody>
+      </p:sp>
+    </p:spTree>
+  </p:cSld>
+  <p:clrMapOvr>
+    <a:masterClrMapping/>
+  </p:clrMapOvr>
+</p:sld>
+</file>
+
+<file path=ppt/slides/slide23.xml><?xml version="1.0" encoding="utf-8"?>
+<p:sld xmlns:a="http://schemas.openxmlformats.org/drawingml/2006/main" xmlns:p="http://schemas.openxmlformats.org/presentationml/2006/main" xmlns:r="http://schemas.openxmlformats.org/officeDocument/2006/relationships">
+  <p:cSld>
+    <p:bg>
+      <p:bgPr>
+        <a:solidFill>
+          <a:srgbClr val="FFFFFF"/>
+        </a:solidFill>
+        <a:effectLst/>
+      </p:bgPr>
+    </p:bg>
+    <p:spTree>
+      <p:nvGrpSpPr>
+        <p:cNvPr id="1" name=""/>
+        <p:cNvGrpSpPr/>
+        <p:nvPr/>
+      </p:nvGrpSpPr>
+      <p:grpSpPr/>
+      <p:sp>
+        <p:nvSpPr>
           <p:cNvPr id="2" name="Rectangle 1"/>
           <p:cNvSpPr/>
           <p:nvPr/>
@@ -15014,11 +15373,10 @@
           </a:bodyPr>
           <a:lstStyle/>
           <a:p>
-            <a:pPr algn="l"/>
             <a:r>
               <a:rPr sz="13000" i="0" b="1">
                 <a:solidFill>
-                  <a:srgbClr val="F6E5DE"/>
+                  <a:srgbClr val="F1E3DF"/>
                 </a:solidFill>
                 <a:latin typeface="Cambria"/>
               </a:rPr>
@@ -15063,7 +15421,7 @@
             <a:r>
               <a:rPr sz="1400" i="0" b="1" spc="150">
                 <a:solidFill>
-                  <a:srgbClr val="F6E5DE"/>
+                  <a:srgbClr val="F1E3DF"/>
                 </a:solidFill>
                 <a:latin typeface="Calibri"/>
               </a:rPr>
@@ -15151,7 +15509,7 @@
         <p:spPr>
           <a:xfrm>
             <a:off x="4526280" y="6419088"/>
-            <a:ext cx="5486400" cy="274320"/>
+            <a:ext cx="8229600" cy="274320"/>
           </a:xfrm>
           <a:prstGeom prst="rect">
             <a:avLst/>
@@ -15206,7 +15564,7 @@
                 </a:solidFill>
                 <a:latin typeface="Calibri"/>
               </a:rPr>
-              <a:t>22</a:t>
+              <a:t>23</a:t>
             </a:r>
           </a:p>
         </p:txBody>
@@ -15243,7 +15601,7 @@
 </p:sld>
 </file>
 
-<file path=ppt/slides/slide23.xml><?xml version="1.0" encoding="utf-8"?>
+<file path=ppt/slides/slide24.xml><?xml version="1.0" encoding="utf-8"?>
 <p:sld xmlns:a="http://schemas.openxmlformats.org/drawingml/2006/main" xmlns:p="http://schemas.openxmlformats.org/presentationml/2006/main" xmlns:r="http://schemas.openxmlformats.org/officeDocument/2006/relationships">
   <p:cSld>
     <p:bg>
@@ -15286,7 +15644,7 @@
             <a:r>
               <a:rPr sz="1300" i="0" b="1" spc="200">
                 <a:solidFill>
-                  <a:srgbClr val="F3E6D8"/>
+                  <a:srgbClr val="F2E5E1"/>
                 </a:solidFill>
                 <a:latin typeface="Calibri"/>
               </a:rPr>
@@ -15344,7 +15702,7 @@
             <a:avLst/>
           </a:prstGeom>
           <a:solidFill>
-            <a:srgbClr val="F3E6D8"/>
+            <a:srgbClr val="F2E5E1"/>
           </a:solidFill>
           <a:ln>
             <a:noFill/>
@@ -15366,7 +15724,7 @@
           </a:fontRef>
         </p:style>
         <p:txBody>
-          <a:bodyPr rtlCol="0" anchor="ctr" lIns="0" rIns="0"/>
+          <a:bodyPr rtlCol="0" anchor="ctr" lIns="0" rIns="0" tIns="0" bIns="0"/>
           <a:lstStyle/>
           <a:p>
             <a:pPr algn="ctr"/>
@@ -15431,7 +15789,7 @@
             <a:avLst/>
           </a:prstGeom>
           <a:solidFill>
-            <a:srgbClr val="F3E6D8"/>
+            <a:srgbClr val="F2E5E1"/>
           </a:solidFill>
           <a:ln>
             <a:noFill/>
@@ -15453,7 +15811,7 @@
           </a:fontRef>
         </p:style>
         <p:txBody>
-          <a:bodyPr rtlCol="0" anchor="ctr" lIns="0" rIns="0"/>
+          <a:bodyPr rtlCol="0" anchor="ctr" lIns="0" rIns="0" tIns="0" bIns="0"/>
           <a:lstStyle/>
           <a:p>
             <a:pPr algn="ctr"/>
@@ -15518,7 +15876,7 @@
             <a:avLst/>
           </a:prstGeom>
           <a:solidFill>
-            <a:srgbClr val="F3E6D8"/>
+            <a:srgbClr val="F2E5E1"/>
           </a:solidFill>
           <a:ln>
             <a:noFill/>
@@ -15540,7 +15898,7 @@
           </a:fontRef>
         </p:style>
         <p:txBody>
-          <a:bodyPr rtlCol="0" anchor="ctr" lIns="0" rIns="0"/>
+          <a:bodyPr rtlCol="0" anchor="ctr" lIns="0" rIns="0" tIns="0" bIns="0"/>
           <a:lstStyle/>
           <a:p>
             <a:pPr algn="ctr"/>
@@ -15605,7 +15963,7 @@
             <a:avLst/>
           </a:prstGeom>
           <a:solidFill>
-            <a:srgbClr val="F3E6D8"/>
+            <a:srgbClr val="F2E5E1"/>
           </a:solidFill>
           <a:ln>
             <a:noFill/>
@@ -15627,7 +15985,7 @@
           </a:fontRef>
         </p:style>
         <p:txBody>
-          <a:bodyPr rtlCol="0" anchor="ctr" lIns="0" rIns="0"/>
+          <a:bodyPr rtlCol="0" anchor="ctr" lIns="0" rIns="0" tIns="0" bIns="0"/>
           <a:lstStyle/>
           <a:p>
             <a:pPr algn="ctr"/>
@@ -15692,7 +16050,7 @@
             <a:avLst/>
           </a:prstGeom>
           <a:solidFill>
-            <a:srgbClr val="F3E6D8"/>
+            <a:srgbClr val="F2E5E1"/>
           </a:solidFill>
           <a:ln>
             <a:noFill/>
@@ -15714,7 +16072,7 @@
           </a:fontRef>
         </p:style>
         <p:txBody>
-          <a:bodyPr rtlCol="0" anchor="ctr" lIns="0" rIns="0"/>
+          <a:bodyPr rtlCol="0" anchor="ctr" lIns="0" rIns="0" tIns="0" bIns="0"/>
           <a:lstStyle/>
           <a:p>
             <a:pPr algn="ctr"/>
@@ -15875,7 +16233,7 @@
           </a:fontRef>
         </p:style>
         <p:txBody>
-          <a:bodyPr rtlCol="0" anchor="ctr" lIns="0" rIns="0"/>
+          <a:bodyPr rtlCol="0" anchor="ctr" lIns="0" rIns="0" tIns="0" bIns="0"/>
           <a:lstStyle/>
           <a:p>
             <a:pPr algn="ctr"/>
@@ -15954,7 +16312,7 @@
                 </a:solidFill>
                 <a:latin typeface="Cambria"/>
               </a:rPr>
-              <a:t>Pharmacovigilance</a:t>
+              <a:t>Why trials are not enough</a:t>
             </a:r>
           </a:p>
         </p:txBody>
@@ -16052,17 +16410,126 @@
           </a:prstGeom>
         </p:spPr>
       </p:pic>
+      <p:sp>
+        <p:nvSpPr>
+          <p:cNvPr id="8" name="TextBox 7"/>
+          <p:cNvSpPr txBox="1"/>
+          <p:nvPr/>
+        </p:nvSpPr>
+        <p:spPr>
+          <a:xfrm>
+            <a:off x="548640" y="1554480"/>
+            <a:ext cx="4480560" cy="4617720"/>
+          </a:xfrm>
+          <a:prstGeom prst="rect">
+            <a:avLst/>
+          </a:prstGeom>
+          <a:noFill/>
+        </p:spPr>
+        <p:txBody>
+          <a:bodyPr wrap="square" anchor="t" lIns="0" rIns="0" tIns="0" bIns="0">
+            <a:spAutoFit/>
+          </a:bodyPr>
+          <a:lstStyle/>
+          <a:p>
+            <a:pPr>
+              <a:spcAft>
+                <a:spcPts val="800"/>
+              </a:spcAft>
+            </a:pPr>
+            <a:r>
+              <a:rPr sz="1700" i="0" b="0">
+                <a:solidFill>
+                  <a:srgbClr val="2B211C"/>
+                </a:solidFill>
+                <a:latin typeface="Calibri"/>
+              </a:rPr>
+              <a:t>WHO defines </a:t>
+            </a:r>
+            <a:r>
+              <a:rPr sz="1700" i="0" b="1">
+                <a:solidFill>
+                  <a:srgbClr val="2B211C"/>
+                </a:solidFill>
+                <a:latin typeface="Calibri"/>
+              </a:rPr>
+              <a:t>pharmacovigilance</a:t>
+            </a:r>
+            <a:r>
+              <a:rPr sz="1700" i="0" b="0">
+                <a:solidFill>
+                  <a:srgbClr val="2B211C"/>
+                </a:solidFill>
+                <a:latin typeface="Calibri"/>
+              </a:rPr>
+              <a:t> as the science and activities relating to the </a:t>
+            </a:r>
+            <a:r>
+              <a:rPr sz="1700" i="0" b="1">
+                <a:solidFill>
+                  <a:srgbClr val="2B211C"/>
+                </a:solidFill>
+                <a:latin typeface="Calibri"/>
+              </a:rPr>
+              <a:t>detection, assessment, understanding and prevention</a:t>
+            </a:r>
+            <a:r>
+              <a:rPr sz="1700" i="0" b="0">
+                <a:solidFill>
+                  <a:srgbClr val="2B211C"/>
+                </a:solidFill>
+                <a:latin typeface="Calibri"/>
+              </a:rPr>
+              <a:t> of adverse effects or any other drug-related problem. It covers all medicines, including herbal products and vaccines.</a:t>
+            </a:r>
+          </a:p>
+          <a:p>
+            <a:pPr>
+              <a:spcAft>
+                <a:spcPts val="800"/>
+              </a:spcAft>
+            </a:pPr>
+            <a:r>
+              <a:rPr sz="1700" i="0" b="0">
+                <a:solidFill>
+                  <a:srgbClr val="2B211C"/>
+                </a:solidFill>
+                <a:latin typeface="Calibri"/>
+              </a:rPr>
+              <a:t>The </a:t>
+            </a:r>
+            <a:r>
+              <a:rPr sz="1700" i="0" b="1">
+                <a:solidFill>
+                  <a:srgbClr val="2B211C"/>
+                </a:solidFill>
+                <a:latin typeface="Calibri"/>
+              </a:rPr>
+              <a:t>rule of three</a:t>
+            </a:r>
+            <a:r>
+              <a:rPr sz="1700" i="0" b="0">
+                <a:solidFill>
+                  <a:srgbClr val="2B211C"/>
+                </a:solidFill>
+                <a:latin typeface="Calibri"/>
+              </a:rPr>
+              <a:t> shows the limit of trials. If no event is seen in n patients, the true rate could still be as high as about 3/n. With 3,000 patients, a reaction as common as 1 in 1,000 may still be missed. Rare reactions often appear only after marketing.</a:t>
+            </a:r>
+          </a:p>
+        </p:txBody>
+      </p:sp>
       <p:graphicFrame>
         <p:nvGraphicFramePr>
-          <p:cNvPr id="8" name="Table 7"/>
+          <p:cNvPr id="9" name="Table 8"/>
           <p:cNvGraphicFramePr>
             <a:graphicFrameLocks noGrp="1"/>
           </p:cNvGraphicFramePr>
           <p:nvPr/>
         </p:nvGraphicFramePr>
         <p:xfrm>
-          <a:off x="548640" y="1600200"/>
-          <a:ext cx="11094414" cy="4526280"/>
+          <a:off x="5394959" y="1554480"/>
+          <a:ext cx="6248094" cy="3840480"/>
         </p:xfrm>
         <a:graphic>
           <a:graphicData uri="http://schemas.openxmlformats.org/drawingml/2006/table">
@@ -16071,17 +16538,17 @@
                 <a:tableStyleId>{5C22544A-7EE6-4342-B048-85BDC9FD1C3A}</a:tableStyleId>
               </a:tblPr>
               <a:tblGrid>
-                <a:gridCol w="5588297"/>
-                <a:gridCol w="5506117"/>
+                <a:gridCol w="3147188"/>
+                <a:gridCol w="3100906"/>
               </a:tblGrid>
-              <a:tr h="754380">
+              <a:tr h="640080">
                 <a:tc>
                   <a:txBody>
                     <a:bodyPr/>
                     <a:lstStyle/>
                     <a:p>
                       <a:r>
-                        <a:rPr sz="1700" i="0" b="1">
+                        <a:rPr sz="1600" i="0" b="1">
                           <a:solidFill>
                             <a:srgbClr val="FFFFFF"/>
                           </a:solidFill>
@@ -16103,7 +16570,7 @@
                     <a:lstStyle/>
                     <a:p>
                       <a:r>
-                        <a:rPr sz="1700" i="0" b="1">
+                        <a:rPr sz="1600" i="0" b="1">
                           <a:solidFill>
                             <a:srgbClr val="FFFFFF"/>
                           </a:solidFill>
@@ -16120,14 +16587,14 @@
                   </a:tcPr>
                 </a:tc>
               </a:tr>
-              <a:tr h="754380">
+              <a:tr h="640080">
                 <a:tc>
                   <a:txBody>
                     <a:bodyPr/>
                     <a:lstStyle/>
                     <a:p>
                       <a:r>
-                        <a:rPr sz="1800" i="0" b="1">
+                        <a:rPr sz="1700" i="0" b="1">
                           <a:solidFill>
                             <a:srgbClr val="2B211C"/>
                           </a:solidFill>
@@ -16149,7 +16616,7 @@
                     <a:lstStyle/>
                     <a:p>
                       <a:r>
-                        <a:rPr sz="1800" i="0" b="0">
+                        <a:rPr sz="1700" i="0" b="0">
                           <a:solidFill>
                             <a:srgbClr val="2B211C"/>
                           </a:solidFill>
@@ -16166,14 +16633,14 @@
                   </a:tcPr>
                 </a:tc>
               </a:tr>
-              <a:tr h="754380">
+              <a:tr h="640080">
                 <a:tc>
                   <a:txBody>
                     <a:bodyPr/>
                     <a:lstStyle/>
                     <a:p>
                       <a:r>
-                        <a:rPr sz="1800" i="0" b="1">
+                        <a:rPr sz="1700" i="0" b="1">
                           <a:solidFill>
                             <a:srgbClr val="2B211C"/>
                           </a:solidFill>
@@ -16185,7 +16652,7 @@
                   </a:txBody>
                   <a:tcPr marL="109728" marR="109728" marT="45720" marB="45720" anchor="ctr">
                     <a:solidFill>
-                      <a:srgbClr val="FBF3EE"/>
+                      <a:srgbClr val="FAF4F2"/>
                     </a:solidFill>
                   </a:tcPr>
                 </a:tc>
@@ -16195,7 +16662,7 @@
                     <a:lstStyle/>
                     <a:p>
                       <a:r>
-                        <a:rPr sz="1800" i="0" b="0">
+                        <a:rPr sz="1700" i="0" b="0">
                           <a:solidFill>
                             <a:srgbClr val="2B211C"/>
                           </a:solidFill>
@@ -16207,19 +16674,19 @@
                   </a:txBody>
                   <a:tcPr marL="109728" marR="109728" marT="45720" marB="45720" anchor="ctr">
                     <a:solidFill>
-                      <a:srgbClr val="FBF3EE"/>
+                      <a:srgbClr val="FAF4F2"/>
                     </a:solidFill>
                   </a:tcPr>
                 </a:tc>
               </a:tr>
-              <a:tr h="754380">
+              <a:tr h="640080">
                 <a:tc>
                   <a:txBody>
                     <a:bodyPr/>
                     <a:lstStyle/>
                     <a:p>
                       <a:r>
-                        <a:rPr sz="1800" i="0" b="1">
+                        <a:rPr sz="1700" i="0" b="1">
                           <a:solidFill>
                             <a:srgbClr val="2B211C"/>
                           </a:solidFill>
@@ -16241,7 +16708,7 @@
                     <a:lstStyle/>
                     <a:p>
                       <a:r>
-                        <a:rPr sz="1800" i="0" b="0">
+                        <a:rPr sz="1700" i="0" b="0">
                           <a:solidFill>
                             <a:srgbClr val="2B211C"/>
                           </a:solidFill>
@@ -16258,14 +16725,14 @@
                   </a:tcPr>
                 </a:tc>
               </a:tr>
-              <a:tr h="754380">
+              <a:tr h="640080">
                 <a:tc>
                   <a:txBody>
                     <a:bodyPr/>
                     <a:lstStyle/>
                     <a:p>
                       <a:r>
-                        <a:rPr sz="1800" i="0" b="1">
+                        <a:rPr sz="1700" i="0" b="1">
                           <a:solidFill>
                             <a:srgbClr val="2B211C"/>
                           </a:solidFill>
@@ -16277,7 +16744,7 @@
                   </a:txBody>
                   <a:tcPr marL="109728" marR="109728" marT="45720" marB="45720" anchor="ctr">
                     <a:solidFill>
-                      <a:srgbClr val="FBF3EE"/>
+                      <a:srgbClr val="FAF4F2"/>
                     </a:solidFill>
                   </a:tcPr>
                 </a:tc>
@@ -16287,7 +16754,7 @@
                     <a:lstStyle/>
                     <a:p>
                       <a:r>
-                        <a:rPr sz="1800" i="0" b="0">
+                        <a:rPr sz="1700" i="0" b="0">
                           <a:solidFill>
                             <a:srgbClr val="2B211C"/>
                           </a:solidFill>
@@ -16299,19 +16766,19 @@
                   </a:txBody>
                   <a:tcPr marL="109728" marR="109728" marT="45720" marB="45720" anchor="ctr">
                     <a:solidFill>
-                      <a:srgbClr val="FBF3EE"/>
+                      <a:srgbClr val="FAF4F2"/>
                     </a:solidFill>
                   </a:tcPr>
                 </a:tc>
               </a:tr>
-              <a:tr h="754380">
+              <a:tr h="640080">
                 <a:tc>
                   <a:txBody>
                     <a:bodyPr/>
                     <a:lstStyle/>
                     <a:p>
                       <a:r>
-                        <a:rPr sz="1800" i="0" b="1">
+                        <a:rPr sz="1700" i="0" b="1">
                           <a:solidFill>
                             <a:srgbClr val="2B211C"/>
                           </a:solidFill>
@@ -16333,7 +16800,7 @@
                     <a:lstStyle/>
                     <a:p>
                       <a:r>
-                        <a:rPr sz="1800" i="0" b="0">
+                        <a:rPr sz="1700" i="0" b="0">
                           <a:solidFill>
                             <a:srgbClr val="2B211C"/>
                           </a:solidFill>
@@ -16417,7 +16884,7 @@
           </a:fontRef>
         </p:style>
         <p:txBody>
-          <a:bodyPr rtlCol="0" anchor="ctr" lIns="0" rIns="0"/>
+          <a:bodyPr rtlCol="0" anchor="ctr" lIns="0" rIns="0" tIns="0" bIns="0"/>
           <a:lstStyle/>
           <a:p>
             <a:pPr algn="ctr"/>
@@ -16496,7 +16963,7 @@
                 </a:solidFill>
                 <a:latin typeface="Cambria"/>
               </a:rPr>
-              <a:t>Spontaneous Reporting</a:t>
+              <a:t>What to report</a:t>
             </a:r>
           </a:p>
         </p:txBody>
@@ -16594,17 +17061,771 @@
           </a:prstGeom>
         </p:spPr>
       </p:pic>
+      <p:sp>
+        <p:nvSpPr>
+          <p:cNvPr id="8" name="TextBox 7"/>
+          <p:cNvSpPr txBox="1"/>
+          <p:nvPr/>
+        </p:nvSpPr>
+        <p:spPr>
+          <a:xfrm>
+            <a:off x="548640" y="1554480"/>
+            <a:ext cx="11094415" cy="1092708"/>
+          </a:xfrm>
+          <a:prstGeom prst="rect">
+            <a:avLst/>
+          </a:prstGeom>
+          <a:noFill/>
+        </p:spPr>
+        <p:txBody>
+          <a:bodyPr wrap="square" anchor="t" lIns="0" rIns="0" tIns="0" bIns="0">
+            <a:spAutoFit/>
+          </a:bodyPr>
+          <a:lstStyle/>
+          <a:p>
+            <a:pPr>
+              <a:spcAft>
+                <a:spcPts val="800"/>
+              </a:spcAft>
+            </a:pPr>
+            <a:r>
+              <a:rPr sz="1800" i="0" b="1">
+                <a:solidFill>
+                  <a:srgbClr val="2B211C"/>
+                </a:solidFill>
+                <a:latin typeface="Calibri"/>
+              </a:rPr>
+              <a:t>Spontaneous reporting</a:t>
+            </a:r>
+            <a:r>
+              <a:rPr sz="1800" i="0" b="0">
+                <a:solidFill>
+                  <a:srgbClr val="2B211C"/>
+                </a:solidFill>
+                <a:latin typeface="Calibri"/>
+              </a:rPr>
+              <a:t> means that health professionals and patients report suspected ADRs to a national centre. It is the main way that new safety signals are found. In Egypt, reports go to the </a:t>
+            </a:r>
+            <a:r>
+              <a:rPr sz="1800" i="0" b="1">
+                <a:solidFill>
+                  <a:srgbClr val="2B211C"/>
+                </a:solidFill>
+                <a:latin typeface="Calibri"/>
+              </a:rPr>
+              <a:t>Egyptian Pharmaceutical Vigilance Center (EPVC)</a:t>
+            </a:r>
+            <a:r>
+              <a:rPr sz="1800" i="0" b="0">
+                <a:solidFill>
+                  <a:srgbClr val="2B211C"/>
+                </a:solidFill>
+                <a:latin typeface="Calibri"/>
+              </a:rPr>
+              <a:t> of the Egyptian Drug Authority (EDA).</a:t>
+            </a:r>
+          </a:p>
+        </p:txBody>
+      </p:sp>
+      <p:sp>
+        <p:nvSpPr>
+          <p:cNvPr id="9" name="Oval 8"/>
+          <p:cNvSpPr/>
+          <p:nvPr/>
+        </p:nvSpPr>
+        <p:spPr>
+          <a:xfrm>
+            <a:off x="548640" y="2848356"/>
+            <a:ext cx="402336" cy="402336"/>
+          </a:xfrm>
+          <a:prstGeom prst="ellipse">
+            <a:avLst/>
+          </a:prstGeom>
+          <a:solidFill>
+            <a:srgbClr val="E6EEEF"/>
+          </a:solidFill>
+          <a:ln>
+            <a:noFill/>
+          </a:ln>
+          <a:effectLst/>
+        </p:spPr>
+        <p:style>
+          <a:lnRef idx="1">
+            <a:schemeClr val="accent1"/>
+          </a:lnRef>
+          <a:fillRef idx="3">
+            <a:schemeClr val="accent1"/>
+          </a:fillRef>
+          <a:effectRef idx="2">
+            <a:schemeClr val="accent1"/>
+          </a:effectRef>
+          <a:fontRef idx="minor">
+            <a:schemeClr val="lt1"/>
+          </a:fontRef>
+        </p:style>
+        <p:txBody>
+          <a:bodyPr rtlCol="0" anchor="ctr" lIns="0" rIns="0" tIns="0" bIns="0"/>
+          <a:lstStyle/>
+          <a:p>
+            <a:pPr algn="ctr"/>
+            <a:r>
+              <a:rPr sz="1300" i="0" b="1">
+                <a:solidFill>
+                  <a:srgbClr val="2F6F7A"/>
+                </a:solidFill>
+                <a:latin typeface="Calibri"/>
+              </a:rPr>
+              <a:t>1</a:t>
+            </a:r>
+          </a:p>
+        </p:txBody>
+      </p:sp>
+      <p:sp>
+        <p:nvSpPr>
+          <p:cNvPr id="10" name="TextBox 9"/>
+          <p:cNvSpPr txBox="1"/>
+          <p:nvPr/>
+        </p:nvSpPr>
+        <p:spPr>
+          <a:xfrm>
+            <a:off x="1143000" y="2866644"/>
+            <a:ext cx="10500055" cy="706469"/>
+          </a:xfrm>
+          <a:prstGeom prst="rect">
+            <a:avLst/>
+          </a:prstGeom>
+          <a:noFill/>
+        </p:spPr>
+        <p:txBody>
+          <a:bodyPr wrap="square" anchor="t" lIns="0" rIns="0" tIns="0" bIns="0">
+            <a:spAutoFit/>
+          </a:bodyPr>
+          <a:lstStyle/>
+          <a:p>
+            <a:r>
+              <a:rPr sz="2100" i="0" b="1">
+                <a:solidFill>
+                  <a:srgbClr val="2B211C"/>
+                </a:solidFill>
+                <a:latin typeface="Calibri"/>
+              </a:rPr>
+              <a:t>All suspected</a:t>
+            </a:r>
+            <a:r>
+              <a:rPr sz="2100" i="0" b="0">
+                <a:solidFill>
+                  <a:srgbClr val="2B211C"/>
+                </a:solidFill>
+                <a:latin typeface="Calibri"/>
+              </a:rPr>
+              <a:t> ADRs to new drugs.</a:t>
+            </a:r>
+          </a:p>
+        </p:txBody>
+      </p:sp>
+      <p:sp>
+        <p:nvSpPr>
+          <p:cNvPr id="11" name="Oval 10"/>
+          <p:cNvSpPr/>
+          <p:nvPr/>
+        </p:nvSpPr>
+        <p:spPr>
+          <a:xfrm>
+            <a:off x="548640" y="3600545"/>
+            <a:ext cx="402336" cy="402336"/>
+          </a:xfrm>
+          <a:prstGeom prst="ellipse">
+            <a:avLst/>
+          </a:prstGeom>
+          <a:solidFill>
+            <a:srgbClr val="E6EEEF"/>
+          </a:solidFill>
+          <a:ln>
+            <a:noFill/>
+          </a:ln>
+          <a:effectLst/>
+        </p:spPr>
+        <p:style>
+          <a:lnRef idx="1">
+            <a:schemeClr val="accent1"/>
+          </a:lnRef>
+          <a:fillRef idx="3">
+            <a:schemeClr val="accent1"/>
+          </a:fillRef>
+          <a:effectRef idx="2">
+            <a:schemeClr val="accent1"/>
+          </a:effectRef>
+          <a:fontRef idx="minor">
+            <a:schemeClr val="lt1"/>
+          </a:fontRef>
+        </p:style>
+        <p:txBody>
+          <a:bodyPr rtlCol="0" anchor="ctr" lIns="0" rIns="0" tIns="0" bIns="0"/>
+          <a:lstStyle/>
+          <a:p>
+            <a:pPr algn="ctr"/>
+            <a:r>
+              <a:rPr sz="1300" i="0" b="1">
+                <a:solidFill>
+                  <a:srgbClr val="2F6F7A"/>
+                </a:solidFill>
+                <a:latin typeface="Calibri"/>
+              </a:rPr>
+              <a:t>2</a:t>
+            </a:r>
+          </a:p>
+        </p:txBody>
+      </p:sp>
+      <p:sp>
+        <p:nvSpPr>
+          <p:cNvPr id="12" name="TextBox 11"/>
+          <p:cNvSpPr txBox="1"/>
+          <p:nvPr/>
+        </p:nvSpPr>
+        <p:spPr>
+          <a:xfrm>
+            <a:off x="1143000" y="3618833"/>
+            <a:ext cx="10500055" cy="1039844"/>
+          </a:xfrm>
+          <a:prstGeom prst="rect">
+            <a:avLst/>
+          </a:prstGeom>
+          <a:noFill/>
+        </p:spPr>
+        <p:txBody>
+          <a:bodyPr wrap="square" anchor="t" lIns="0" rIns="0" tIns="0" bIns="0">
+            <a:spAutoFit/>
+          </a:bodyPr>
+          <a:lstStyle/>
+          <a:p>
+            <a:r>
+              <a:rPr sz="2100" i="0" b="1">
+                <a:solidFill>
+                  <a:srgbClr val="2B211C"/>
+                </a:solidFill>
+                <a:latin typeface="Calibri"/>
+              </a:rPr>
+              <a:t>Serious</a:t>
+            </a:r>
+            <a:r>
+              <a:rPr sz="2100" i="0" b="0">
+                <a:solidFill>
+                  <a:srgbClr val="2B211C"/>
+                </a:solidFill>
+                <a:latin typeface="Calibri"/>
+              </a:rPr>
+              <a:t> ADRs to any drug (death, life-threatening, hospitalisation, disability, congenital anomaly).</a:t>
+            </a:r>
+          </a:p>
+        </p:txBody>
+      </p:sp>
+      <p:sp>
+        <p:nvSpPr>
+          <p:cNvPr id="13" name="Oval 12"/>
+          <p:cNvSpPr/>
+          <p:nvPr/>
+        </p:nvSpPr>
+        <p:spPr>
+          <a:xfrm>
+            <a:off x="548640" y="4686109"/>
+            <a:ext cx="402336" cy="402336"/>
+          </a:xfrm>
+          <a:prstGeom prst="ellipse">
+            <a:avLst/>
+          </a:prstGeom>
+          <a:solidFill>
+            <a:srgbClr val="E6EEEF"/>
+          </a:solidFill>
+          <a:ln>
+            <a:noFill/>
+          </a:ln>
+          <a:effectLst/>
+        </p:spPr>
+        <p:style>
+          <a:lnRef idx="1">
+            <a:schemeClr val="accent1"/>
+          </a:lnRef>
+          <a:fillRef idx="3">
+            <a:schemeClr val="accent1"/>
+          </a:fillRef>
+          <a:effectRef idx="2">
+            <a:schemeClr val="accent1"/>
+          </a:effectRef>
+          <a:fontRef idx="minor">
+            <a:schemeClr val="lt1"/>
+          </a:fontRef>
+        </p:style>
+        <p:txBody>
+          <a:bodyPr rtlCol="0" anchor="ctr" lIns="0" rIns="0" tIns="0" bIns="0"/>
+          <a:lstStyle/>
+          <a:p>
+            <a:pPr algn="ctr"/>
+            <a:r>
+              <a:rPr sz="1300" i="0" b="1">
+                <a:solidFill>
+                  <a:srgbClr val="2F6F7A"/>
+                </a:solidFill>
+                <a:latin typeface="Calibri"/>
+              </a:rPr>
+              <a:t>3</a:t>
+            </a:r>
+          </a:p>
+        </p:txBody>
+      </p:sp>
+      <p:sp>
+        <p:nvSpPr>
+          <p:cNvPr id="14" name="TextBox 13"/>
+          <p:cNvSpPr txBox="1"/>
+          <p:nvPr/>
+        </p:nvSpPr>
+        <p:spPr>
+          <a:xfrm>
+            <a:off x="1143000" y="4704397"/>
+            <a:ext cx="10500055" cy="706469"/>
+          </a:xfrm>
+          <a:prstGeom prst="rect">
+            <a:avLst/>
+          </a:prstGeom>
+          <a:noFill/>
+        </p:spPr>
+        <p:txBody>
+          <a:bodyPr wrap="square" anchor="t" lIns="0" rIns="0" tIns="0" bIns="0">
+            <a:spAutoFit/>
+          </a:bodyPr>
+          <a:lstStyle/>
+          <a:p>
+            <a:r>
+              <a:rPr sz="2100" i="0" b="0">
+                <a:solidFill>
+                  <a:srgbClr val="2B211C"/>
+                </a:solidFill>
+                <a:latin typeface="Calibri"/>
+              </a:rPr>
+              <a:t>Unexpected reactions, interactions, medication errors and lack of effect.</a:t>
+            </a:r>
+          </a:p>
+        </p:txBody>
+      </p:sp>
+      <p:sp>
+        <p:nvSpPr>
+          <p:cNvPr id="15" name="Oval 14"/>
+          <p:cNvSpPr/>
+          <p:nvPr/>
+        </p:nvSpPr>
+        <p:spPr>
+          <a:xfrm>
+            <a:off x="548640" y="5438298"/>
+            <a:ext cx="402336" cy="402336"/>
+          </a:xfrm>
+          <a:prstGeom prst="ellipse">
+            <a:avLst/>
+          </a:prstGeom>
+          <a:solidFill>
+            <a:srgbClr val="E6EEEF"/>
+          </a:solidFill>
+          <a:ln>
+            <a:noFill/>
+          </a:ln>
+          <a:effectLst/>
+        </p:spPr>
+        <p:style>
+          <a:lnRef idx="1">
+            <a:schemeClr val="accent1"/>
+          </a:lnRef>
+          <a:fillRef idx="3">
+            <a:schemeClr val="accent1"/>
+          </a:fillRef>
+          <a:effectRef idx="2">
+            <a:schemeClr val="accent1"/>
+          </a:effectRef>
+          <a:fontRef idx="minor">
+            <a:schemeClr val="lt1"/>
+          </a:fontRef>
+        </p:style>
+        <p:txBody>
+          <a:bodyPr rtlCol="0" anchor="ctr" lIns="0" rIns="0" tIns="0" bIns="0"/>
+          <a:lstStyle/>
+          <a:p>
+            <a:pPr algn="ctr"/>
+            <a:r>
+              <a:rPr sz="1300" i="0" b="1">
+                <a:solidFill>
+                  <a:srgbClr val="2F6F7A"/>
+                </a:solidFill>
+                <a:latin typeface="Calibri"/>
+              </a:rPr>
+              <a:t>4</a:t>
+            </a:r>
+          </a:p>
+        </p:txBody>
+      </p:sp>
+      <p:sp>
+        <p:nvSpPr>
+          <p:cNvPr id="16" name="TextBox 15"/>
+          <p:cNvSpPr txBox="1"/>
+          <p:nvPr/>
+        </p:nvSpPr>
+        <p:spPr>
+          <a:xfrm>
+            <a:off x="1143000" y="5456586"/>
+            <a:ext cx="10500055" cy="706469"/>
+          </a:xfrm>
+          <a:prstGeom prst="rect">
+            <a:avLst/>
+          </a:prstGeom>
+          <a:noFill/>
+        </p:spPr>
+        <p:txBody>
+          <a:bodyPr wrap="square" anchor="t" lIns="0" rIns="0" tIns="0" bIns="0">
+            <a:spAutoFit/>
+          </a:bodyPr>
+          <a:lstStyle/>
+          <a:p>
+            <a:r>
+              <a:rPr sz="2100" i="0" b="0">
+                <a:solidFill>
+                  <a:srgbClr val="2B211C"/>
+                </a:solidFill>
+                <a:latin typeface="Calibri"/>
+              </a:rPr>
+              <a:t>Suspected poor-quality or falsified products.</a:t>
+            </a:r>
+          </a:p>
+        </p:txBody>
+      </p:sp>
+    </p:spTree>
+  </p:cSld>
+  <p:clrMapOvr>
+    <a:masterClrMapping/>
+  </p:clrMapOvr>
+</p:sld>
+</file>
+
+<file path=ppt/slides/slide5.xml><?xml version="1.0" encoding="utf-8"?>
+<p:sld xmlns:a="http://schemas.openxmlformats.org/drawingml/2006/main" xmlns:p="http://schemas.openxmlformats.org/presentationml/2006/main" xmlns:r="http://schemas.openxmlformats.org/officeDocument/2006/relationships">
+  <p:cSld>
+    <p:bg>
+      <p:bgPr>
+        <a:solidFill>
+          <a:srgbClr val="FFFFFF"/>
+        </a:solidFill>
+        <a:effectLst/>
+      </p:bgPr>
+    </p:bg>
+    <p:spTree>
+      <p:nvGrpSpPr>
+        <p:cNvPr id="1" name=""/>
+        <p:cNvGrpSpPr/>
+        <p:nvPr/>
+      </p:nvGrpSpPr>
+      <p:grpSpPr/>
+      <p:sp>
+        <p:nvSpPr>
+          <p:cNvPr id="2" name="Oval 1"/>
+          <p:cNvSpPr/>
+          <p:nvPr/>
+        </p:nvSpPr>
+        <p:spPr>
+          <a:xfrm>
+            <a:off x="548640" y="475488"/>
+            <a:ext cx="658368" cy="658368"/>
+          </a:xfrm>
+          <a:prstGeom prst="ellipse">
+            <a:avLst/>
+          </a:prstGeom>
+          <a:solidFill>
+            <a:srgbClr val="2F6F7A"/>
+          </a:solidFill>
+          <a:ln>
+            <a:noFill/>
+          </a:ln>
+          <a:effectLst/>
+        </p:spPr>
+        <p:style>
+          <a:lnRef idx="1">
+            <a:schemeClr val="accent1"/>
+          </a:lnRef>
+          <a:fillRef idx="3">
+            <a:schemeClr val="accent1"/>
+          </a:fillRef>
+          <a:effectRef idx="2">
+            <a:schemeClr val="accent1"/>
+          </a:effectRef>
+          <a:fontRef idx="minor">
+            <a:schemeClr val="lt1"/>
+          </a:fontRef>
+        </p:style>
+        <p:txBody>
+          <a:bodyPr rtlCol="0" anchor="ctr" lIns="0" rIns="0" tIns="0" bIns="0"/>
+          <a:lstStyle/>
+          <a:p>
+            <a:pPr algn="ctr"/>
+            <a:r>
+              <a:rPr sz="1800" i="0" b="1">
+                <a:solidFill>
+                  <a:srgbClr val="FFFFFF"/>
+                </a:solidFill>
+                <a:latin typeface="Cambria"/>
+              </a:rPr>
+              <a:t>09</a:t>
+            </a:r>
+          </a:p>
+        </p:txBody>
+      </p:sp>
+      <p:sp>
+        <p:nvSpPr>
+          <p:cNvPr id="3" name="TextBox 2"/>
+          <p:cNvSpPr txBox="1"/>
+          <p:nvPr/>
+        </p:nvSpPr>
+        <p:spPr>
+          <a:xfrm>
+            <a:off x="1417319" y="438912"/>
+            <a:ext cx="10180015" cy="292608"/>
+          </a:xfrm>
+          <a:prstGeom prst="rect">
+            <a:avLst/>
+          </a:prstGeom>
+          <a:noFill/>
+        </p:spPr>
+        <p:txBody>
+          <a:bodyPr wrap="square" anchor="t" lIns="0" rIns="0" tIns="0" bIns="0">
+            <a:spAutoFit/>
+          </a:bodyPr>
+          <a:lstStyle/>
+          <a:p>
+            <a:r>
+              <a:rPr sz="1200" i="0" b="1" spc="150">
+                <a:solidFill>
+                  <a:srgbClr val="2F6F7A"/>
+                </a:solidFill>
+                <a:latin typeface="Calibri"/>
+              </a:rPr>
+              <a:t>SECTION 9</a:t>
+            </a:r>
+          </a:p>
+        </p:txBody>
+      </p:sp>
+      <p:sp>
+        <p:nvSpPr>
+          <p:cNvPr id="4" name="TextBox 3"/>
+          <p:cNvSpPr txBox="1"/>
+          <p:nvPr/>
+        </p:nvSpPr>
+        <p:spPr>
+          <a:xfrm>
+            <a:off x="1417319" y="676656"/>
+            <a:ext cx="10180015" cy="640080"/>
+          </a:xfrm>
+          <a:prstGeom prst="rect">
+            <a:avLst/>
+          </a:prstGeom>
+          <a:noFill/>
+        </p:spPr>
+        <p:txBody>
+          <a:bodyPr wrap="square" anchor="t" lIns="0" rIns="0" tIns="0" bIns="0">
+            <a:spAutoFit/>
+          </a:bodyPr>
+          <a:lstStyle/>
+          <a:p>
+            <a:r>
+              <a:rPr sz="3200" i="0" b="1">
+                <a:solidFill>
+                  <a:srgbClr val="2B211C"/>
+                </a:solidFill>
+                <a:latin typeface="Cambria"/>
+              </a:rPr>
+              <a:t>How to report</a:t>
+            </a:r>
+          </a:p>
+        </p:txBody>
+      </p:sp>
+      <p:sp>
+        <p:nvSpPr>
+          <p:cNvPr id="5" name="TextBox 4"/>
+          <p:cNvSpPr txBox="1"/>
+          <p:nvPr/>
+        </p:nvSpPr>
+        <p:spPr>
+          <a:xfrm>
+            <a:off x="548640" y="6419088"/>
+            <a:ext cx="8229600" cy="274320"/>
+          </a:xfrm>
+          <a:prstGeom prst="rect">
+            <a:avLst/>
+          </a:prstGeom>
+          <a:noFill/>
+        </p:spPr>
+        <p:txBody>
+          <a:bodyPr wrap="square" anchor="t" lIns="0" rIns="0" tIns="0" bIns="0">
+            <a:spAutoFit/>
+          </a:bodyPr>
+          <a:lstStyle/>
+          <a:p>
+            <a:r>
+              <a:rPr sz="1000" i="0" b="0">
+                <a:solidFill>
+                  <a:srgbClr val="6E625B"/>
+                </a:solidFill>
+                <a:latin typeface="Calibri"/>
+              </a:rPr>
+              <a:t>Drug Information  ·  Section 9  ·  Pharmacovigilance, ADR Reporting and Medication Errors</a:t>
+            </a:r>
+          </a:p>
+        </p:txBody>
+      </p:sp>
+      <p:sp>
+        <p:nvSpPr>
+          <p:cNvPr id="6" name="TextBox 5"/>
+          <p:cNvSpPr txBox="1"/>
+          <p:nvPr/>
+        </p:nvSpPr>
+        <p:spPr>
+          <a:xfrm>
+            <a:off x="10424160" y="6419088"/>
+            <a:ext cx="731520" cy="274320"/>
+          </a:xfrm>
+          <a:prstGeom prst="rect">
+            <a:avLst/>
+          </a:prstGeom>
+          <a:noFill/>
+        </p:spPr>
+        <p:txBody>
+          <a:bodyPr wrap="square" anchor="t" lIns="0" rIns="0" tIns="0" bIns="0">
+            <a:spAutoFit/>
+          </a:bodyPr>
+          <a:lstStyle/>
+          <a:p>
+            <a:pPr algn="r"/>
+            <a:r>
+              <a:rPr sz="1000" i="0" b="1">
+                <a:solidFill>
+                  <a:srgbClr val="6E625B"/>
+                </a:solidFill>
+                <a:latin typeface="Calibri"/>
+              </a:rPr>
+              <a:t>5</a:t>
+            </a:r>
+          </a:p>
+        </p:txBody>
+      </p:sp>
+      <p:pic>
+        <p:nvPicPr>
+          <p:cNvPr id="7" name="Picture 6" descr="faculty-of-pharmacy.png"/>
+          <p:cNvPicPr>
+            <a:picLocks noChangeAspect="1"/>
+          </p:cNvPicPr>
+          <p:nvPr/>
+        </p:nvPicPr>
+        <p:blipFill>
+          <a:blip r:embed="rId3"/>
+          <a:stretch>
+            <a:fillRect/>
+          </a:stretch>
+        </p:blipFill>
+        <p:spPr>
+          <a:xfrm>
+            <a:off x="11247120" y="6309360"/>
+            <a:ext cx="384048" cy="384048"/>
+          </a:xfrm>
+          <a:prstGeom prst="rect">
+            <a:avLst/>
+          </a:prstGeom>
+        </p:spPr>
+      </p:pic>
+      <p:sp>
+        <p:nvSpPr>
+          <p:cNvPr id="8" name="TextBox 7"/>
+          <p:cNvSpPr txBox="1"/>
+          <p:nvPr/>
+        </p:nvSpPr>
+        <p:spPr>
+          <a:xfrm>
+            <a:off x="548640" y="1554480"/>
+            <a:ext cx="11094415" cy="1202436"/>
+          </a:xfrm>
+          <a:prstGeom prst="rect">
+            <a:avLst/>
+          </a:prstGeom>
+          <a:noFill/>
+        </p:spPr>
+        <p:txBody>
+          <a:bodyPr wrap="square" anchor="t" lIns="0" rIns="0" tIns="0" bIns="0">
+            <a:spAutoFit/>
+          </a:bodyPr>
+          <a:lstStyle/>
+          <a:p>
+            <a:pPr>
+              <a:spcAft>
+                <a:spcPts val="800"/>
+              </a:spcAft>
+            </a:pPr>
+            <a:r>
+              <a:rPr sz="1800" i="0" b="0">
+                <a:solidFill>
+                  <a:srgbClr val="2B211C"/>
+                </a:solidFill>
+                <a:latin typeface="Calibri"/>
+              </a:rPr>
+              <a:t>You do </a:t>
+            </a:r>
+            <a:r>
+              <a:rPr sz="1800" i="0" b="1">
+                <a:solidFill>
+                  <a:srgbClr val="2B211C"/>
+                </a:solidFill>
+                <a:latin typeface="Calibri"/>
+              </a:rPr>
+              <a:t>not</a:t>
+            </a:r>
+            <a:r>
+              <a:rPr sz="1800" i="0" b="0">
+                <a:solidFill>
+                  <a:srgbClr val="2B211C"/>
+                </a:solidFill>
+                <a:latin typeface="Calibri"/>
+              </a:rPr>
+              <a:t> need to be sure the drug caused the reaction. </a:t>
+            </a:r>
+            <a:r>
+              <a:rPr sz="1800" i="0" b="1">
+                <a:solidFill>
+                  <a:srgbClr val="2B211C"/>
+                </a:solidFill>
+                <a:latin typeface="Calibri"/>
+              </a:rPr>
+              <a:t>If in doubt, report.</a:t>
+            </a:r>
+          </a:p>
+          <a:p>
+            <a:pPr>
+              <a:spcAft>
+                <a:spcPts val="800"/>
+              </a:spcAft>
+            </a:pPr>
+            <a:r>
+              <a:rPr sz="1800" i="0" b="0">
+                <a:solidFill>
+                  <a:srgbClr val="2B211C"/>
+                </a:solidFill>
+                <a:latin typeface="Calibri"/>
+              </a:rPr>
+              <a:t>Reports can be sent online through the EDA pharmacovigilance portal, or on the paper form. Serious reactions should be reported as soon as possible. Every report is confidential.</a:t>
+            </a:r>
+          </a:p>
+        </p:txBody>
+      </p:sp>
       <p:graphicFrame>
         <p:nvGraphicFramePr>
-          <p:cNvPr id="8" name="Table 7"/>
+          <p:cNvPr id="9" name="Table 8"/>
           <p:cNvGraphicFramePr>
             <a:graphicFrameLocks noGrp="1"/>
           </p:cNvGraphicFramePr>
           <p:nvPr/>
         </p:nvGraphicFramePr>
         <p:xfrm>
-          <a:off x="548640" y="1600200"/>
-          <a:ext cx="11094414" cy="4526280"/>
+          <a:off x="548640" y="2939796"/>
+          <a:ext cx="11094414" cy="3232404"/>
         </p:xfrm>
         <a:graphic>
           <a:graphicData uri="http://schemas.openxmlformats.org/drawingml/2006/table">
@@ -16616,14 +17837,14 @@
                 <a:gridCol w="3153149"/>
                 <a:gridCol w="7941265"/>
               </a:tblGrid>
-              <a:tr h="754380">
+              <a:tr h="538734">
                 <a:tc>
                   <a:txBody>
                     <a:bodyPr/>
                     <a:lstStyle/>
                     <a:p>
                       <a:r>
-                        <a:rPr sz="1700" i="0" b="1">
+                        <a:rPr sz="1300" i="0" b="1">
                           <a:solidFill>
                             <a:srgbClr val="FFFFFF"/>
                           </a:solidFill>
@@ -16645,7 +17866,7 @@
                     <a:lstStyle/>
                     <a:p>
                       <a:r>
-                        <a:rPr sz="1700" i="0" b="1">
+                        <a:rPr sz="1300" i="0" b="1">
                           <a:solidFill>
                             <a:srgbClr val="FFFFFF"/>
                           </a:solidFill>
@@ -16662,14 +17883,14 @@
                   </a:tcPr>
                 </a:tc>
               </a:tr>
-              <a:tr h="754380">
+              <a:tr h="538734">
                 <a:tc>
                   <a:txBody>
                     <a:bodyPr/>
                     <a:lstStyle/>
                     <a:p>
                       <a:r>
-                        <a:rPr sz="1800" i="0" b="1">
+                        <a:rPr sz="1400" i="0" b="1">
                           <a:solidFill>
                             <a:srgbClr val="2B211C"/>
                           </a:solidFill>
@@ -16691,7 +17912,7 @@
                     <a:lstStyle/>
                     <a:p>
                       <a:r>
-                        <a:rPr sz="1800" i="0" b="0">
+                        <a:rPr sz="1400" i="0" b="0">
                           <a:solidFill>
                             <a:srgbClr val="2B211C"/>
                           </a:solidFill>
@@ -16708,14 +17929,14 @@
                   </a:tcPr>
                 </a:tc>
               </a:tr>
-              <a:tr h="754380">
+              <a:tr h="538734">
                 <a:tc>
                   <a:txBody>
                     <a:bodyPr/>
                     <a:lstStyle/>
                     <a:p>
                       <a:r>
-                        <a:rPr sz="1800" i="0" b="1">
+                        <a:rPr sz="1400" i="0" b="1">
                           <a:solidFill>
                             <a:srgbClr val="2B211C"/>
                           </a:solidFill>
@@ -16727,7 +17948,7 @@
                   </a:txBody>
                   <a:tcPr marL="109728" marR="109728" marT="45720" marB="45720" anchor="ctr">
                     <a:solidFill>
-                      <a:srgbClr val="FBF3EE"/>
+                      <a:srgbClr val="FAF4F2"/>
                     </a:solidFill>
                   </a:tcPr>
                 </a:tc>
@@ -16737,7 +17958,7 @@
                     <a:lstStyle/>
                     <a:p>
                       <a:r>
-                        <a:rPr sz="1800" i="0" b="0">
+                        <a:rPr sz="1400" i="0" b="0">
                           <a:solidFill>
                             <a:srgbClr val="2B211C"/>
                           </a:solidFill>
@@ -16749,19 +17970,19 @@
                   </a:txBody>
                   <a:tcPr marL="109728" marR="109728" marT="45720" marB="45720" anchor="ctr">
                     <a:solidFill>
-                      <a:srgbClr val="FBF3EE"/>
+                      <a:srgbClr val="FAF4F2"/>
                     </a:solidFill>
                   </a:tcPr>
                 </a:tc>
               </a:tr>
-              <a:tr h="754380">
+              <a:tr h="538734">
                 <a:tc>
                   <a:txBody>
                     <a:bodyPr/>
                     <a:lstStyle/>
                     <a:p>
                       <a:r>
-                        <a:rPr sz="1800" i="0" b="1">
+                        <a:rPr sz="1400" i="0" b="1">
                           <a:solidFill>
                             <a:srgbClr val="2B211C"/>
                           </a:solidFill>
@@ -16783,7 +18004,7 @@
                     <a:lstStyle/>
                     <a:p>
                       <a:r>
-                        <a:rPr sz="1800" i="0" b="0">
+                        <a:rPr sz="1400" i="0" b="0">
                           <a:solidFill>
                             <a:srgbClr val="2B211C"/>
                           </a:solidFill>
@@ -16800,14 +18021,14 @@
                   </a:tcPr>
                 </a:tc>
               </a:tr>
-              <a:tr h="754380">
+              <a:tr h="538734">
                 <a:tc>
                   <a:txBody>
                     <a:bodyPr/>
                     <a:lstStyle/>
                     <a:p>
                       <a:r>
-                        <a:rPr sz="1800" i="0" b="1">
+                        <a:rPr sz="1400" i="0" b="1">
                           <a:solidFill>
                             <a:srgbClr val="2B211C"/>
                           </a:solidFill>
@@ -16819,7 +18040,7 @@
                   </a:txBody>
                   <a:tcPr marL="109728" marR="109728" marT="45720" marB="45720" anchor="ctr">
                     <a:solidFill>
-                      <a:srgbClr val="FBF3EE"/>
+                      <a:srgbClr val="FAF4F2"/>
                     </a:solidFill>
                   </a:tcPr>
                 </a:tc>
@@ -16829,7 +18050,7 @@
                     <a:lstStyle/>
                     <a:p>
                       <a:r>
-                        <a:rPr sz="1800" i="0" b="0">
+                        <a:rPr sz="1400" i="0" b="0">
                           <a:solidFill>
                             <a:srgbClr val="2B211C"/>
                           </a:solidFill>
@@ -16841,19 +18062,19 @@
                   </a:txBody>
                   <a:tcPr marL="109728" marR="109728" marT="45720" marB="45720" anchor="ctr">
                     <a:solidFill>
-                      <a:srgbClr val="FBF3EE"/>
+                      <a:srgbClr val="FAF4F2"/>
                     </a:solidFill>
                   </a:tcPr>
                 </a:tc>
               </a:tr>
-              <a:tr h="754380">
+              <a:tr h="538734">
                 <a:tc>
                   <a:txBody>
                     <a:bodyPr/>
                     <a:lstStyle/>
                     <a:p>
                       <a:r>
-                        <a:rPr sz="1800" i="0" b="1">
+                        <a:rPr sz="1400" i="0" b="1">
                           <a:solidFill>
                             <a:srgbClr val="2B211C"/>
                           </a:solidFill>
@@ -16875,7 +18096,7 @@
                     <a:lstStyle/>
                     <a:p>
                       <a:r>
-                        <a:rPr sz="1800" i="0" b="0">
+                        <a:rPr sz="1400" i="0" b="0">
                           <a:solidFill>
                             <a:srgbClr val="2B211C"/>
                           </a:solidFill>
@@ -16904,612 +18125,6 @@
 </p:sld>
 </file>
 
-<file path=ppt/slides/slide5.xml><?xml version="1.0" encoding="utf-8"?>
-<p:sld xmlns:a="http://schemas.openxmlformats.org/drawingml/2006/main" xmlns:p="http://schemas.openxmlformats.org/presentationml/2006/main" xmlns:r="http://schemas.openxmlformats.org/officeDocument/2006/relationships">
-  <p:cSld>
-    <p:bg>
-      <p:bgPr>
-        <a:solidFill>
-          <a:srgbClr val="FFFFFF"/>
-        </a:solidFill>
-        <a:effectLst/>
-      </p:bgPr>
-    </p:bg>
-    <p:spTree>
-      <p:nvGrpSpPr>
-        <p:cNvPr id="1" name=""/>
-        <p:cNvGrpSpPr/>
-        <p:nvPr/>
-      </p:nvGrpSpPr>
-      <p:grpSpPr/>
-      <p:sp>
-        <p:nvSpPr>
-          <p:cNvPr id="2" name="Oval 1"/>
-          <p:cNvSpPr/>
-          <p:nvPr/>
-        </p:nvSpPr>
-        <p:spPr>
-          <a:xfrm>
-            <a:off x="548640" y="475488"/>
-            <a:ext cx="658368" cy="658368"/>
-          </a:xfrm>
-          <a:prstGeom prst="ellipse">
-            <a:avLst/>
-          </a:prstGeom>
-          <a:solidFill>
-            <a:srgbClr val="2F6F7A"/>
-          </a:solidFill>
-          <a:ln>
-            <a:noFill/>
-          </a:ln>
-          <a:effectLst/>
-        </p:spPr>
-        <p:style>
-          <a:lnRef idx="1">
-            <a:schemeClr val="accent1"/>
-          </a:lnRef>
-          <a:fillRef idx="3">
-            <a:schemeClr val="accent1"/>
-          </a:fillRef>
-          <a:effectRef idx="2">
-            <a:schemeClr val="accent1"/>
-          </a:effectRef>
-          <a:fontRef idx="minor">
-            <a:schemeClr val="lt1"/>
-          </a:fontRef>
-        </p:style>
-        <p:txBody>
-          <a:bodyPr rtlCol="0" anchor="ctr" lIns="0" rIns="0"/>
-          <a:lstStyle/>
-          <a:p>
-            <a:pPr algn="ctr"/>
-            <a:r>
-              <a:rPr sz="1800" i="0" b="1">
-                <a:solidFill>
-                  <a:srgbClr val="FFFFFF"/>
-                </a:solidFill>
-                <a:latin typeface="Cambria"/>
-              </a:rPr>
-              <a:t>09</a:t>
-            </a:r>
-          </a:p>
-        </p:txBody>
-      </p:sp>
-      <p:sp>
-        <p:nvSpPr>
-          <p:cNvPr id="3" name="TextBox 2"/>
-          <p:cNvSpPr txBox="1"/>
-          <p:nvPr/>
-        </p:nvSpPr>
-        <p:spPr>
-          <a:xfrm>
-            <a:off x="1417319" y="438912"/>
-            <a:ext cx="10180015" cy="292608"/>
-          </a:xfrm>
-          <a:prstGeom prst="rect">
-            <a:avLst/>
-          </a:prstGeom>
-          <a:noFill/>
-        </p:spPr>
-        <p:txBody>
-          <a:bodyPr wrap="square" anchor="t" lIns="0" rIns="0" tIns="0" bIns="0">
-            <a:spAutoFit/>
-          </a:bodyPr>
-          <a:lstStyle/>
-          <a:p>
-            <a:r>
-              <a:rPr sz="1200" i="0" b="1" spc="150">
-                <a:solidFill>
-                  <a:srgbClr val="2F6F7A"/>
-                </a:solidFill>
-                <a:latin typeface="Calibri"/>
-              </a:rPr>
-              <a:t>SECTION 9</a:t>
-            </a:r>
-          </a:p>
-        </p:txBody>
-      </p:sp>
-      <p:sp>
-        <p:nvSpPr>
-          <p:cNvPr id="4" name="TextBox 3"/>
-          <p:cNvSpPr txBox="1"/>
-          <p:nvPr/>
-        </p:nvSpPr>
-        <p:spPr>
-          <a:xfrm>
-            <a:off x="1417319" y="676656"/>
-            <a:ext cx="10180015" cy="640080"/>
-          </a:xfrm>
-          <a:prstGeom prst="rect">
-            <a:avLst/>
-          </a:prstGeom>
-          <a:noFill/>
-        </p:spPr>
-        <p:txBody>
-          <a:bodyPr wrap="square" anchor="t" lIns="0" rIns="0" tIns="0" bIns="0">
-            <a:spAutoFit/>
-          </a:bodyPr>
-          <a:lstStyle/>
-          <a:p>
-            <a:r>
-              <a:rPr sz="3200" i="0" b="1">
-                <a:solidFill>
-                  <a:srgbClr val="2B211C"/>
-                </a:solidFill>
-                <a:latin typeface="Cambria"/>
-              </a:rPr>
-              <a:t>What to report</a:t>
-            </a:r>
-          </a:p>
-        </p:txBody>
-      </p:sp>
-      <p:sp>
-        <p:nvSpPr>
-          <p:cNvPr id="5" name="TextBox 4"/>
-          <p:cNvSpPr txBox="1"/>
-          <p:nvPr/>
-        </p:nvSpPr>
-        <p:spPr>
-          <a:xfrm>
-            <a:off x="548640" y="6419088"/>
-            <a:ext cx="8229600" cy="274320"/>
-          </a:xfrm>
-          <a:prstGeom prst="rect">
-            <a:avLst/>
-          </a:prstGeom>
-          <a:noFill/>
-        </p:spPr>
-        <p:txBody>
-          <a:bodyPr wrap="square" anchor="t" lIns="0" rIns="0" tIns="0" bIns="0">
-            <a:spAutoFit/>
-          </a:bodyPr>
-          <a:lstStyle/>
-          <a:p>
-            <a:r>
-              <a:rPr sz="1000" i="0" b="0">
-                <a:solidFill>
-                  <a:srgbClr val="6E625B"/>
-                </a:solidFill>
-                <a:latin typeface="Calibri"/>
-              </a:rPr>
-              <a:t>Drug Information  ·  Section 9  ·  Pharmacovigilance, ADR Reporting and Medication Errors</a:t>
-            </a:r>
-          </a:p>
-        </p:txBody>
-      </p:sp>
-      <p:sp>
-        <p:nvSpPr>
-          <p:cNvPr id="6" name="TextBox 5"/>
-          <p:cNvSpPr txBox="1"/>
-          <p:nvPr/>
-        </p:nvSpPr>
-        <p:spPr>
-          <a:xfrm>
-            <a:off x="10424160" y="6419088"/>
-            <a:ext cx="731520" cy="274320"/>
-          </a:xfrm>
-          <a:prstGeom prst="rect">
-            <a:avLst/>
-          </a:prstGeom>
-          <a:noFill/>
-        </p:spPr>
-        <p:txBody>
-          <a:bodyPr wrap="square" anchor="t" lIns="0" rIns="0" tIns="0" bIns="0">
-            <a:spAutoFit/>
-          </a:bodyPr>
-          <a:lstStyle/>
-          <a:p>
-            <a:pPr algn="r"/>
-            <a:r>
-              <a:rPr sz="1000" i="0" b="1">
-                <a:solidFill>
-                  <a:srgbClr val="6E625B"/>
-                </a:solidFill>
-                <a:latin typeface="Calibri"/>
-              </a:rPr>
-              <a:t>5</a:t>
-            </a:r>
-          </a:p>
-        </p:txBody>
-      </p:sp>
-      <p:pic>
-        <p:nvPicPr>
-          <p:cNvPr id="7" name="Picture 6" descr="faculty-of-pharmacy.png"/>
-          <p:cNvPicPr>
-            <a:picLocks noChangeAspect="1"/>
-          </p:cNvPicPr>
-          <p:nvPr/>
-        </p:nvPicPr>
-        <p:blipFill>
-          <a:blip r:embed="rId3"/>
-          <a:stretch>
-            <a:fillRect/>
-          </a:stretch>
-        </p:blipFill>
-        <p:spPr>
-          <a:xfrm>
-            <a:off x="11247120" y="6309360"/>
-            <a:ext cx="384048" cy="384048"/>
-          </a:xfrm>
-          <a:prstGeom prst="rect">
-            <a:avLst/>
-          </a:prstGeom>
-        </p:spPr>
-      </p:pic>
-      <p:sp>
-        <p:nvSpPr>
-          <p:cNvPr id="8" name="Oval 7"/>
-          <p:cNvSpPr/>
-          <p:nvPr/>
-        </p:nvSpPr>
-        <p:spPr>
-          <a:xfrm>
-            <a:off x="548640" y="1618488"/>
-            <a:ext cx="402336" cy="402336"/>
-          </a:xfrm>
-          <a:prstGeom prst="ellipse">
-            <a:avLst/>
-          </a:prstGeom>
-          <a:solidFill>
-            <a:srgbClr val="E0EEF0"/>
-          </a:solidFill>
-          <a:ln>
-            <a:noFill/>
-          </a:ln>
-          <a:effectLst/>
-        </p:spPr>
-        <p:style>
-          <a:lnRef idx="1">
-            <a:schemeClr val="accent1"/>
-          </a:lnRef>
-          <a:fillRef idx="3">
-            <a:schemeClr val="accent1"/>
-          </a:fillRef>
-          <a:effectRef idx="2">
-            <a:schemeClr val="accent1"/>
-          </a:effectRef>
-          <a:fontRef idx="minor">
-            <a:schemeClr val="lt1"/>
-          </a:fontRef>
-        </p:style>
-        <p:txBody>
-          <a:bodyPr rtlCol="0" anchor="ctr" lIns="0" rIns="0"/>
-          <a:lstStyle/>
-          <a:p>
-            <a:pPr algn="ctr"/>
-            <a:r>
-              <a:rPr sz="1300" i="0" b="1">
-                <a:solidFill>
-                  <a:srgbClr val="2F6F7A"/>
-                </a:solidFill>
-                <a:latin typeface="Calibri"/>
-              </a:rPr>
-              <a:t>1</a:t>
-            </a:r>
-          </a:p>
-        </p:txBody>
-      </p:sp>
-      <p:sp>
-        <p:nvSpPr>
-          <p:cNvPr id="9" name="TextBox 8"/>
-          <p:cNvSpPr txBox="1"/>
-          <p:nvPr/>
-        </p:nvSpPr>
-        <p:spPr>
-          <a:xfrm>
-            <a:off x="1143000" y="1636776"/>
-            <a:ext cx="10500055" cy="808863"/>
-          </a:xfrm>
-          <a:prstGeom prst="rect">
-            <a:avLst/>
-          </a:prstGeom>
-          <a:noFill/>
-        </p:spPr>
-        <p:txBody>
-          <a:bodyPr wrap="square" anchor="t" lIns="0" rIns="0" tIns="0" bIns="0">
-            <a:spAutoFit/>
-          </a:bodyPr>
-          <a:lstStyle/>
-          <a:p>
-            <a:r>
-              <a:rPr sz="2100" i="0" b="1">
-                <a:solidFill>
-                  <a:srgbClr val="2B211C"/>
-                </a:solidFill>
-                <a:latin typeface="Calibri"/>
-              </a:rPr>
-              <a:t>All suspected</a:t>
-            </a:r>
-            <a:r>
-              <a:rPr sz="2100" i="0" b="0">
-                <a:solidFill>
-                  <a:srgbClr val="2B211C"/>
-                </a:solidFill>
-                <a:latin typeface="Calibri"/>
-              </a:rPr>
-              <a:t> ADRs to new drugs.</a:t>
-            </a:r>
-          </a:p>
-        </p:txBody>
-      </p:sp>
-      <p:sp>
-        <p:nvSpPr>
-          <p:cNvPr id="10" name="Oval 9"/>
-          <p:cNvSpPr/>
-          <p:nvPr/>
-        </p:nvSpPr>
-        <p:spPr>
-          <a:xfrm>
-            <a:off x="548640" y="2473071"/>
-            <a:ext cx="402336" cy="402336"/>
-          </a:xfrm>
-          <a:prstGeom prst="ellipse">
-            <a:avLst/>
-          </a:prstGeom>
-          <a:solidFill>
-            <a:srgbClr val="E0EEF0"/>
-          </a:solidFill>
-          <a:ln>
-            <a:noFill/>
-          </a:ln>
-          <a:effectLst/>
-        </p:spPr>
-        <p:style>
-          <a:lnRef idx="1">
-            <a:schemeClr val="accent1"/>
-          </a:lnRef>
-          <a:fillRef idx="3">
-            <a:schemeClr val="accent1"/>
-          </a:fillRef>
-          <a:effectRef idx="2">
-            <a:schemeClr val="accent1"/>
-          </a:effectRef>
-          <a:fontRef idx="minor">
-            <a:schemeClr val="lt1"/>
-          </a:fontRef>
-        </p:style>
-        <p:txBody>
-          <a:bodyPr rtlCol="0" anchor="ctr" lIns="0" rIns="0"/>
-          <a:lstStyle/>
-          <a:p>
-            <a:pPr algn="ctr"/>
-            <a:r>
-              <a:rPr sz="1300" i="0" b="1">
-                <a:solidFill>
-                  <a:srgbClr val="2F6F7A"/>
-                </a:solidFill>
-                <a:latin typeface="Calibri"/>
-              </a:rPr>
-              <a:t>2</a:t>
-            </a:r>
-          </a:p>
-        </p:txBody>
-      </p:sp>
-      <p:sp>
-        <p:nvSpPr>
-          <p:cNvPr id="11" name="TextBox 10"/>
-          <p:cNvSpPr txBox="1"/>
-          <p:nvPr/>
-        </p:nvSpPr>
-        <p:spPr>
-          <a:xfrm>
-            <a:off x="1143000" y="2491359"/>
-            <a:ext cx="10500055" cy="1142237"/>
-          </a:xfrm>
-          <a:prstGeom prst="rect">
-            <a:avLst/>
-          </a:prstGeom>
-          <a:noFill/>
-        </p:spPr>
-        <p:txBody>
-          <a:bodyPr wrap="square" anchor="t" lIns="0" rIns="0" tIns="0" bIns="0">
-            <a:spAutoFit/>
-          </a:bodyPr>
-          <a:lstStyle/>
-          <a:p>
-            <a:r>
-              <a:rPr sz="2100" i="0" b="1">
-                <a:solidFill>
-                  <a:srgbClr val="2B211C"/>
-                </a:solidFill>
-                <a:latin typeface="Calibri"/>
-              </a:rPr>
-              <a:t>Serious</a:t>
-            </a:r>
-            <a:r>
-              <a:rPr sz="2100" i="0" b="0">
-                <a:solidFill>
-                  <a:srgbClr val="2B211C"/>
-                </a:solidFill>
-                <a:latin typeface="Calibri"/>
-              </a:rPr>
-              <a:t> ADRs to any drug (death, life-threatening, hospitalisation, disability, congenital anomaly).</a:t>
-            </a:r>
-          </a:p>
-        </p:txBody>
-      </p:sp>
-      <p:sp>
-        <p:nvSpPr>
-          <p:cNvPr id="12" name="Oval 11"/>
-          <p:cNvSpPr/>
-          <p:nvPr/>
-        </p:nvSpPr>
-        <p:spPr>
-          <a:xfrm>
-            <a:off x="548640" y="3661028"/>
-            <a:ext cx="402336" cy="402336"/>
-          </a:xfrm>
-          <a:prstGeom prst="ellipse">
-            <a:avLst/>
-          </a:prstGeom>
-          <a:solidFill>
-            <a:srgbClr val="E0EEF0"/>
-          </a:solidFill>
-          <a:ln>
-            <a:noFill/>
-          </a:ln>
-          <a:effectLst/>
-        </p:spPr>
-        <p:style>
-          <a:lnRef idx="1">
-            <a:schemeClr val="accent1"/>
-          </a:lnRef>
-          <a:fillRef idx="3">
-            <a:schemeClr val="accent1"/>
-          </a:fillRef>
-          <a:effectRef idx="2">
-            <a:schemeClr val="accent1"/>
-          </a:effectRef>
-          <a:fontRef idx="minor">
-            <a:schemeClr val="lt1"/>
-          </a:fontRef>
-        </p:style>
-        <p:txBody>
-          <a:bodyPr rtlCol="0" anchor="ctr" lIns="0" rIns="0"/>
-          <a:lstStyle/>
-          <a:p>
-            <a:pPr algn="ctr"/>
-            <a:r>
-              <a:rPr sz="1300" i="0" b="1">
-                <a:solidFill>
-                  <a:srgbClr val="2F6F7A"/>
-                </a:solidFill>
-                <a:latin typeface="Calibri"/>
-              </a:rPr>
-              <a:t>3</a:t>
-            </a:r>
-          </a:p>
-        </p:txBody>
-      </p:sp>
-      <p:sp>
-        <p:nvSpPr>
-          <p:cNvPr id="13" name="TextBox 12"/>
-          <p:cNvSpPr txBox="1"/>
-          <p:nvPr/>
-        </p:nvSpPr>
-        <p:spPr>
-          <a:xfrm>
-            <a:off x="1143000" y="3679316"/>
-            <a:ext cx="10500055" cy="808863"/>
-          </a:xfrm>
-          <a:prstGeom prst="rect">
-            <a:avLst/>
-          </a:prstGeom>
-          <a:noFill/>
-        </p:spPr>
-        <p:txBody>
-          <a:bodyPr wrap="square" anchor="t" lIns="0" rIns="0" tIns="0" bIns="0">
-            <a:spAutoFit/>
-          </a:bodyPr>
-          <a:lstStyle/>
-          <a:p>
-            <a:r>
-              <a:rPr sz="2100" i="0" b="0">
-                <a:solidFill>
-                  <a:srgbClr val="2B211C"/>
-                </a:solidFill>
-                <a:latin typeface="Calibri"/>
-              </a:rPr>
-              <a:t>Unexpected reactions, interactions, medication errors and lack of effect.</a:t>
-            </a:r>
-          </a:p>
-        </p:txBody>
-      </p:sp>
-      <p:sp>
-        <p:nvSpPr>
-          <p:cNvPr id="14" name="Oval 13"/>
-          <p:cNvSpPr/>
-          <p:nvPr/>
-        </p:nvSpPr>
-        <p:spPr>
-          <a:xfrm>
-            <a:off x="548640" y="4515611"/>
-            <a:ext cx="402336" cy="402336"/>
-          </a:xfrm>
-          <a:prstGeom prst="ellipse">
-            <a:avLst/>
-          </a:prstGeom>
-          <a:solidFill>
-            <a:srgbClr val="E0EEF0"/>
-          </a:solidFill>
-          <a:ln>
-            <a:noFill/>
-          </a:ln>
-          <a:effectLst/>
-        </p:spPr>
-        <p:style>
-          <a:lnRef idx="1">
-            <a:schemeClr val="accent1"/>
-          </a:lnRef>
-          <a:fillRef idx="3">
-            <a:schemeClr val="accent1"/>
-          </a:fillRef>
-          <a:effectRef idx="2">
-            <a:schemeClr val="accent1"/>
-          </a:effectRef>
-          <a:fontRef idx="minor">
-            <a:schemeClr val="lt1"/>
-          </a:fontRef>
-        </p:style>
-        <p:txBody>
-          <a:bodyPr rtlCol="0" anchor="ctr" lIns="0" rIns="0"/>
-          <a:lstStyle/>
-          <a:p>
-            <a:pPr algn="ctr"/>
-            <a:r>
-              <a:rPr sz="1300" i="0" b="1">
-                <a:solidFill>
-                  <a:srgbClr val="2F6F7A"/>
-                </a:solidFill>
-                <a:latin typeface="Calibri"/>
-              </a:rPr>
-              <a:t>4</a:t>
-            </a:r>
-          </a:p>
-        </p:txBody>
-      </p:sp>
-      <p:sp>
-        <p:nvSpPr>
-          <p:cNvPr id="15" name="TextBox 14"/>
-          <p:cNvSpPr txBox="1"/>
-          <p:nvPr/>
-        </p:nvSpPr>
-        <p:spPr>
-          <a:xfrm>
-            <a:off x="1143000" y="4533900"/>
-            <a:ext cx="10500055" cy="808863"/>
-          </a:xfrm>
-          <a:prstGeom prst="rect">
-            <a:avLst/>
-          </a:prstGeom>
-          <a:noFill/>
-        </p:spPr>
-        <p:txBody>
-          <a:bodyPr wrap="square" anchor="t" lIns="0" rIns="0" tIns="0" bIns="0">
-            <a:spAutoFit/>
-          </a:bodyPr>
-          <a:lstStyle/>
-          <a:p>
-            <a:r>
-              <a:rPr sz="2100" i="0" b="0">
-                <a:solidFill>
-                  <a:srgbClr val="2B211C"/>
-                </a:solidFill>
-                <a:latin typeface="Calibri"/>
-              </a:rPr>
-              <a:t>Suspected poor-quality or falsified products.</a:t>
-            </a:r>
-          </a:p>
-        </p:txBody>
-      </p:sp>
-    </p:spTree>
-  </p:cSld>
-  <p:clrMapOvr>
-    <a:masterClrMapping/>
-  </p:clrMapOvr>
-</p:sld>
-</file>
-
 <file path=ppt/slides/slide6.xml><?xml version="1.0" encoding="utf-8"?>
 <p:sld xmlns:a="http://schemas.openxmlformats.org/drawingml/2006/main" xmlns:p="http://schemas.openxmlformats.org/presentationml/2006/main" xmlns:r="http://schemas.openxmlformats.org/officeDocument/2006/relationships">
   <p:cSld>
@@ -17594,11 +18209,10 @@
           </a:bodyPr>
           <a:lstStyle/>
           <a:p>
-            <a:pPr algn="l"/>
             <a:r>
               <a:rPr sz="13000" i="0" b="1">
                 <a:solidFill>
-                  <a:srgbClr val="E0EEF0"/>
+                  <a:srgbClr val="E6EEEF"/>
                 </a:solidFill>
                 <a:latin typeface="Cambria"/>
               </a:rPr>
@@ -17643,7 +18257,7 @@
             <a:r>
               <a:rPr sz="1400" i="0" b="1" spc="150">
                 <a:solidFill>
-                  <a:srgbClr val="E0EEF0"/>
+                  <a:srgbClr val="E6EEEF"/>
                 </a:solidFill>
                 <a:latin typeface="Calibri"/>
               </a:rPr>
@@ -17695,7 +18309,7 @@
         <p:spPr>
           <a:xfrm>
             <a:off x="4526280" y="6419088"/>
-            <a:ext cx="5486400" cy="274320"/>
+            <a:ext cx="8229600" cy="274320"/>
           </a:xfrm>
           <a:prstGeom prst="rect">
             <a:avLst/>
@@ -17842,7 +18456,7 @@
           </a:fontRef>
         </p:style>
         <p:txBody>
-          <a:bodyPr rtlCol="0" anchor="ctr" lIns="0" rIns="0"/>
+          <a:bodyPr rtlCol="0" anchor="ctr" lIns="0" rIns="0" tIns="0" bIns="0"/>
           <a:lstStyle/>
           <a:p>
             <a:pPr algn="ctr"/>
@@ -18021,20 +18635,77 @@
       </p:pic>
       <p:sp>
         <p:nvSpPr>
-          <p:cNvPr id="8" name="Oval 7"/>
+          <p:cNvPr id="8" name="TextBox 7"/>
+          <p:cNvSpPr txBox="1"/>
+          <p:nvPr/>
+        </p:nvSpPr>
+        <p:spPr>
+          <a:xfrm>
+            <a:off x="548640" y="1554480"/>
+            <a:ext cx="11094415" cy="498348"/>
+          </a:xfrm>
+          <a:prstGeom prst="rect">
+            <a:avLst/>
+          </a:prstGeom>
+          <a:noFill/>
+        </p:spPr>
+        <p:txBody>
+          <a:bodyPr wrap="square" anchor="t" lIns="0" rIns="0" tIns="0" bIns="0">
+            <a:spAutoFit/>
+          </a:bodyPr>
+          <a:lstStyle/>
+          <a:p>
+            <a:pPr>
+              <a:spcAft>
+                <a:spcPts val="800"/>
+              </a:spcAft>
+            </a:pPr>
+            <a:r>
+              <a:rPr sz="1800" i="0" b="0">
+                <a:solidFill>
+                  <a:srgbClr val="2B211C"/>
+                </a:solidFill>
+                <a:latin typeface="Calibri"/>
+              </a:rPr>
+              <a:t>The </a:t>
+            </a:r>
+            <a:r>
+              <a:rPr sz="1800" i="0" b="1">
+                <a:solidFill>
+                  <a:srgbClr val="2B211C"/>
+                </a:solidFill>
+                <a:latin typeface="Calibri"/>
+              </a:rPr>
+              <a:t>Drug and Therapeutics Committee (DTC)</a:t>
+            </a:r>
+            <a:r>
+              <a:rPr sz="1800" i="0" b="0">
+                <a:solidFill>
+                  <a:srgbClr val="2B211C"/>
+                </a:solidFill>
+                <a:latin typeface="Calibri"/>
+              </a:rPr>
+              <a:t> of a hospital runs local drug-safety work:</a:t>
+            </a:r>
+          </a:p>
+        </p:txBody>
+      </p:sp>
+      <p:sp>
+        <p:nvSpPr>
+          <p:cNvPr id="9" name="Oval 8"/>
           <p:cNvSpPr/>
           <p:nvPr/>
         </p:nvSpPr>
         <p:spPr>
           <a:xfrm>
-            <a:off x="548640" y="1618488"/>
+            <a:off x="548640" y="2253996"/>
             <a:ext cx="402336" cy="402336"/>
           </a:xfrm>
           <a:prstGeom prst="ellipse">
             <a:avLst/>
           </a:prstGeom>
           <a:solidFill>
-            <a:srgbClr val="E0EEF0"/>
+            <a:srgbClr val="E6EEEF"/>
           </a:solidFill>
           <a:ln>
             <a:noFill/>
@@ -18056,7 +18727,7 @@
           </a:fontRef>
         </p:style>
         <p:txBody>
-          <a:bodyPr rtlCol="0" anchor="ctr" lIns="0" rIns="0"/>
+          <a:bodyPr rtlCol="0" anchor="ctr" lIns="0" rIns="0" tIns="0" bIns="0"/>
           <a:lstStyle/>
           <a:p>
             <a:pPr algn="ctr"/>
@@ -18074,14 +18745,14 @@
       </p:sp>
       <p:sp>
         <p:nvSpPr>
-          <p:cNvPr id="9" name="TextBox 8"/>
+          <p:cNvPr id="10" name="TextBox 9"/>
           <p:cNvSpPr txBox="1"/>
           <p:nvPr/>
         </p:nvSpPr>
         <p:spPr>
           <a:xfrm>
-            <a:off x="1143000" y="1636776"/>
-            <a:ext cx="10500055" cy="792861"/>
+            <a:off x="1143000" y="2272284"/>
+            <a:ext cx="10500055" cy="674903"/>
           </a:xfrm>
           <a:prstGeom prst="rect">
             <a:avLst/>
@@ -18108,20 +18779,20 @@
       </p:sp>
       <p:sp>
         <p:nvSpPr>
-          <p:cNvPr id="10" name="Oval 9"/>
+          <p:cNvPr id="11" name="Oval 10"/>
           <p:cNvSpPr/>
           <p:nvPr/>
         </p:nvSpPr>
         <p:spPr>
           <a:xfrm>
-            <a:off x="548640" y="2457069"/>
+            <a:off x="548640" y="2974619"/>
             <a:ext cx="402336" cy="402336"/>
           </a:xfrm>
           <a:prstGeom prst="ellipse">
             <a:avLst/>
           </a:prstGeom>
           <a:solidFill>
-            <a:srgbClr val="E0EEF0"/>
+            <a:srgbClr val="E6EEEF"/>
           </a:solidFill>
           <a:ln>
             <a:noFill/>
@@ -18143,7 +18814,7 @@
           </a:fontRef>
         </p:style>
         <p:txBody>
-          <a:bodyPr rtlCol="0" anchor="ctr" lIns="0" rIns="0"/>
+          <a:bodyPr rtlCol="0" anchor="ctr" lIns="0" rIns="0" tIns="0" bIns="0"/>
           <a:lstStyle/>
           <a:p>
             <a:pPr algn="ctr"/>
@@ -18161,14 +18832,14 @@
       </p:sp>
       <p:sp>
         <p:nvSpPr>
-          <p:cNvPr id="11" name="TextBox 10"/>
+          <p:cNvPr id="12" name="TextBox 11"/>
           <p:cNvSpPr txBox="1"/>
           <p:nvPr/>
         </p:nvSpPr>
         <p:spPr>
           <a:xfrm>
-            <a:off x="1143000" y="2475357"/>
-            <a:ext cx="10500055" cy="792861"/>
+            <a:off x="1143000" y="2992907"/>
+            <a:ext cx="10500055" cy="674903"/>
           </a:xfrm>
           <a:prstGeom prst="rect">
             <a:avLst/>
@@ -18195,20 +18866,20 @@
       </p:sp>
       <p:sp>
         <p:nvSpPr>
-          <p:cNvPr id="12" name="Oval 11"/>
+          <p:cNvPr id="13" name="Oval 12"/>
           <p:cNvSpPr/>
           <p:nvPr/>
         </p:nvSpPr>
         <p:spPr>
           <a:xfrm>
-            <a:off x="548640" y="3295650"/>
+            <a:off x="548640" y="3695242"/>
             <a:ext cx="402336" cy="402336"/>
           </a:xfrm>
           <a:prstGeom prst="ellipse">
             <a:avLst/>
           </a:prstGeom>
           <a:solidFill>
-            <a:srgbClr val="E0EEF0"/>
+            <a:srgbClr val="E6EEEF"/>
           </a:solidFill>
           <a:ln>
             <a:noFill/>
@@ -18230,7 +18901,7 @@
           </a:fontRef>
         </p:style>
         <p:txBody>
-          <a:bodyPr rtlCol="0" anchor="ctr" lIns="0" rIns="0"/>
+          <a:bodyPr rtlCol="0" anchor="ctr" lIns="0" rIns="0" tIns="0" bIns="0"/>
           <a:lstStyle/>
           <a:p>
             <a:pPr algn="ctr"/>
@@ -18248,14 +18919,14 @@
       </p:sp>
       <p:sp>
         <p:nvSpPr>
-          <p:cNvPr id="13" name="TextBox 12"/>
+          <p:cNvPr id="14" name="TextBox 13"/>
           <p:cNvSpPr txBox="1"/>
           <p:nvPr/>
         </p:nvSpPr>
         <p:spPr>
           <a:xfrm>
-            <a:off x="1143000" y="3313938"/>
-            <a:ext cx="10500055" cy="792861"/>
+            <a:off x="1143000" y="3713530"/>
+            <a:ext cx="10500055" cy="674903"/>
           </a:xfrm>
           <a:prstGeom prst="rect">
             <a:avLst/>
@@ -18282,20 +18953,20 @@
       </p:sp>
       <p:sp>
         <p:nvSpPr>
-          <p:cNvPr id="14" name="Oval 13"/>
+          <p:cNvPr id="15" name="Oval 14"/>
           <p:cNvSpPr/>
           <p:nvPr/>
         </p:nvSpPr>
         <p:spPr>
           <a:xfrm>
-            <a:off x="548640" y="4134230"/>
+            <a:off x="548640" y="4415866"/>
             <a:ext cx="402336" cy="402336"/>
           </a:xfrm>
           <a:prstGeom prst="ellipse">
             <a:avLst/>
           </a:prstGeom>
           <a:solidFill>
-            <a:srgbClr val="E0EEF0"/>
+            <a:srgbClr val="E6EEEF"/>
           </a:solidFill>
           <a:ln>
             <a:noFill/>
@@ -18317,7 +18988,7 @@
           </a:fontRef>
         </p:style>
         <p:txBody>
-          <a:bodyPr rtlCol="0" anchor="ctr" lIns="0" rIns="0"/>
+          <a:bodyPr rtlCol="0" anchor="ctr" lIns="0" rIns="0" tIns="0" bIns="0"/>
           <a:lstStyle/>
           <a:p>
             <a:pPr algn="ctr"/>
@@ -18335,14 +19006,14 @@
       </p:sp>
       <p:sp>
         <p:nvSpPr>
-          <p:cNvPr id="15" name="TextBox 14"/>
+          <p:cNvPr id="16" name="TextBox 15"/>
           <p:cNvSpPr txBox="1"/>
           <p:nvPr/>
         </p:nvSpPr>
         <p:spPr>
           <a:xfrm>
-            <a:off x="1143000" y="4152519"/>
-            <a:ext cx="10500055" cy="792861"/>
+            <a:off x="1143000" y="4434154"/>
+            <a:ext cx="10500055" cy="674903"/>
           </a:xfrm>
           <a:prstGeom prst="rect">
             <a:avLst/>
@@ -18369,20 +19040,20 @@
       </p:sp>
       <p:sp>
         <p:nvSpPr>
-          <p:cNvPr id="16" name="Oval 15"/>
+          <p:cNvPr id="17" name="Oval 16"/>
           <p:cNvSpPr/>
           <p:nvPr/>
         </p:nvSpPr>
         <p:spPr>
           <a:xfrm>
-            <a:off x="548640" y="4972811"/>
+            <a:off x="548640" y="5136489"/>
             <a:ext cx="402336" cy="402336"/>
           </a:xfrm>
           <a:prstGeom prst="ellipse">
             <a:avLst/>
           </a:prstGeom>
           <a:solidFill>
-            <a:srgbClr val="E0EEF0"/>
+            <a:srgbClr val="E6EEEF"/>
           </a:solidFill>
           <a:ln>
             <a:noFill/>
@@ -18404,7 +19075,7 @@
           </a:fontRef>
         </p:style>
         <p:txBody>
-          <a:bodyPr rtlCol="0" anchor="ctr" lIns="0" rIns="0"/>
+          <a:bodyPr rtlCol="0" anchor="ctr" lIns="0" rIns="0" tIns="0" bIns="0"/>
           <a:lstStyle/>
           <a:p>
             <a:pPr algn="ctr"/>
@@ -18422,14 +19093,14 @@
       </p:sp>
       <p:sp>
         <p:nvSpPr>
-          <p:cNvPr id="17" name="TextBox 16"/>
+          <p:cNvPr id="18" name="TextBox 17"/>
           <p:cNvSpPr txBox="1"/>
           <p:nvPr/>
         </p:nvSpPr>
         <p:spPr>
           <a:xfrm>
-            <a:off x="1143000" y="4991100"/>
-            <a:ext cx="10500055" cy="1126236"/>
+            <a:off x="1143000" y="5154777"/>
+            <a:ext cx="10500055" cy="1008278"/>
           </a:xfrm>
           <a:prstGeom prst="rect">
             <a:avLst/>
@@ -18535,7 +19206,7 @@
           </a:fontRef>
         </p:style>
         <p:txBody>
-          <a:bodyPr rtlCol="0" anchor="ctr" lIns="0" rIns="0"/>
+          <a:bodyPr rtlCol="0" anchor="ctr" lIns="0" rIns="0" tIns="0" bIns="0"/>
           <a:lstStyle/>
           <a:p>
             <a:pPr algn="ctr"/>
@@ -18712,17 +19383,92 @@
           </a:prstGeom>
         </p:spPr>
       </p:pic>
+      <p:sp>
+        <p:nvSpPr>
+          <p:cNvPr id="8" name="TextBox 7"/>
+          <p:cNvSpPr txBox="1"/>
+          <p:nvPr/>
+        </p:nvSpPr>
+        <p:spPr>
+          <a:xfrm>
+            <a:off x="548640" y="1554480"/>
+            <a:ext cx="11094415" cy="1092708"/>
+          </a:xfrm>
+          <a:prstGeom prst="rect">
+            <a:avLst/>
+          </a:prstGeom>
+          <a:noFill/>
+        </p:spPr>
+        <p:txBody>
+          <a:bodyPr wrap="square" anchor="t" lIns="0" rIns="0" tIns="0" bIns="0">
+            <a:spAutoFit/>
+          </a:bodyPr>
+          <a:lstStyle/>
+          <a:p>
+            <a:pPr>
+              <a:spcAft>
+                <a:spcPts val="800"/>
+              </a:spcAft>
+            </a:pPr>
+            <a:r>
+              <a:rPr sz="1800" i="0" b="0">
+                <a:solidFill>
+                  <a:srgbClr val="2B211C"/>
+                </a:solidFill>
+                <a:latin typeface="Calibri"/>
+              </a:rPr>
+              <a:t>A </a:t>
+            </a:r>
+            <a:r>
+              <a:rPr sz="1800" i="0" b="1">
+                <a:solidFill>
+                  <a:srgbClr val="2B211C"/>
+                </a:solidFill>
+                <a:latin typeface="Calibri"/>
+              </a:rPr>
+              <a:t>medication error</a:t>
+            </a:r>
+            <a:r>
+              <a:rPr sz="1800" i="0" b="0">
+                <a:solidFill>
+                  <a:srgbClr val="2B211C"/>
+                </a:solidFill>
+                <a:latin typeface="Calibri"/>
+              </a:rPr>
+              <a:t> is any </a:t>
+            </a:r>
+            <a:r>
+              <a:rPr sz="1800" i="0" b="1">
+                <a:solidFill>
+                  <a:srgbClr val="2B211C"/>
+                </a:solidFill>
+                <a:latin typeface="Calibri"/>
+              </a:rPr>
+              <a:t>preventable</a:t>
+            </a:r>
+            <a:r>
+              <a:rPr sz="1800" i="0" b="0">
+                <a:solidFill>
+                  <a:srgbClr val="2B211C"/>
+                </a:solidFill>
+                <a:latin typeface="Calibri"/>
+              </a:rPr>
+              <a:t> event that may cause or lead to inappropriate medication use or patient harm while the medication is in the control of the health professional, patient or consumer.</a:t>
+            </a:r>
+          </a:p>
+        </p:txBody>
+      </p:sp>
       <p:graphicFrame>
         <p:nvGraphicFramePr>
-          <p:cNvPr id="8" name="Table 7"/>
+          <p:cNvPr id="9" name="Table 8"/>
           <p:cNvGraphicFramePr>
             <a:graphicFrameLocks noGrp="1"/>
           </p:cNvGraphicFramePr>
           <p:nvPr/>
         </p:nvGraphicFramePr>
         <p:xfrm>
-          <a:off x="548640" y="1600200"/>
-          <a:ext cx="11094414" cy="2331720"/>
+          <a:off x="548640" y="2830068"/>
+          <a:ext cx="11094414" cy="1920240"/>
         </p:xfrm>
         <a:graphic>
           <a:graphicData uri="http://schemas.openxmlformats.org/drawingml/2006/table">
@@ -18735,7 +19481,7 @@
                 <a:gridCol w="5077105"/>
                 <a:gridCol w="3948859"/>
               </a:tblGrid>
-              <a:tr h="777240">
+              <a:tr h="640080">
                 <a:tc>
                   <a:txBody>
                     <a:bodyPr/>
@@ -18803,7 +19549,7 @@
                   </a:tcPr>
                 </a:tc>
               </a:tr>
-              <a:tr h="777240">
+              <a:tr h="640080">
                 <a:tc>
                   <a:txBody>
                     <a:bodyPr/>
@@ -18871,7 +19617,7 @@
                   </a:tcPr>
                 </a:tc>
               </a:tr>
-              <a:tr h="777240">
+              <a:tr h="640080">
                 <a:tc>
                   <a:txBody>
                     <a:bodyPr/>
@@ -18890,7 +19636,7 @@
                   </a:txBody>
                   <a:tcPr marL="109728" marR="109728" marT="45720" marB="45720" anchor="ctr">
                     <a:solidFill>
-                      <a:srgbClr val="FBF3EE"/>
+                      <a:srgbClr val="FAF4F2"/>
                     </a:solidFill>
                   </a:tcPr>
                 </a:tc>
@@ -18912,7 +19658,7 @@
                   </a:txBody>
                   <a:tcPr marL="109728" marR="109728" marT="45720" marB="45720" anchor="ctr">
                     <a:solidFill>
-                      <a:srgbClr val="FBF3EE"/>
+                      <a:srgbClr val="FAF4F2"/>
                     </a:solidFill>
                   </a:tcPr>
                 </a:tc>
@@ -18934,7 +19680,7 @@
                   </a:txBody>
                   <a:tcPr marL="109728" marR="109728" marT="45720" marB="45720" anchor="ctr">
                     <a:solidFill>
-                      <a:srgbClr val="FBF3EE"/>
+                      <a:srgbClr val="FAF4F2"/>
                     </a:solidFill>
                   </a:tcPr>
                 </a:tc>
@@ -19006,7 +19752,7 @@
           </a:fontRef>
         </p:style>
         <p:txBody>
-          <a:bodyPr rtlCol="0" anchor="ctr" lIns="0" rIns="0"/>
+          <a:bodyPr rtlCol="0" anchor="ctr" lIns="0" rIns="0" tIns="0" bIns="0"/>
           <a:lstStyle/>
           <a:p>
             <a:pPr algn="ctr"/>
@@ -19183,17 +19929,72 @@
           </a:prstGeom>
         </p:spPr>
       </p:pic>
+      <p:sp>
+        <p:nvSpPr>
+          <p:cNvPr id="8" name="TextBox 7"/>
+          <p:cNvSpPr txBox="1"/>
+          <p:nvPr/>
+        </p:nvSpPr>
+        <p:spPr>
+          <a:xfrm>
+            <a:off x="548640" y="1554480"/>
+            <a:ext cx="11094415" cy="1202436"/>
+          </a:xfrm>
+          <a:prstGeom prst="rect">
+            <a:avLst/>
+          </a:prstGeom>
+          <a:noFill/>
+        </p:spPr>
+        <p:txBody>
+          <a:bodyPr wrap="square" anchor="t" lIns="0" rIns="0" tIns="0" bIns="0">
+            <a:spAutoFit/>
+          </a:bodyPr>
+          <a:lstStyle/>
+          <a:p>
+            <a:pPr>
+              <a:spcAft>
+                <a:spcPts val="800"/>
+              </a:spcAft>
+            </a:pPr>
+            <a:r>
+              <a:rPr sz="1800" i="0" b="0">
+                <a:solidFill>
+                  <a:srgbClr val="2B211C"/>
+                </a:solidFill>
+                <a:latin typeface="Calibri"/>
+              </a:rPr>
+              <a:t>Errors happen at every stage:</a:t>
+            </a:r>
+          </a:p>
+          <a:p>
+            <a:pPr>
+              <a:spcAft>
+                <a:spcPts val="800"/>
+              </a:spcAft>
+            </a:pPr>
+            <a:r>
+              <a:rPr sz="1800" i="0" b="0">
+                <a:solidFill>
+                  <a:srgbClr val="2B211C"/>
+                </a:solidFill>
+                <a:latin typeface="Calibri"/>
+              </a:rPr>
+              <a:t>Errors have many causes: lack of knowledge, slips and lapses (mental errors under pressure), unclear labels, and failures to check.</a:t>
+            </a:r>
+          </a:p>
+        </p:txBody>
+      </p:sp>
       <p:graphicFrame>
         <p:nvGraphicFramePr>
-          <p:cNvPr id="8" name="Table 7"/>
+          <p:cNvPr id="9" name="Table 8"/>
           <p:cNvGraphicFramePr>
             <a:graphicFrameLocks noGrp="1"/>
           </p:cNvGraphicFramePr>
           <p:nvPr/>
         </p:nvGraphicFramePr>
         <p:xfrm>
-          <a:off x="548640" y="1600200"/>
-          <a:ext cx="11094413" cy="3108960"/>
+          <a:off x="548640" y="2939796"/>
+          <a:ext cx="11094413" cy="2560320"/>
         </p:xfrm>
         <a:graphic>
           <a:graphicData uri="http://schemas.openxmlformats.org/drawingml/2006/table">
@@ -19206,7 +20007,7 @@
                 <a:gridCol w="4095253"/>
                 <a:gridCol w="5063222"/>
               </a:tblGrid>
-              <a:tr h="777240">
+              <a:tr h="640080">
                 <a:tc>
                   <a:txBody>
                     <a:bodyPr/>
@@ -19274,7 +20075,7 @@
                   </a:tcPr>
                 </a:tc>
               </a:tr>
-              <a:tr h="777240">
+              <a:tr h="640080">
                 <a:tc>
                   <a:txBody>
                     <a:bodyPr/>
@@ -19342,7 +20143,7 @@
                   </a:tcPr>
                 </a:tc>
               </a:tr>
-              <a:tr h="777240">
+              <a:tr h="640080">
                 <a:tc>
                   <a:txBody>
                     <a:bodyPr/>
@@ -19361,7 +20162,7 @@
                   </a:txBody>
                   <a:tcPr marL="109728" marR="109728" marT="45720" marB="45720" anchor="ctr">
                     <a:solidFill>
-                      <a:srgbClr val="FBF3EE"/>
+                      <a:srgbClr val="FAF4F2"/>
                     </a:solidFill>
                   </a:tcPr>
                 </a:tc>
@@ -19383,7 +20184,7 @@
                   </a:txBody>
                   <a:tcPr marL="109728" marR="109728" marT="45720" marB="45720" anchor="ctr">
                     <a:solidFill>
-                      <a:srgbClr val="FBF3EE"/>
+                      <a:srgbClr val="FAF4F2"/>
                     </a:solidFill>
                   </a:tcPr>
                 </a:tc>
@@ -19405,12 +20206,12 @@
                   </a:txBody>
                   <a:tcPr marL="109728" marR="109728" marT="45720" marB="45720" anchor="ctr">
                     <a:solidFill>
-                      <a:srgbClr val="FBF3EE"/>
+                      <a:srgbClr val="FAF4F2"/>
                     </a:solidFill>
                   </a:tcPr>
                 </a:tc>
               </a:tr>
-              <a:tr h="777240">
+              <a:tr h="640080">
                 <a:tc>
                   <a:txBody>
                     <a:bodyPr/>

--- a/projects/drug-information-practical/slides/ch09-pharmacovigilance-medication-errors.pptx
+++ b/projects/drug-information-practical/slides/ch09-pharmacovigilance-medication-errors.pptx
@@ -7090,7 +7090,7 @@
                     <a:lstStyle/>
                     <a:p>
                       <a:r>
-                        <a:rPr sz="1600" i="0" b="1">
+                        <a:rPr sz="1700" i="0" b="1">
                           <a:solidFill>
                             <a:srgbClr val="FFFFFF"/>
                           </a:solidFill>
@@ -7112,7 +7112,7 @@
                     <a:lstStyle/>
                     <a:p>
                       <a:r>
-                        <a:rPr sz="1600" i="0" b="1">
+                        <a:rPr sz="1700" i="0" b="1">
                           <a:solidFill>
                             <a:srgbClr val="FFFFFF"/>
                           </a:solidFill>
@@ -7136,7 +7136,7 @@
                     <a:lstStyle/>
                     <a:p>
                       <a:r>
-                        <a:rPr sz="1700" i="0" b="1">
+                        <a:rPr sz="1800" i="0" b="1">
                           <a:solidFill>
                             <a:srgbClr val="2B211C"/>
                           </a:solidFill>
@@ -7158,7 +7158,7 @@
                     <a:lstStyle/>
                     <a:p>
                       <a:r>
-                        <a:rPr sz="1700" i="0" b="0">
+                        <a:rPr sz="1800" i="0" b="0">
                           <a:solidFill>
                             <a:srgbClr val="2B211C"/>
                           </a:solidFill>
@@ -7182,7 +7182,7 @@
                     <a:lstStyle/>
                     <a:p>
                       <a:r>
-                        <a:rPr sz="1700" i="0" b="1">
+                        <a:rPr sz="1800" i="0" b="1">
                           <a:solidFill>
                             <a:srgbClr val="2B211C"/>
                           </a:solidFill>
@@ -7204,7 +7204,7 @@
                     <a:lstStyle/>
                     <a:p>
                       <a:r>
-                        <a:rPr sz="1700" i="0" b="0">
+                        <a:rPr sz="1800" i="0" b="0">
                           <a:solidFill>
                             <a:srgbClr val="2B211C"/>
                           </a:solidFill>
@@ -7228,7 +7228,7 @@
                     <a:lstStyle/>
                     <a:p>
                       <a:r>
-                        <a:rPr sz="1700" i="0" b="1">
+                        <a:rPr sz="1800" i="0" b="1">
                           <a:solidFill>
                             <a:srgbClr val="2B211C"/>
                           </a:solidFill>
@@ -7250,7 +7250,7 @@
                     <a:lstStyle/>
                     <a:p>
                       <a:r>
-                        <a:rPr sz="1700" i="0" b="0">
+                        <a:rPr sz="1800" i="0" b="0">
                           <a:solidFill>
                             <a:srgbClr val="2B211C"/>
                           </a:solidFill>
@@ -7274,7 +7274,7 @@
                     <a:lstStyle/>
                     <a:p>
                       <a:r>
-                        <a:rPr sz="1700" i="0" b="1">
+                        <a:rPr sz="1800" i="0" b="1">
                           <a:solidFill>
                             <a:srgbClr val="2B211C"/>
                           </a:solidFill>
@@ -7296,7 +7296,7 @@
                     <a:lstStyle/>
                     <a:p>
                       <a:r>
-                        <a:rPr sz="1700" i="0" b="0">
+                        <a:rPr sz="1800" i="0" b="0">
                           <a:solidFill>
                             <a:srgbClr val="2B211C"/>
                           </a:solidFill>

--- a/projects/drug-information-practical/slides/ch09-pharmacovigilance-medication-errors.pptx
+++ b/projects/drug-information-practical/slides/ch09-pharmacovigilance-medication-errors.pptx
@@ -5647,7 +5647,7 @@
     <p:bg>
       <p:bgPr>
         <a:solidFill>
-          <a:srgbClr val="FFFFFF"/>
+          <a:srgbClr val="F5EDE3"/>
         </a:solidFill>
         <a:effectLst/>
       </p:bgPr>
@@ -6193,7 +6193,7 @@
     <p:bg>
       <p:bgPr>
         <a:solidFill>
-          <a:srgbClr val="FFFFFF"/>
+          <a:srgbClr val="F5EDE3"/>
         </a:solidFill>
         <a:effectLst/>
       </p:bgPr>
@@ -6787,7 +6787,7 @@
     <p:bg>
       <p:bgPr>
         <a:solidFill>
-          <a:srgbClr val="FFFFFF"/>
+          <a:srgbClr val="F5EDE3"/>
         </a:solidFill>
         <a:effectLst/>
       </p:bgPr>
@@ -7331,7 +7331,7 @@
     <p:bg>
       <p:bgPr>
         <a:solidFill>
-          <a:srgbClr val="FFFFFF"/>
+          <a:srgbClr val="F5EDE3"/>
         </a:solidFill>
         <a:effectLst/>
       </p:bgPr>
@@ -7706,7 +7706,7 @@
     <p:bg>
       <p:bgPr>
         <a:solidFill>
-          <a:srgbClr val="FFFFFF"/>
+          <a:srgbClr val="F5EDE3"/>
         </a:solidFill>
         <a:effectLst/>
       </p:bgPr>
@@ -8081,7 +8081,7 @@
     <p:bg>
       <p:bgPr>
         <a:solidFill>
-          <a:srgbClr val="FFFFFF"/>
+          <a:srgbClr val="F5EDE3"/>
         </a:solidFill>
         <a:effectLst/>
       </p:bgPr>
@@ -8887,7 +8887,7 @@
     <p:bg>
       <p:bgPr>
         <a:solidFill>
-          <a:srgbClr val="FFFFFF"/>
+          <a:srgbClr val="F5EDE3"/>
         </a:solidFill>
         <a:effectLst/>
       </p:bgPr>
@@ -9736,7 +9736,7 @@
     <p:bg>
       <p:bgPr>
         <a:solidFill>
-          <a:srgbClr val="FFFFFF"/>
+          <a:srgbClr val="F5EDE3"/>
         </a:solidFill>
         <a:effectLst/>
       </p:bgPr>
@@ -10542,7 +10542,7 @@
     <p:bg>
       <p:bgPr>
         <a:solidFill>
-          <a:srgbClr val="FFFFFF"/>
+          <a:srgbClr val="F5EDE3"/>
         </a:solidFill>
         <a:effectLst/>
       </p:bgPr>
@@ -11391,7 +11391,7 @@
     <p:bg>
       <p:bgPr>
         <a:solidFill>
-          <a:srgbClr val="FFFFFF"/>
+          <a:srgbClr val="F5EDE3"/>
         </a:solidFill>
         <a:effectLst/>
       </p:bgPr>
@@ -12197,7 +12197,7 @@
     <p:bg>
       <p:bgPr>
         <a:solidFill>
-          <a:srgbClr val="FFFFFF"/>
+          <a:srgbClr val="F5EDE3"/>
         </a:solidFill>
         <a:effectLst/>
       </p:bgPr>
@@ -13022,7 +13022,7 @@
     <p:bg>
       <p:bgPr>
         <a:solidFill>
-          <a:srgbClr val="FFFFFF"/>
+          <a:srgbClr val="F5EDE3"/>
         </a:solidFill>
         <a:effectLst/>
       </p:bgPr>
@@ -13871,7 +13871,7 @@
     <p:bg>
       <p:bgPr>
         <a:solidFill>
-          <a:srgbClr val="FFFFFF"/>
+          <a:srgbClr val="F5EDE3"/>
         </a:solidFill>
         <a:effectLst/>
       </p:bgPr>
@@ -14677,7 +14677,7 @@
     <p:bg>
       <p:bgPr>
         <a:solidFill>
-          <a:srgbClr val="FFFFFF"/>
+          <a:srgbClr val="F5EDE3"/>
         </a:solidFill>
         <a:effectLst/>
       </p:bgPr>
@@ -15526,7 +15526,7 @@
     <p:bg>
       <p:bgPr>
         <a:solidFill>
-          <a:srgbClr val="FFFFFF"/>
+          <a:srgbClr val="F5EDE3"/>
         </a:solidFill>
         <a:effectLst/>
       </p:bgPr>
@@ -16332,7 +16332,7 @@
     <p:bg>
       <p:bgPr>
         <a:solidFill>
-          <a:srgbClr val="FFFFFF"/>
+          <a:srgbClr val="F5EDE3"/>
         </a:solidFill>
         <a:effectLst/>
       </p:bgPr>
@@ -17181,7 +17181,7 @@
     <p:bg>
       <p:bgPr>
         <a:solidFill>
-          <a:srgbClr val="FFFFFF"/>
+          <a:srgbClr val="F5EDE3"/>
         </a:solidFill>
         <a:effectLst/>
       </p:bgPr>
@@ -18070,7 +18070,7 @@
     <p:bg>
       <p:bgPr>
         <a:solidFill>
-          <a:srgbClr val="FFFFFF"/>
+          <a:srgbClr val="F5EDE3"/>
         </a:solidFill>
         <a:effectLst/>
       </p:bgPr>
@@ -18745,7 +18745,7 @@
     <p:bg>
       <p:bgPr>
         <a:solidFill>
-          <a:srgbClr val="FFFFFF"/>
+          <a:srgbClr val="F5EDE3"/>
         </a:solidFill>
         <a:effectLst/>
       </p:bgPr>
@@ -19094,7 +19094,7 @@
     <p:bg>
       <p:bgPr>
         <a:solidFill>
-          <a:srgbClr val="FFFFFF"/>
+          <a:srgbClr val="F5EDE3"/>
         </a:solidFill>
         <a:effectLst/>
       </p:bgPr>
@@ -19636,7 +19636,7 @@
     <p:bg>
       <p:bgPr>
         <a:solidFill>
-          <a:srgbClr val="FFFFFF"/>
+          <a:srgbClr val="F5EDE3"/>
         </a:solidFill>
         <a:effectLst/>
       </p:bgPr>
@@ -20308,7 +20308,7 @@
     <p:bg>
       <p:bgPr>
         <a:solidFill>
-          <a:srgbClr val="FFFFFF"/>
+          <a:srgbClr val="F5EDE3"/>
         </a:solidFill>
         <a:effectLst/>
       </p:bgPr>
@@ -20932,7 +20932,7 @@
     <p:bg>
       <p:bgPr>
         <a:solidFill>
-          <a:srgbClr val="FFFFFF"/>
+          <a:srgbClr val="F5EDE3"/>
         </a:solidFill>
         <a:effectLst/>
       </p:bgPr>
@@ -21208,7 +21208,7 @@
     <p:bg>
       <p:bgPr>
         <a:solidFill>
-          <a:srgbClr val="FFFFFF"/>
+          <a:srgbClr val="F5EDE3"/>
         </a:solidFill>
         <a:effectLst/>
       </p:bgPr>
